--- a/docs/review/TrustGate_Review_2026-08-27.pptx
+++ b/docs/review/TrustGate_Review_2026-08-27.pptx
@@ -5,26 +5,26 @@
     <p:sldMasterId id="2147483648" r:id="rId1"/>
   </p:sldMasterIdLst>
   <p:sldIdLst>
-    <p:sldId id="256" r:id="rId7"/>
-    <p:sldId id="257" r:id="rId8"/>
-    <p:sldId id="258" r:id="rId9"/>
-    <p:sldId id="259" r:id="rId10"/>
-    <p:sldId id="260" r:id="rId11"/>
-    <p:sldId id="261" r:id="rId12"/>
-    <p:sldId id="262" r:id="rId13"/>
-    <p:sldId id="263" r:id="rId14"/>
-    <p:sldId id="264" r:id="rId15"/>
-    <p:sldId id="265" r:id="rId16"/>
-    <p:sldId id="266" r:id="rId17"/>
-    <p:sldId id="267" r:id="rId18"/>
-    <p:sldId id="268" r:id="rId19"/>
-    <p:sldId id="269" r:id="rId20"/>
-    <p:sldId id="270" r:id="rId21"/>
-    <p:sldId id="271" r:id="rId22"/>
-    <p:sldId id="272" r:id="rId23"/>
-    <p:sldId id="273" r:id="rId24"/>
+    <p:sldId id="256" r:id="rId2"/>
+    <p:sldId id="257" r:id="rId3"/>
+    <p:sldId id="258" r:id="rId4"/>
+    <p:sldId id="259" r:id="rId5"/>
+    <p:sldId id="260" r:id="rId6"/>
+    <p:sldId id="261" r:id="rId7"/>
+    <p:sldId id="262" r:id="rId8"/>
+    <p:sldId id="263" r:id="rId9"/>
+    <p:sldId id="264" r:id="rId10"/>
+    <p:sldId id="265" r:id="rId11"/>
+    <p:sldId id="266" r:id="rId12"/>
+    <p:sldId id="267" r:id="rId13"/>
+    <p:sldId id="268" r:id="rId14"/>
+    <p:sldId id="269" r:id="rId15"/>
+    <p:sldId id="270" r:id="rId16"/>
+    <p:sldId id="271" r:id="rId17"/>
+    <p:sldId id="272" r:id="rId18"/>
+    <p:sldId id="273" r:id="rId19"/>
   </p:sldIdLst>
-  <p:sldSz cx="12191695" cy="6858000" type="screen4x3"/>
+  <p:sldSz cx="12192000" cy="6858000"/>
   <p:notesSz cx="6858000" cy="9144000"/>
   <p:defaultTextStyle>
     <a:defPPr>
@@ -121,6 +121,22 @@
       </a:defRPr>
     </a:lvl9pPr>
   </p:defaultTextStyle>
+  <p:extLst>
+    <p:ext uri="{EFAFB233-063F-42B5-8137-9DF3F51BA10A}">
+      <p15:sldGuideLst xmlns:p15="http://schemas.microsoft.com/office/powerpoint/2012/main">
+        <p15:guide id="1" orient="horz" pos="2160">
+          <p15:clr>
+            <a:srgbClr val="A4A3A4"/>
+          </p15:clr>
+        </p15:guide>
+        <p15:guide id="2" pos="2880">
+          <p15:clr>
+            <a:srgbClr val="A4A3A4"/>
+          </p15:clr>
+        </p15:guide>
+      </p15:sldGuideLst>
+    </p:ext>
+  </p:extLst>
 </p:presentation>
 </file>
 
@@ -162,10 +178,9 @@
           <a:lstStyle/>
           <a:p>
             <a:r>
-              <a:rPr lang="en-US" smtClean="0"/>
+              <a:rPr lang="en-US"/>
               <a:t>Click to edit Master title style</a:t>
             </a:r>
-            <a:endParaRPr lang="en-US"/>
           </a:p>
         </p:txBody>
       </p:sp>
@@ -281,10 +296,9 @@
           </a:lstStyle>
           <a:p>
             <a:r>
-              <a:rPr lang="en-US" smtClean="0"/>
+              <a:rPr lang="en-US"/>
               <a:t>Click to edit Master subtitle style</a:t>
             </a:r>
-            <a:endParaRPr lang="en-US"/>
           </a:p>
         </p:txBody>
       </p:sp>
@@ -305,7 +319,7 @@
           <a:p>
             <a:fld id="{5BCAD085-E8A6-8845-BD4E-CB4CCA059FC4}" type="datetimeFigureOut">
               <a:rPr lang="en-US" smtClean="0"/>
-              <a:t>1/27/13</a:t>
+              <a:t>8/28/2026</a:t>
             </a:fld>
             <a:endParaRPr lang="en-US"/>
           </a:p>
@@ -399,10 +413,9 @@
           <a:lstStyle/>
           <a:p>
             <a:r>
-              <a:rPr lang="en-US" smtClean="0"/>
+              <a:rPr lang="en-US"/>
               <a:t>Click to edit Master title style</a:t>
             </a:r>
-            <a:endParaRPr lang="en-US"/>
           </a:p>
         </p:txBody>
       </p:sp>
@@ -423,38 +436,37 @@
           <a:p>
             <a:pPr lvl="0"/>
             <a:r>
-              <a:rPr lang="en-US" smtClean="0"/>
+              <a:rPr lang="en-US"/>
               <a:t>Click to edit Master text styles</a:t>
             </a:r>
           </a:p>
           <a:p>
             <a:pPr lvl="1"/>
             <a:r>
-              <a:rPr lang="en-US" smtClean="0"/>
+              <a:rPr lang="en-US"/>
               <a:t>Second level</a:t>
             </a:r>
           </a:p>
           <a:p>
             <a:pPr lvl="2"/>
             <a:r>
-              <a:rPr lang="en-US" smtClean="0"/>
+              <a:rPr lang="en-US"/>
               <a:t>Third level</a:t>
             </a:r>
           </a:p>
           <a:p>
             <a:pPr lvl="3"/>
             <a:r>
-              <a:rPr lang="en-US" smtClean="0"/>
+              <a:rPr lang="en-US"/>
               <a:t>Fourth level</a:t>
             </a:r>
           </a:p>
           <a:p>
             <a:pPr lvl="4"/>
             <a:r>
-              <a:rPr lang="en-US" smtClean="0"/>
+              <a:rPr lang="en-US"/>
               <a:t>Fifth level</a:t>
             </a:r>
-            <a:endParaRPr lang="en-US"/>
           </a:p>
         </p:txBody>
       </p:sp>
@@ -475,7 +487,7 @@
           <a:p>
             <a:fld id="{5BCAD085-E8A6-8845-BD4E-CB4CCA059FC4}" type="datetimeFigureOut">
               <a:rPr lang="en-US" smtClean="0"/>
-              <a:t>1/27/13</a:t>
+              <a:t>8/28/2026</a:t>
             </a:fld>
             <a:endParaRPr lang="en-US"/>
           </a:p>
@@ -574,10 +586,9 @@
           <a:lstStyle/>
           <a:p>
             <a:r>
-              <a:rPr lang="en-US" smtClean="0"/>
+              <a:rPr lang="en-US"/>
               <a:t>Click to edit Master title style</a:t>
             </a:r>
-            <a:endParaRPr lang="en-US"/>
           </a:p>
         </p:txBody>
       </p:sp>
@@ -603,38 +614,37 @@
           <a:p>
             <a:pPr lvl="0"/>
             <a:r>
-              <a:rPr lang="en-US" smtClean="0"/>
+              <a:rPr lang="en-US"/>
               <a:t>Click to edit Master text styles</a:t>
             </a:r>
           </a:p>
           <a:p>
             <a:pPr lvl="1"/>
             <a:r>
-              <a:rPr lang="en-US" smtClean="0"/>
+              <a:rPr lang="en-US"/>
               <a:t>Second level</a:t>
             </a:r>
           </a:p>
           <a:p>
             <a:pPr lvl="2"/>
             <a:r>
-              <a:rPr lang="en-US" smtClean="0"/>
+              <a:rPr lang="en-US"/>
               <a:t>Third level</a:t>
             </a:r>
           </a:p>
           <a:p>
             <a:pPr lvl="3"/>
             <a:r>
-              <a:rPr lang="en-US" smtClean="0"/>
+              <a:rPr lang="en-US"/>
               <a:t>Fourth level</a:t>
             </a:r>
           </a:p>
           <a:p>
             <a:pPr lvl="4"/>
             <a:r>
-              <a:rPr lang="en-US" smtClean="0"/>
+              <a:rPr lang="en-US"/>
               <a:t>Fifth level</a:t>
             </a:r>
-            <a:endParaRPr lang="en-US"/>
           </a:p>
         </p:txBody>
       </p:sp>
@@ -655,7 +665,7 @@
           <a:p>
             <a:fld id="{5BCAD085-E8A6-8845-BD4E-CB4CCA059FC4}" type="datetimeFigureOut">
               <a:rPr lang="en-US" smtClean="0"/>
-              <a:t>1/27/13</a:t>
+              <a:t>8/28/2026</a:t>
             </a:fld>
             <a:endParaRPr lang="en-US"/>
           </a:p>
@@ -749,10 +759,9 @@
           <a:lstStyle/>
           <a:p>
             <a:r>
-              <a:rPr lang="en-US" smtClean="0"/>
+              <a:rPr lang="en-US"/>
               <a:t>Click to edit Master title style</a:t>
             </a:r>
-            <a:endParaRPr lang="en-US"/>
           </a:p>
         </p:txBody>
       </p:sp>
@@ -773,38 +782,37 @@
           <a:p>
             <a:pPr lvl="0"/>
             <a:r>
-              <a:rPr lang="en-US" smtClean="0"/>
+              <a:rPr lang="en-US"/>
               <a:t>Click to edit Master text styles</a:t>
             </a:r>
           </a:p>
           <a:p>
             <a:pPr lvl="1"/>
             <a:r>
-              <a:rPr lang="en-US" smtClean="0"/>
+              <a:rPr lang="en-US"/>
               <a:t>Second level</a:t>
             </a:r>
           </a:p>
           <a:p>
             <a:pPr lvl="2"/>
             <a:r>
-              <a:rPr lang="en-US" smtClean="0"/>
+              <a:rPr lang="en-US"/>
               <a:t>Third level</a:t>
             </a:r>
           </a:p>
           <a:p>
             <a:pPr lvl="3"/>
             <a:r>
-              <a:rPr lang="en-US" smtClean="0"/>
+              <a:rPr lang="en-US"/>
               <a:t>Fourth level</a:t>
             </a:r>
           </a:p>
           <a:p>
             <a:pPr lvl="4"/>
             <a:r>
-              <a:rPr lang="en-US" smtClean="0"/>
+              <a:rPr lang="en-US"/>
               <a:t>Fifth level</a:t>
             </a:r>
-            <a:endParaRPr lang="en-US"/>
           </a:p>
         </p:txBody>
       </p:sp>
@@ -825,7 +833,7 @@
           <a:p>
             <a:fld id="{5BCAD085-E8A6-8845-BD4E-CB4CCA059FC4}" type="datetimeFigureOut">
               <a:rPr lang="en-US" smtClean="0"/>
-              <a:t>1/27/13</a:t>
+              <a:t>8/28/2026</a:t>
             </a:fld>
             <a:endParaRPr lang="en-US"/>
           </a:p>
@@ -928,10 +936,9 @@
           </a:lstStyle>
           <a:p>
             <a:r>
-              <a:rPr lang="en-US" smtClean="0"/>
+              <a:rPr lang="en-US"/>
               <a:t>Click to edit Master title style</a:t>
             </a:r>
-            <a:endParaRPr lang="en-US"/>
           </a:p>
         </p:txBody>
       </p:sp>
@@ -1048,7 +1055,7 @@
           <a:p>
             <a:pPr lvl="0"/>
             <a:r>
-              <a:rPr lang="en-US" smtClean="0"/>
+              <a:rPr lang="en-US"/>
               <a:t>Click to edit Master text styles</a:t>
             </a:r>
           </a:p>
@@ -1071,7 +1078,7 @@
           <a:p>
             <a:fld id="{5BCAD085-E8A6-8845-BD4E-CB4CCA059FC4}" type="datetimeFigureOut">
               <a:rPr lang="en-US" smtClean="0"/>
-              <a:t>1/27/13</a:t>
+              <a:t>8/28/2026</a:t>
             </a:fld>
             <a:endParaRPr lang="en-US"/>
           </a:p>
@@ -1165,10 +1172,9 @@
           <a:lstStyle/>
           <a:p>
             <a:r>
-              <a:rPr lang="en-US" smtClean="0"/>
+              <a:rPr lang="en-US"/>
               <a:t>Click to edit Master title style</a:t>
             </a:r>
-            <a:endParaRPr lang="en-US"/>
           </a:p>
         </p:txBody>
       </p:sp>
@@ -1222,38 +1228,37 @@
           <a:p>
             <a:pPr lvl="0"/>
             <a:r>
-              <a:rPr lang="en-US" smtClean="0"/>
+              <a:rPr lang="en-US"/>
               <a:t>Click to edit Master text styles</a:t>
             </a:r>
           </a:p>
           <a:p>
             <a:pPr lvl="1"/>
             <a:r>
-              <a:rPr lang="en-US" smtClean="0"/>
+              <a:rPr lang="en-US"/>
               <a:t>Second level</a:t>
             </a:r>
           </a:p>
           <a:p>
             <a:pPr lvl="2"/>
             <a:r>
-              <a:rPr lang="en-US" smtClean="0"/>
+              <a:rPr lang="en-US"/>
               <a:t>Third level</a:t>
             </a:r>
           </a:p>
           <a:p>
             <a:pPr lvl="3"/>
             <a:r>
-              <a:rPr lang="en-US" smtClean="0"/>
+              <a:rPr lang="en-US"/>
               <a:t>Fourth level</a:t>
             </a:r>
           </a:p>
           <a:p>
             <a:pPr lvl="4"/>
             <a:r>
-              <a:rPr lang="en-US" smtClean="0"/>
+              <a:rPr lang="en-US"/>
               <a:t>Fifth level</a:t>
             </a:r>
-            <a:endParaRPr lang="en-US"/>
           </a:p>
         </p:txBody>
       </p:sp>
@@ -1307,38 +1312,37 @@
           <a:p>
             <a:pPr lvl="0"/>
             <a:r>
-              <a:rPr lang="en-US" smtClean="0"/>
+              <a:rPr lang="en-US"/>
               <a:t>Click to edit Master text styles</a:t>
             </a:r>
           </a:p>
           <a:p>
             <a:pPr lvl="1"/>
             <a:r>
-              <a:rPr lang="en-US" smtClean="0"/>
+              <a:rPr lang="en-US"/>
               <a:t>Second level</a:t>
             </a:r>
           </a:p>
           <a:p>
             <a:pPr lvl="2"/>
             <a:r>
-              <a:rPr lang="en-US" smtClean="0"/>
+              <a:rPr lang="en-US"/>
               <a:t>Third level</a:t>
             </a:r>
           </a:p>
           <a:p>
             <a:pPr lvl="3"/>
             <a:r>
-              <a:rPr lang="en-US" smtClean="0"/>
+              <a:rPr lang="en-US"/>
               <a:t>Fourth level</a:t>
             </a:r>
           </a:p>
           <a:p>
             <a:pPr lvl="4"/>
             <a:r>
-              <a:rPr lang="en-US" smtClean="0"/>
+              <a:rPr lang="en-US"/>
               <a:t>Fifth level</a:t>
             </a:r>
-            <a:endParaRPr lang="en-US"/>
           </a:p>
         </p:txBody>
       </p:sp>
@@ -1359,7 +1363,7 @@
           <a:p>
             <a:fld id="{5BCAD085-E8A6-8845-BD4E-CB4CCA059FC4}" type="datetimeFigureOut">
               <a:rPr lang="en-US" smtClean="0"/>
-              <a:t>1/27/13</a:t>
+              <a:t>8/28/2026</a:t>
             </a:fld>
             <a:endParaRPr lang="en-US"/>
           </a:p>
@@ -1457,10 +1461,9 @@
           </a:lstStyle>
           <a:p>
             <a:r>
-              <a:rPr lang="en-US" smtClean="0"/>
+              <a:rPr lang="en-US"/>
               <a:t>Click to edit Master title style</a:t>
             </a:r>
-            <a:endParaRPr lang="en-US"/>
           </a:p>
         </p:txBody>
       </p:sp>
@@ -1523,7 +1526,7 @@
           <a:p>
             <a:pPr lvl="0"/>
             <a:r>
-              <a:rPr lang="en-US" smtClean="0"/>
+              <a:rPr lang="en-US"/>
               <a:t>Click to edit Master text styles</a:t>
             </a:r>
           </a:p>
@@ -1579,38 +1582,37 @@
           <a:p>
             <a:pPr lvl="0"/>
             <a:r>
-              <a:rPr lang="en-US" smtClean="0"/>
+              <a:rPr lang="en-US"/>
               <a:t>Click to edit Master text styles</a:t>
             </a:r>
           </a:p>
           <a:p>
             <a:pPr lvl="1"/>
             <a:r>
-              <a:rPr lang="en-US" smtClean="0"/>
+              <a:rPr lang="en-US"/>
               <a:t>Second level</a:t>
             </a:r>
           </a:p>
           <a:p>
             <a:pPr lvl="2"/>
             <a:r>
-              <a:rPr lang="en-US" smtClean="0"/>
+              <a:rPr lang="en-US"/>
               <a:t>Third level</a:t>
             </a:r>
           </a:p>
           <a:p>
             <a:pPr lvl="3"/>
             <a:r>
-              <a:rPr lang="en-US" smtClean="0"/>
+              <a:rPr lang="en-US"/>
               <a:t>Fourth level</a:t>
             </a:r>
           </a:p>
           <a:p>
             <a:pPr lvl="4"/>
             <a:r>
-              <a:rPr lang="en-US" smtClean="0"/>
+              <a:rPr lang="en-US"/>
               <a:t>Fifth level</a:t>
             </a:r>
-            <a:endParaRPr lang="en-US"/>
           </a:p>
         </p:txBody>
       </p:sp>
@@ -1673,7 +1675,7 @@
           <a:p>
             <a:pPr lvl="0"/>
             <a:r>
-              <a:rPr lang="en-US" smtClean="0"/>
+              <a:rPr lang="en-US"/>
               <a:t>Click to edit Master text styles</a:t>
             </a:r>
           </a:p>
@@ -1729,38 +1731,37 @@
           <a:p>
             <a:pPr lvl="0"/>
             <a:r>
-              <a:rPr lang="en-US" smtClean="0"/>
+              <a:rPr lang="en-US"/>
               <a:t>Click to edit Master text styles</a:t>
             </a:r>
           </a:p>
           <a:p>
             <a:pPr lvl="1"/>
             <a:r>
-              <a:rPr lang="en-US" smtClean="0"/>
+              <a:rPr lang="en-US"/>
               <a:t>Second level</a:t>
             </a:r>
           </a:p>
           <a:p>
             <a:pPr lvl="2"/>
             <a:r>
-              <a:rPr lang="en-US" smtClean="0"/>
+              <a:rPr lang="en-US"/>
               <a:t>Third level</a:t>
             </a:r>
           </a:p>
           <a:p>
             <a:pPr lvl="3"/>
             <a:r>
-              <a:rPr lang="en-US" smtClean="0"/>
+              <a:rPr lang="en-US"/>
               <a:t>Fourth level</a:t>
             </a:r>
           </a:p>
           <a:p>
             <a:pPr lvl="4"/>
             <a:r>
-              <a:rPr lang="en-US" smtClean="0"/>
+              <a:rPr lang="en-US"/>
               <a:t>Fifth level</a:t>
             </a:r>
-            <a:endParaRPr lang="en-US"/>
           </a:p>
         </p:txBody>
       </p:sp>
@@ -1781,7 +1782,7 @@
           <a:p>
             <a:fld id="{5BCAD085-E8A6-8845-BD4E-CB4CCA059FC4}" type="datetimeFigureOut">
               <a:rPr lang="en-US" smtClean="0"/>
-              <a:t>1/27/13</a:t>
+              <a:t>8/28/2026</a:t>
             </a:fld>
             <a:endParaRPr lang="en-US"/>
           </a:p>
@@ -1875,10 +1876,9 @@
           <a:lstStyle/>
           <a:p>
             <a:r>
-              <a:rPr lang="en-US" smtClean="0"/>
+              <a:rPr lang="en-US"/>
               <a:t>Click to edit Master title style</a:t>
             </a:r>
-            <a:endParaRPr lang="en-US"/>
           </a:p>
         </p:txBody>
       </p:sp>
@@ -1899,7 +1899,7 @@
           <a:p>
             <a:fld id="{5BCAD085-E8A6-8845-BD4E-CB4CCA059FC4}" type="datetimeFigureOut">
               <a:rPr lang="en-US" smtClean="0"/>
-              <a:t>1/27/13</a:t>
+              <a:t>8/28/2026</a:t>
             </a:fld>
             <a:endParaRPr lang="en-US"/>
           </a:p>
@@ -1994,7 +1994,7 @@
           <a:p>
             <a:fld id="{5BCAD085-E8A6-8845-BD4E-CB4CCA059FC4}" type="datetimeFigureOut">
               <a:rPr lang="en-US" smtClean="0"/>
-              <a:t>1/27/13</a:t>
+              <a:t>8/28/2026</a:t>
             </a:fld>
             <a:endParaRPr lang="en-US"/>
           </a:p>
@@ -2097,10 +2097,9 @@
           </a:lstStyle>
           <a:p>
             <a:r>
-              <a:rPr lang="en-US" smtClean="0"/>
+              <a:rPr lang="en-US"/>
               <a:t>Click to edit Master title style</a:t>
             </a:r>
-            <a:endParaRPr lang="en-US"/>
           </a:p>
         </p:txBody>
       </p:sp>
@@ -2154,38 +2153,37 @@
           <a:p>
             <a:pPr lvl="0"/>
             <a:r>
-              <a:rPr lang="en-US" smtClean="0"/>
+              <a:rPr lang="en-US"/>
               <a:t>Click to edit Master text styles</a:t>
             </a:r>
           </a:p>
           <a:p>
             <a:pPr lvl="1"/>
             <a:r>
-              <a:rPr lang="en-US" smtClean="0"/>
+              <a:rPr lang="en-US"/>
               <a:t>Second level</a:t>
             </a:r>
           </a:p>
           <a:p>
             <a:pPr lvl="2"/>
             <a:r>
-              <a:rPr lang="en-US" smtClean="0"/>
+              <a:rPr lang="en-US"/>
               <a:t>Third level</a:t>
             </a:r>
           </a:p>
           <a:p>
             <a:pPr lvl="3"/>
             <a:r>
-              <a:rPr lang="en-US" smtClean="0"/>
+              <a:rPr lang="en-US"/>
               <a:t>Fourth level</a:t>
             </a:r>
           </a:p>
           <a:p>
             <a:pPr lvl="4"/>
             <a:r>
-              <a:rPr lang="en-US" smtClean="0"/>
+              <a:rPr lang="en-US"/>
               <a:t>Fifth level</a:t>
             </a:r>
-            <a:endParaRPr lang="en-US"/>
           </a:p>
         </p:txBody>
       </p:sp>
@@ -2248,7 +2246,7 @@
           <a:p>
             <a:pPr lvl="0"/>
             <a:r>
-              <a:rPr lang="en-US" smtClean="0"/>
+              <a:rPr lang="en-US"/>
               <a:t>Click to edit Master text styles</a:t>
             </a:r>
           </a:p>
@@ -2271,7 +2269,7 @@
           <a:p>
             <a:fld id="{5BCAD085-E8A6-8845-BD4E-CB4CCA059FC4}" type="datetimeFigureOut">
               <a:rPr lang="en-US" smtClean="0"/>
-              <a:t>1/27/13</a:t>
+              <a:t>8/28/2026</a:t>
             </a:fld>
             <a:endParaRPr lang="en-US"/>
           </a:p>
@@ -2374,10 +2372,9 @@
           </a:lstStyle>
           <a:p>
             <a:r>
-              <a:rPr lang="en-US" smtClean="0"/>
+              <a:rPr lang="en-US"/>
               <a:t>Click to edit Master title style</a:t>
             </a:r>
-            <a:endParaRPr lang="en-US"/>
           </a:p>
         </p:txBody>
       </p:sp>
@@ -2501,7 +2498,7 @@
           <a:p>
             <a:pPr lvl="0"/>
             <a:r>
-              <a:rPr lang="en-US" smtClean="0"/>
+              <a:rPr lang="en-US"/>
               <a:t>Click to edit Master text styles</a:t>
             </a:r>
           </a:p>
@@ -2524,7 +2521,7 @@
           <a:p>
             <a:fld id="{5BCAD085-E8A6-8845-BD4E-CB4CCA059FC4}" type="datetimeFigureOut">
               <a:rPr lang="en-US" smtClean="0"/>
-              <a:t>1/27/13</a:t>
+              <a:t>8/28/2026</a:t>
             </a:fld>
             <a:endParaRPr lang="en-US"/>
           </a:p>
@@ -2633,10 +2630,9 @@
           <a:lstStyle/>
           <a:p>
             <a:r>
-              <a:rPr lang="en-US" smtClean="0"/>
+              <a:rPr lang="en-US"/>
               <a:t>Click to edit Master title style</a:t>
             </a:r>
-            <a:endParaRPr lang="en-US"/>
           </a:p>
         </p:txBody>
       </p:sp>
@@ -2667,38 +2663,37 @@
           <a:p>
             <a:pPr lvl="0"/>
             <a:r>
-              <a:rPr lang="en-US" smtClean="0"/>
+              <a:rPr lang="en-US"/>
               <a:t>Click to edit Master text styles</a:t>
             </a:r>
           </a:p>
           <a:p>
             <a:pPr lvl="1"/>
             <a:r>
-              <a:rPr lang="en-US" smtClean="0"/>
+              <a:rPr lang="en-US"/>
               <a:t>Second level</a:t>
             </a:r>
           </a:p>
           <a:p>
             <a:pPr lvl="2"/>
             <a:r>
-              <a:rPr lang="en-US" smtClean="0"/>
+              <a:rPr lang="en-US"/>
               <a:t>Third level</a:t>
             </a:r>
           </a:p>
           <a:p>
             <a:pPr lvl="3"/>
             <a:r>
-              <a:rPr lang="en-US" smtClean="0"/>
+              <a:rPr lang="en-US"/>
               <a:t>Fourth level</a:t>
             </a:r>
           </a:p>
           <a:p>
             <a:pPr lvl="4"/>
             <a:r>
-              <a:rPr lang="en-US" smtClean="0"/>
+              <a:rPr lang="en-US"/>
               <a:t>Fifth level</a:t>
             </a:r>
-            <a:endParaRPr lang="en-US"/>
           </a:p>
         </p:txBody>
       </p:sp>
@@ -2737,7 +2732,7 @@
           <a:p>
             <a:fld id="{5BCAD085-E8A6-8845-BD4E-CB4CCA059FC4}" type="datetimeFigureOut">
               <a:rPr lang="en-US" smtClean="0"/>
-              <a:t>1/27/13</a:t>
+              <a:t>8/28/2026</a:t>
             </a:fld>
             <a:endParaRPr lang="en-US"/>
           </a:p>
@@ -3096,7 +3091,7 @@
 </file>
 
 <file path=ppt/slides/slide1.xml><?xml version="1.0" encoding="utf-8"?>
-<p:sld xmlns:a="http://schemas.openxmlformats.org/drawingml/2006/main" xmlns:p="http://schemas.openxmlformats.org/presentationml/2006/main" xmlns:r="http://schemas.openxmlformats.org/officeDocument/2006/relationships">
+<p:sld xmlns:a="http://schemas.openxmlformats.org/drawingml/2006/main" xmlns:r="http://schemas.openxmlformats.org/officeDocument/2006/relationships" xmlns:p="http://schemas.openxmlformats.org/presentationml/2006/main">
   <p:cSld>
     <p:spTree>
       <p:nvGrpSpPr>
@@ -3104,7 +3099,14 @@
         <p:cNvGrpSpPr/>
         <p:nvPr/>
       </p:nvGrpSpPr>
-      <p:grpSpPr/>
+      <p:grpSpPr>
+        <a:xfrm>
+          <a:off x="0" y="0"/>
+          <a:ext cx="0" cy="0"/>
+          <a:chOff x="0" y="0"/>
+          <a:chExt cx="0" cy="0"/>
+        </a:xfrm>
+      </p:grpSpPr>
       <p:sp>
         <p:nvSpPr>
           <p:cNvPr id="2" name="Rectangle 1"/>
@@ -3146,6 +3148,7 @@
           <a:lstStyle/>
           <a:p>
             <a:pPr algn="ctr"/>
+            <a:endParaRPr/>
           </a:p>
         </p:txBody>
       </p:sp>
@@ -3190,6 +3193,7 @@
           <a:lstStyle/>
           <a:p>
             <a:pPr algn="ctr"/>
+            <a:endParaRPr/>
           </a:p>
         </p:txBody>
       </p:sp>
@@ -3234,6 +3238,7 @@
           <a:lstStyle/>
           <a:p>
             <a:pPr algn="ctr"/>
+            <a:endParaRPr/>
           </a:p>
         </p:txBody>
       </p:sp>
@@ -3278,6 +3283,7 @@
           <a:lstStyle/>
           <a:p>
             <a:pPr algn="ctr"/>
+            <a:endParaRPr/>
           </a:p>
         </p:txBody>
       </p:sp>
@@ -3298,7 +3304,7 @@
           <a:noFill/>
         </p:spPr>
         <p:txBody>
-          <a:bodyPr wrap="square" anchor="t" lIns="0" rIns="0" tIns="0" bIns="0">
+          <a:bodyPr wrap="square" lIns="0" tIns="0" rIns="0" bIns="0" anchor="t">
             <a:spAutoFit/>
           </a:bodyPr>
           <a:lstStyle/>
@@ -3337,7 +3343,7 @@
           <a:noFill/>
         </p:spPr>
         <p:txBody>
-          <a:bodyPr wrap="square" anchor="t" lIns="0" rIns="0" tIns="0" bIns="0">
+          <a:bodyPr wrap="square" lIns="0" tIns="0" rIns="0" bIns="0" anchor="t">
             <a:spAutoFit/>
           </a:bodyPr>
           <a:lstStyle/>
@@ -3416,6 +3422,7 @@
           <a:lstStyle/>
           <a:p>
             <a:pPr algn="ctr"/>
+            <a:endParaRPr/>
           </a:p>
         </p:txBody>
       </p:sp>
@@ -3436,7 +3443,7 @@
           <a:noFill/>
         </p:spPr>
         <p:txBody>
-          <a:bodyPr wrap="square" anchor="t" lIns="0" rIns="0" tIns="0" bIns="0">
+          <a:bodyPr wrap="square" lIns="0" tIns="0" rIns="0" bIns="0" anchor="t">
             <a:spAutoFit/>
           </a:bodyPr>
           <a:lstStyle/>
@@ -3475,7 +3482,7 @@
           <a:noFill/>
         </p:spPr>
         <p:txBody>
-          <a:bodyPr wrap="square" anchor="t" lIns="0" rIns="0" tIns="0" bIns="0">
+          <a:bodyPr wrap="square" lIns="0" tIns="0" rIns="0" bIns="0" anchor="t">
             <a:spAutoFit/>
           </a:bodyPr>
           <a:lstStyle/>
@@ -3538,6 +3545,7 @@
           <a:lstStyle/>
           <a:p>
             <a:pPr algn="ctr"/>
+            <a:endParaRPr/>
           </a:p>
         </p:txBody>
       </p:sp>
@@ -3558,7 +3566,7 @@
           <a:noFill/>
         </p:spPr>
         <p:txBody>
-          <a:bodyPr wrap="square" anchor="t" lIns="0" rIns="0" tIns="0" bIns="0">
+          <a:bodyPr wrap="square" lIns="0" tIns="0" rIns="0" bIns="0" anchor="t">
             <a:spAutoFit/>
           </a:bodyPr>
           <a:lstStyle/>
@@ -3637,6 +3645,7 @@
           <a:lstStyle/>
           <a:p>
             <a:pPr algn="ctr"/>
+            <a:endParaRPr/>
           </a:p>
         </p:txBody>
       </p:sp>
@@ -3657,7 +3666,7 @@
           <a:noFill/>
         </p:spPr>
         <p:txBody>
-          <a:bodyPr wrap="square" anchor="t" lIns="0" rIns="0" tIns="0" bIns="0">
+          <a:bodyPr wrap="square" lIns="0" tIns="0" rIns="0" bIns="0" anchor="t">
             <a:spAutoFit/>
           </a:bodyPr>
           <a:lstStyle/>
@@ -3736,6 +3745,7 @@
           <a:lstStyle/>
           <a:p>
             <a:pPr algn="ctr"/>
+            <a:endParaRPr/>
           </a:p>
         </p:txBody>
       </p:sp>
@@ -3756,7 +3766,7 @@
           <a:noFill/>
         </p:spPr>
         <p:txBody>
-          <a:bodyPr wrap="square" anchor="t" lIns="0" rIns="0" tIns="0" bIns="0">
+          <a:bodyPr wrap="square" lIns="0" tIns="0" rIns="0" bIns="0" anchor="t">
             <a:spAutoFit/>
           </a:bodyPr>
           <a:lstStyle/>
@@ -3803,7 +3813,7 @@
         <p:spPr>
           <a:xfrm>
             <a:off x="795528" y="5870448"/>
-            <a:ext cx="10058400" cy="320040"/>
+            <a:ext cx="10058400" cy="176972"/>
           </a:xfrm>
           <a:prstGeom prst="rect">
             <a:avLst/>
@@ -3811,7 +3821,7 @@
           <a:noFill/>
         </p:spPr>
         <p:txBody>
-          <a:bodyPr wrap="square" anchor="t" lIns="0" rIns="0" tIns="0" bIns="0">
+          <a:bodyPr wrap="square" lIns="0" tIns="0" rIns="0" bIns="0" anchor="t">
             <a:spAutoFit/>
           </a:bodyPr>
           <a:lstStyle/>
@@ -3822,13 +3832,13 @@
               </a:spcAft>
             </a:pPr>
             <a:r>
-              <a:rPr sz="1150" b="0">
+              <a:rPr sz="1150" b="0" dirty="0">
                 <a:solidFill>
                   <a:srgbClr val="8A97A2"/>
                 </a:solidFill>
                 <a:latin typeface="Segoe UI"/>
               </a:rPr>
-              <a:t>Project Review  ·  August 2026  ·  Phase 1 implementation complete  ·  no measurement yet  ·  spend $0 of $325</a:t>
+              <a:t>Project Review  ·  August 2026  ·  Phase 1 implementation complete  ·  no measurement yet</a:t>
             </a:r>
           </a:p>
         </p:txBody>
@@ -3842,7 +3852,7 @@
 </file>
 
 <file path=ppt/slides/slide10.xml><?xml version="1.0" encoding="utf-8"?>
-<p:sld xmlns:a="http://schemas.openxmlformats.org/drawingml/2006/main" xmlns:p="http://schemas.openxmlformats.org/presentationml/2006/main" xmlns:r="http://schemas.openxmlformats.org/officeDocument/2006/relationships">
+<p:sld xmlns:a="http://schemas.openxmlformats.org/drawingml/2006/main" xmlns:r="http://schemas.openxmlformats.org/officeDocument/2006/relationships" xmlns:p="http://schemas.openxmlformats.org/presentationml/2006/main">
   <p:cSld>
     <p:spTree>
       <p:nvGrpSpPr>
@@ -3850,7 +3860,14 @@
         <p:cNvGrpSpPr/>
         <p:nvPr/>
       </p:nvGrpSpPr>
-      <p:grpSpPr/>
+      <p:grpSpPr>
+        <a:xfrm>
+          <a:off x="0" y="0"/>
+          <a:ext cx="0" cy="0"/>
+          <a:chOff x="0" y="0"/>
+          <a:chExt cx="0" cy="0"/>
+        </a:xfrm>
+      </p:grpSpPr>
       <p:sp>
         <p:nvSpPr>
           <p:cNvPr id="2" name="Rectangle 1"/>
@@ -3892,6 +3909,7 @@
           <a:lstStyle/>
           <a:p>
             <a:pPr algn="ctr"/>
+            <a:endParaRPr/>
           </a:p>
         </p:txBody>
       </p:sp>
@@ -3936,6 +3954,7 @@
           <a:lstStyle/>
           <a:p>
             <a:pPr algn="ctr"/>
+            <a:endParaRPr/>
           </a:p>
         </p:txBody>
       </p:sp>
@@ -3956,7 +3975,7 @@
           <a:noFill/>
         </p:spPr>
         <p:txBody>
-          <a:bodyPr wrap="square" anchor="t" lIns="0" rIns="0" tIns="0" bIns="0">
+          <a:bodyPr wrap="square" lIns="0" tIns="0" rIns="0" bIns="0" anchor="t">
             <a:spAutoFit/>
           </a:bodyPr>
           <a:lstStyle/>
@@ -3995,7 +4014,7 @@
           <a:noFill/>
         </p:spPr>
         <p:txBody>
-          <a:bodyPr wrap="square" anchor="t" lIns="0" rIns="0" tIns="0" bIns="0">
+          <a:bodyPr wrap="square" lIns="0" tIns="0" rIns="0" bIns="0" anchor="t">
             <a:spAutoFit/>
           </a:bodyPr>
           <a:lstStyle/>
@@ -4058,6 +4077,7 @@
           <a:lstStyle/>
           <a:p>
             <a:pPr algn="ctr"/>
+            <a:endParaRPr/>
           </a:p>
         </p:txBody>
       </p:sp>
@@ -4078,7 +4098,7 @@
           <a:noFill/>
         </p:spPr>
         <p:txBody>
-          <a:bodyPr wrap="square" anchor="t" lIns="0" rIns="0" tIns="0" bIns="0">
+          <a:bodyPr wrap="square" lIns="0" tIns="0" rIns="0" bIns="0" anchor="t">
             <a:spAutoFit/>
           </a:bodyPr>
           <a:lstStyle/>
@@ -4117,7 +4137,7 @@
           <a:noFill/>
         </p:spPr>
         <p:txBody>
-          <a:bodyPr wrap="square" anchor="t" lIns="0" rIns="0" tIns="0" bIns="0">
+          <a:bodyPr wrap="square" lIns="0" tIns="0" rIns="0" bIns="0" anchor="t">
             <a:spAutoFit/>
           </a:bodyPr>
           <a:lstStyle/>
@@ -4180,6 +4200,7 @@
           <a:lstStyle/>
           <a:p>
             <a:pPr algn="ctr"/>
+            <a:endParaRPr/>
           </a:p>
         </p:txBody>
       </p:sp>
@@ -4200,7 +4221,7 @@
           <a:noFill/>
         </p:spPr>
         <p:txBody>
-          <a:bodyPr wrap="square" anchor="ctr" lIns="0" rIns="0" tIns="0" bIns="0">
+          <a:bodyPr wrap="square" lIns="0" tIns="0" rIns="0" bIns="0" anchor="ctr">
             <a:spAutoFit/>
           </a:bodyPr>
           <a:lstStyle/>
@@ -4239,7 +4260,7 @@
           <a:noFill/>
         </p:spPr>
         <p:txBody>
-          <a:bodyPr wrap="square" anchor="t" lIns="0" rIns="0" tIns="0" bIns="0">
+          <a:bodyPr wrap="square" lIns="0" tIns="0" rIns="0" bIns="0" anchor="t">
             <a:spAutoFit/>
           </a:bodyPr>
           <a:lstStyle/>
@@ -4318,6 +4339,7 @@
           <a:lstStyle/>
           <a:p>
             <a:pPr algn="ctr"/>
+            <a:endParaRPr/>
           </a:p>
         </p:txBody>
       </p:sp>
@@ -4338,7 +4360,7 @@
           <a:noFill/>
         </p:spPr>
         <p:txBody>
-          <a:bodyPr wrap="square" anchor="ctr" lIns="0" rIns="0" tIns="0" bIns="0">
+          <a:bodyPr wrap="square" lIns="0" tIns="0" rIns="0" bIns="0" anchor="ctr">
             <a:spAutoFit/>
           </a:bodyPr>
           <a:lstStyle/>
@@ -4377,7 +4399,7 @@
           <a:noFill/>
         </p:spPr>
         <p:txBody>
-          <a:bodyPr wrap="square" anchor="t" lIns="0" rIns="0" tIns="0" bIns="0">
+          <a:bodyPr wrap="square" lIns="0" tIns="0" rIns="0" bIns="0" anchor="t">
             <a:spAutoFit/>
           </a:bodyPr>
           <a:lstStyle/>
@@ -4456,6 +4478,7 @@
           <a:lstStyle/>
           <a:p>
             <a:pPr algn="ctr"/>
+            <a:endParaRPr/>
           </a:p>
         </p:txBody>
       </p:sp>
@@ -4476,7 +4499,7 @@
           <a:noFill/>
         </p:spPr>
         <p:txBody>
-          <a:bodyPr wrap="square" anchor="ctr" lIns="0" rIns="0" tIns="0" bIns="0">
+          <a:bodyPr wrap="square" lIns="0" tIns="0" rIns="0" bIns="0" anchor="ctr">
             <a:spAutoFit/>
           </a:bodyPr>
           <a:lstStyle/>
@@ -4515,7 +4538,7 @@
           <a:noFill/>
         </p:spPr>
         <p:txBody>
-          <a:bodyPr wrap="square" anchor="t" lIns="0" rIns="0" tIns="0" bIns="0">
+          <a:bodyPr wrap="square" lIns="0" tIns="0" rIns="0" bIns="0" anchor="t">
             <a:spAutoFit/>
           </a:bodyPr>
           <a:lstStyle/>
@@ -4572,14 +4595,32 @@
                 <a:tableStyleId>{5C22544A-7EE6-4342-B048-85BDC9FD1C3A}</a:tableStyleId>
               </a:tblPr>
               <a:tblGrid>
-                <a:gridCol w="4206240"/>
-                <a:gridCol w="1280160"/>
-                <a:gridCol w="5388559"/>
+                <a:gridCol w="4206240">
+                  <a:extLst>
+                    <a:ext uri="{9D8B030D-6E8A-4147-A177-3AD203B41FA5}">
+                      <a16:colId xmlns:a16="http://schemas.microsoft.com/office/drawing/2014/main" val="20000"/>
+                    </a:ext>
+                  </a:extLst>
+                </a:gridCol>
+                <a:gridCol w="1280160">
+                  <a:extLst>
+                    <a:ext uri="{9D8B030D-6E8A-4147-A177-3AD203B41FA5}">
+                      <a16:colId xmlns:a16="http://schemas.microsoft.com/office/drawing/2014/main" val="20001"/>
+                    </a:ext>
+                  </a:extLst>
+                </a:gridCol>
+                <a:gridCol w="5388559">
+                  <a:extLst>
+                    <a:ext uri="{9D8B030D-6E8A-4147-A177-3AD203B41FA5}">
+                      <a16:colId xmlns:a16="http://schemas.microsoft.com/office/drawing/2014/main" val="20002"/>
+                    </a:ext>
+                  </a:extLst>
+                </a:gridCol>
               </a:tblGrid>
               <a:tr h="365760">
                 <a:tc>
                   <a:txBody>
-                    <a:bodyPr wrap="square"/>
+                    <a:bodyPr/>
                     <a:lstStyle/>
                     <a:p>
                       <a:r>
@@ -4593,7 +4634,7 @@
                       </a:r>
                     </a:p>
                   </a:txBody>
-                  <a:tcPr anchor="ctr" marL="91440" marR="91440">
+                  <a:tcPr anchor="ctr">
                     <a:solidFill>
                       <a:srgbClr val="123045"/>
                     </a:solidFill>
@@ -4601,7 +4642,7 @@
                 </a:tc>
                 <a:tc>
                   <a:txBody>
-                    <a:bodyPr wrap="square"/>
+                    <a:bodyPr/>
                     <a:lstStyle/>
                     <a:p>
                       <a:r>
@@ -4615,7 +4656,7 @@
                       </a:r>
                     </a:p>
                   </a:txBody>
-                  <a:tcPr anchor="ctr" marL="91440" marR="91440">
+                  <a:tcPr anchor="ctr">
                     <a:solidFill>
                       <a:srgbClr val="123045"/>
                     </a:solidFill>
@@ -4623,7 +4664,7 @@
                 </a:tc>
                 <a:tc>
                   <a:txBody>
-                    <a:bodyPr wrap="square"/>
+                    <a:bodyPr/>
                     <a:lstStyle/>
                     <a:p>
                       <a:r>
@@ -4637,17 +4678,22 @@
                       </a:r>
                     </a:p>
                   </a:txBody>
-                  <a:tcPr anchor="ctr" marL="91440" marR="91440">
+                  <a:tcPr anchor="ctr">
                     <a:solidFill>
                       <a:srgbClr val="123045"/>
                     </a:solidFill>
                   </a:tcPr>
                 </a:tc>
+                <a:extLst>
+                  <a:ext uri="{0D108BD9-81ED-4DB2-BD59-A6C34878D82A}">
+                    <a16:rowId xmlns:a16="http://schemas.microsoft.com/office/drawing/2014/main" val="10000"/>
+                  </a:ext>
+                </a:extLst>
               </a:tr>
               <a:tr h="397764">
                 <a:tc>
                   <a:txBody>
-                    <a:bodyPr wrap="square"/>
+                    <a:bodyPr/>
                     <a:lstStyle/>
                     <a:p>
                       <a:r>
@@ -4661,7 +4707,7 @@
                       </a:r>
                     </a:p>
                   </a:txBody>
-                  <a:tcPr anchor="ctr" marL="91440" marR="91440">
+                  <a:tcPr anchor="ctr">
                     <a:solidFill>
                       <a:srgbClr val="E7F4EC"/>
                     </a:solidFill>
@@ -4669,7 +4715,7 @@
                 </a:tc>
                 <a:tc>
                   <a:txBody>
-                    <a:bodyPr wrap="square"/>
+                    <a:bodyPr/>
                     <a:lstStyle/>
                     <a:p>
                       <a:r>
@@ -4683,7 +4729,7 @@
                       </a:r>
                     </a:p>
                   </a:txBody>
-                  <a:tcPr anchor="ctr" marL="91440" marR="91440">
+                  <a:tcPr anchor="ctr">
                     <a:solidFill>
                       <a:srgbClr val="E7F4EC"/>
                     </a:solidFill>
@@ -4691,7 +4737,7 @@
                 </a:tc>
                 <a:tc>
                   <a:txBody>
-                    <a:bodyPr wrap="square"/>
+                    <a:bodyPr/>
                     <a:lstStyle/>
                     <a:p>
                       <a:r>
@@ -4705,17 +4751,22 @@
                       </a:r>
                     </a:p>
                   </a:txBody>
-                  <a:tcPr anchor="ctr" marL="91440" marR="91440">
+                  <a:tcPr anchor="ctr">
                     <a:solidFill>
                       <a:srgbClr val="E7F4EC"/>
                     </a:solidFill>
                   </a:tcPr>
                 </a:tc>
+                <a:extLst>
+                  <a:ext uri="{0D108BD9-81ED-4DB2-BD59-A6C34878D82A}">
+                    <a16:rowId xmlns:a16="http://schemas.microsoft.com/office/drawing/2014/main" val="10001"/>
+                  </a:ext>
+                </a:extLst>
               </a:tr>
               <a:tr h="397764">
                 <a:tc>
                   <a:txBody>
-                    <a:bodyPr wrap="square"/>
+                    <a:bodyPr/>
                     <a:lstStyle/>
                     <a:p>
                       <a:r>
@@ -4729,7 +4780,7 @@
                       </a:r>
                     </a:p>
                   </a:txBody>
-                  <a:tcPr anchor="ctr" marL="91440" marR="91440">
+                  <a:tcPr anchor="ctr">
                     <a:solidFill>
                       <a:srgbClr val="E7F4EC"/>
                     </a:solidFill>
@@ -4737,7 +4788,7 @@
                 </a:tc>
                 <a:tc>
                   <a:txBody>
-                    <a:bodyPr wrap="square"/>
+                    <a:bodyPr/>
                     <a:lstStyle/>
                     <a:p>
                       <a:r>
@@ -4751,7 +4802,7 @@
                       </a:r>
                     </a:p>
                   </a:txBody>
-                  <a:tcPr anchor="ctr" marL="91440" marR="91440">
+                  <a:tcPr anchor="ctr">
                     <a:solidFill>
                       <a:srgbClr val="E7F4EC"/>
                     </a:solidFill>
@@ -4759,7 +4810,7 @@
                 </a:tc>
                 <a:tc>
                   <a:txBody>
-                    <a:bodyPr wrap="square"/>
+                    <a:bodyPr/>
                     <a:lstStyle/>
                     <a:p>
                       <a:r>
@@ -4773,17 +4824,22 @@
                       </a:r>
                     </a:p>
                   </a:txBody>
-                  <a:tcPr anchor="ctr" marL="91440" marR="91440">
+                  <a:tcPr anchor="ctr">
                     <a:solidFill>
                       <a:srgbClr val="E7F4EC"/>
                     </a:solidFill>
                   </a:tcPr>
                 </a:tc>
+                <a:extLst>
+                  <a:ext uri="{0D108BD9-81ED-4DB2-BD59-A6C34878D82A}">
+                    <a16:rowId xmlns:a16="http://schemas.microsoft.com/office/drawing/2014/main" val="10002"/>
+                  </a:ext>
+                </a:extLst>
               </a:tr>
               <a:tr h="397764">
                 <a:tc>
                   <a:txBody>
-                    <a:bodyPr wrap="square"/>
+                    <a:bodyPr/>
                     <a:lstStyle/>
                     <a:p>
                       <a:r>
@@ -4797,7 +4853,7 @@
                       </a:r>
                     </a:p>
                   </a:txBody>
-                  <a:tcPr anchor="ctr" marL="91440" marR="91440">
+                  <a:tcPr anchor="ctr">
                     <a:solidFill>
                       <a:srgbClr val="E7F4EC"/>
                     </a:solidFill>
@@ -4805,7 +4861,7 @@
                 </a:tc>
                 <a:tc>
                   <a:txBody>
-                    <a:bodyPr wrap="square"/>
+                    <a:bodyPr/>
                     <a:lstStyle/>
                     <a:p>
                       <a:r>
@@ -4819,7 +4875,7 @@
                       </a:r>
                     </a:p>
                   </a:txBody>
-                  <a:tcPr anchor="ctr" marL="91440" marR="91440">
+                  <a:tcPr anchor="ctr">
                     <a:solidFill>
                       <a:srgbClr val="E7F4EC"/>
                     </a:solidFill>
@@ -4827,7 +4883,7 @@
                 </a:tc>
                 <a:tc>
                   <a:txBody>
-                    <a:bodyPr wrap="square"/>
+                    <a:bodyPr/>
                     <a:lstStyle/>
                     <a:p>
                       <a:r>
@@ -4841,17 +4897,22 @@
                       </a:r>
                     </a:p>
                   </a:txBody>
-                  <a:tcPr anchor="ctr" marL="91440" marR="91440">
+                  <a:tcPr anchor="ctr">
                     <a:solidFill>
                       <a:srgbClr val="E7F4EC"/>
                     </a:solidFill>
                   </a:tcPr>
                 </a:tc>
+                <a:extLst>
+                  <a:ext uri="{0D108BD9-81ED-4DB2-BD59-A6C34878D82A}">
+                    <a16:rowId xmlns:a16="http://schemas.microsoft.com/office/drawing/2014/main" val="10003"/>
+                  </a:ext>
+                </a:extLst>
               </a:tr>
               <a:tr h="397764">
                 <a:tc>
                   <a:txBody>
-                    <a:bodyPr wrap="square"/>
+                    <a:bodyPr/>
                     <a:lstStyle/>
                     <a:p>
                       <a:r>
@@ -4865,7 +4926,7 @@
                       </a:r>
                     </a:p>
                   </a:txBody>
-                  <a:tcPr anchor="ctr" marL="91440" marR="91440">
+                  <a:tcPr anchor="ctr">
                     <a:solidFill>
                       <a:srgbClr val="E7F4EC"/>
                     </a:solidFill>
@@ -4873,7 +4934,7 @@
                 </a:tc>
                 <a:tc>
                   <a:txBody>
-                    <a:bodyPr wrap="square"/>
+                    <a:bodyPr/>
                     <a:lstStyle/>
                     <a:p>
                       <a:r>
@@ -4887,7 +4948,7 @@
                       </a:r>
                     </a:p>
                   </a:txBody>
-                  <a:tcPr anchor="ctr" marL="91440" marR="91440">
+                  <a:tcPr anchor="ctr">
                     <a:solidFill>
                       <a:srgbClr val="E7F4EC"/>
                     </a:solidFill>
@@ -4895,7 +4956,7 @@
                 </a:tc>
                 <a:tc>
                   <a:txBody>
-                    <a:bodyPr wrap="square"/>
+                    <a:bodyPr/>
                     <a:lstStyle/>
                     <a:p>
                       <a:r>
@@ -4909,17 +4970,22 @@
                       </a:r>
                     </a:p>
                   </a:txBody>
-                  <a:tcPr anchor="ctr" marL="91440" marR="91440">
+                  <a:tcPr anchor="ctr">
                     <a:solidFill>
                       <a:srgbClr val="E7F4EC"/>
                     </a:solidFill>
                   </a:tcPr>
                 </a:tc>
+                <a:extLst>
+                  <a:ext uri="{0D108BD9-81ED-4DB2-BD59-A6C34878D82A}">
+                    <a16:rowId xmlns:a16="http://schemas.microsoft.com/office/drawing/2014/main" val="10004"/>
+                  </a:ext>
+                </a:extLst>
               </a:tr>
               <a:tr h="397764">
                 <a:tc>
                   <a:txBody>
-                    <a:bodyPr wrap="square"/>
+                    <a:bodyPr/>
                     <a:lstStyle/>
                     <a:p>
                       <a:r>
@@ -4933,7 +4999,7 @@
                       </a:r>
                     </a:p>
                   </a:txBody>
-                  <a:tcPr anchor="ctr" marL="91440" marR="91440">
+                  <a:tcPr anchor="ctr">
                     <a:solidFill>
                       <a:srgbClr val="E7F4EC"/>
                     </a:solidFill>
@@ -4941,7 +5007,7 @@
                 </a:tc>
                 <a:tc>
                   <a:txBody>
-                    <a:bodyPr wrap="square"/>
+                    <a:bodyPr/>
                     <a:lstStyle/>
                     <a:p>
                       <a:r>
@@ -4955,7 +5021,7 @@
                       </a:r>
                     </a:p>
                   </a:txBody>
-                  <a:tcPr anchor="ctr" marL="91440" marR="91440">
+                  <a:tcPr anchor="ctr">
                     <a:solidFill>
                       <a:srgbClr val="E7F4EC"/>
                     </a:solidFill>
@@ -4963,7 +5029,7 @@
                 </a:tc>
                 <a:tc>
                   <a:txBody>
-                    <a:bodyPr wrap="square"/>
+                    <a:bodyPr/>
                     <a:lstStyle/>
                     <a:p>
                       <a:r>
@@ -4977,17 +5043,22 @@
                       </a:r>
                     </a:p>
                   </a:txBody>
-                  <a:tcPr anchor="ctr" marL="91440" marR="91440">
+                  <a:tcPr anchor="ctr">
                     <a:solidFill>
                       <a:srgbClr val="E7F4EC"/>
                     </a:solidFill>
                   </a:tcPr>
                 </a:tc>
+                <a:extLst>
+                  <a:ext uri="{0D108BD9-81ED-4DB2-BD59-A6C34878D82A}">
+                    <a16:rowId xmlns:a16="http://schemas.microsoft.com/office/drawing/2014/main" val="10005"/>
+                  </a:ext>
+                </a:extLst>
               </a:tr>
               <a:tr h="397764">
                 <a:tc>
                   <a:txBody>
-                    <a:bodyPr wrap="square"/>
+                    <a:bodyPr/>
                     <a:lstStyle/>
                     <a:p>
                       <a:r>
@@ -5001,7 +5072,7 @@
                       </a:r>
                     </a:p>
                   </a:txBody>
-                  <a:tcPr anchor="ctr" marL="91440" marR="91440">
+                  <a:tcPr anchor="ctr">
                     <a:solidFill>
                       <a:srgbClr val="FDF1DF"/>
                     </a:solidFill>
@@ -5009,7 +5080,7 @@
                 </a:tc>
                 <a:tc>
                   <a:txBody>
-                    <a:bodyPr wrap="square"/>
+                    <a:bodyPr/>
                     <a:lstStyle/>
                     <a:p>
                       <a:r>
@@ -5023,7 +5094,7 @@
                       </a:r>
                     </a:p>
                   </a:txBody>
-                  <a:tcPr anchor="ctr" marL="91440" marR="91440">
+                  <a:tcPr anchor="ctr">
                     <a:solidFill>
                       <a:srgbClr val="FDF1DF"/>
                     </a:solidFill>
@@ -5031,7 +5102,7 @@
                 </a:tc>
                 <a:tc>
                   <a:txBody>
-                    <a:bodyPr wrap="square"/>
+                    <a:bodyPr/>
                     <a:lstStyle/>
                     <a:p>
                       <a:r>
@@ -5045,12 +5116,17 @@
                       </a:r>
                     </a:p>
                   </a:txBody>
-                  <a:tcPr anchor="ctr" marL="91440" marR="91440">
+                  <a:tcPr anchor="ctr">
                     <a:solidFill>
                       <a:srgbClr val="FDF1DF"/>
                     </a:solidFill>
                   </a:tcPr>
                 </a:tc>
+                <a:extLst>
+                  <a:ext uri="{0D108BD9-81ED-4DB2-BD59-A6C34878D82A}">
+                    <a16:rowId xmlns:a16="http://schemas.microsoft.com/office/drawing/2014/main" val="10006"/>
+                  </a:ext>
+                </a:extLst>
               </a:tr>
             </a:tbl>
           </a:graphicData>
@@ -5065,7 +5141,7 @@
 </file>
 
 <file path=ppt/slides/slide11.xml><?xml version="1.0" encoding="utf-8"?>
-<p:sld xmlns:a="http://schemas.openxmlformats.org/drawingml/2006/main" xmlns:p="http://schemas.openxmlformats.org/presentationml/2006/main" xmlns:r="http://schemas.openxmlformats.org/officeDocument/2006/relationships">
+<p:sld xmlns:a="http://schemas.openxmlformats.org/drawingml/2006/main" xmlns:r="http://schemas.openxmlformats.org/officeDocument/2006/relationships" xmlns:p="http://schemas.openxmlformats.org/presentationml/2006/main">
   <p:cSld>
     <p:spTree>
       <p:nvGrpSpPr>
@@ -5073,7 +5149,14 @@
         <p:cNvGrpSpPr/>
         <p:nvPr/>
       </p:nvGrpSpPr>
-      <p:grpSpPr/>
+      <p:grpSpPr>
+        <a:xfrm>
+          <a:off x="0" y="0"/>
+          <a:ext cx="0" cy="0"/>
+          <a:chOff x="0" y="0"/>
+          <a:chExt cx="0" cy="0"/>
+        </a:xfrm>
+      </p:grpSpPr>
       <p:sp>
         <p:nvSpPr>
           <p:cNvPr id="2" name="Rectangle 1"/>
@@ -5115,6 +5198,7 @@
           <a:lstStyle/>
           <a:p>
             <a:pPr algn="ctr"/>
+            <a:endParaRPr/>
           </a:p>
         </p:txBody>
       </p:sp>
@@ -5159,6 +5243,7 @@
           <a:lstStyle/>
           <a:p>
             <a:pPr algn="ctr"/>
+            <a:endParaRPr/>
           </a:p>
         </p:txBody>
       </p:sp>
@@ -5179,7 +5264,7 @@
           <a:noFill/>
         </p:spPr>
         <p:txBody>
-          <a:bodyPr wrap="square" anchor="t" lIns="0" rIns="0" tIns="0" bIns="0">
+          <a:bodyPr wrap="square" lIns="0" tIns="0" rIns="0" bIns="0" anchor="t">
             <a:spAutoFit/>
           </a:bodyPr>
           <a:lstStyle/>
@@ -5218,7 +5303,7 @@
           <a:noFill/>
         </p:spPr>
         <p:txBody>
-          <a:bodyPr wrap="square" anchor="t" lIns="0" rIns="0" tIns="0" bIns="0">
+          <a:bodyPr wrap="square" lIns="0" tIns="0" rIns="0" bIns="0" anchor="t">
             <a:spAutoFit/>
           </a:bodyPr>
           <a:lstStyle/>
@@ -5281,6 +5366,7 @@
           <a:lstStyle/>
           <a:p>
             <a:pPr algn="ctr"/>
+            <a:endParaRPr/>
           </a:p>
         </p:txBody>
       </p:sp>
@@ -5301,7 +5387,7 @@
           <a:noFill/>
         </p:spPr>
         <p:txBody>
-          <a:bodyPr wrap="square" anchor="t" lIns="0" rIns="0" tIns="0" bIns="0">
+          <a:bodyPr wrap="square" lIns="0" tIns="0" rIns="0" bIns="0" anchor="t">
             <a:spAutoFit/>
           </a:bodyPr>
           <a:lstStyle/>
@@ -5340,7 +5426,7 @@
           <a:noFill/>
         </p:spPr>
         <p:txBody>
-          <a:bodyPr wrap="square" anchor="t" lIns="0" rIns="0" tIns="0" bIns="0">
+          <a:bodyPr wrap="square" lIns="0" tIns="0" rIns="0" bIns="0" anchor="t">
             <a:spAutoFit/>
           </a:bodyPr>
           <a:lstStyle/>
@@ -5381,14 +5467,32 @@
                 <a:tableStyleId>{5C22544A-7EE6-4342-B048-85BDC9FD1C3A}</a:tableStyleId>
               </a:tblPr>
               <a:tblGrid>
-                <a:gridCol w="4114800"/>
-                <a:gridCol w="1737360"/>
-                <a:gridCol w="5022799"/>
+                <a:gridCol w="4114800">
+                  <a:extLst>
+                    <a:ext uri="{9D8B030D-6E8A-4147-A177-3AD203B41FA5}">
+                      <a16:colId xmlns:a16="http://schemas.microsoft.com/office/drawing/2014/main" val="20000"/>
+                    </a:ext>
+                  </a:extLst>
+                </a:gridCol>
+                <a:gridCol w="1737360">
+                  <a:extLst>
+                    <a:ext uri="{9D8B030D-6E8A-4147-A177-3AD203B41FA5}">
+                      <a16:colId xmlns:a16="http://schemas.microsoft.com/office/drawing/2014/main" val="20001"/>
+                    </a:ext>
+                  </a:extLst>
+                </a:gridCol>
+                <a:gridCol w="5022799">
+                  <a:extLst>
+                    <a:ext uri="{9D8B030D-6E8A-4147-A177-3AD203B41FA5}">
+                      <a16:colId xmlns:a16="http://schemas.microsoft.com/office/drawing/2014/main" val="20002"/>
+                    </a:ext>
+                  </a:extLst>
+                </a:gridCol>
               </a:tblGrid>
               <a:tr h="365760">
                 <a:tc>
                   <a:txBody>
-                    <a:bodyPr wrap="square"/>
+                    <a:bodyPr/>
                     <a:lstStyle/>
                     <a:p>
                       <a:r>
@@ -5402,7 +5506,7 @@
                       </a:r>
                     </a:p>
                   </a:txBody>
-                  <a:tcPr anchor="ctr" marL="91440" marR="91440">
+                  <a:tcPr anchor="ctr">
                     <a:solidFill>
                       <a:srgbClr val="123045"/>
                     </a:solidFill>
@@ -5410,7 +5514,7 @@
                 </a:tc>
                 <a:tc>
                   <a:txBody>
-                    <a:bodyPr wrap="square"/>
+                    <a:bodyPr/>
                     <a:lstStyle/>
                     <a:p>
                       <a:r>
@@ -5424,7 +5528,7 @@
                       </a:r>
                     </a:p>
                   </a:txBody>
-                  <a:tcPr anchor="ctr" marL="91440" marR="91440">
+                  <a:tcPr anchor="ctr">
                     <a:solidFill>
                       <a:srgbClr val="123045"/>
                     </a:solidFill>
@@ -5432,7 +5536,7 @@
                 </a:tc>
                 <a:tc>
                   <a:txBody>
-                    <a:bodyPr wrap="square"/>
+                    <a:bodyPr/>
                     <a:lstStyle/>
                     <a:p>
                       <a:r>
@@ -5446,17 +5550,22 @@
                       </a:r>
                     </a:p>
                   </a:txBody>
-                  <a:tcPr anchor="ctr" marL="91440" marR="91440">
+                  <a:tcPr anchor="ctr">
                     <a:solidFill>
                       <a:srgbClr val="123045"/>
                     </a:solidFill>
                   </a:tcPr>
                 </a:tc>
+                <a:extLst>
+                  <a:ext uri="{0D108BD9-81ED-4DB2-BD59-A6C34878D82A}">
+                    <a16:rowId xmlns:a16="http://schemas.microsoft.com/office/drawing/2014/main" val="10000"/>
+                  </a:ext>
+                </a:extLst>
               </a:tr>
               <a:tr h="397764">
                 <a:tc>
                   <a:txBody>
-                    <a:bodyPr wrap="square"/>
+                    <a:bodyPr/>
                     <a:lstStyle/>
                     <a:p>
                       <a:r>
@@ -5470,7 +5579,7 @@
                       </a:r>
                     </a:p>
                   </a:txBody>
-                  <a:tcPr anchor="ctr" marL="91440" marR="91440">
+                  <a:tcPr anchor="ctr">
                     <a:solidFill>
                       <a:srgbClr val="FBECEC"/>
                     </a:solidFill>
@@ -5478,7 +5587,7 @@
                 </a:tc>
                 <a:tc>
                   <a:txBody>
-                    <a:bodyPr wrap="square"/>
+                    <a:bodyPr/>
                     <a:lstStyle/>
                     <a:p>
                       <a:r>
@@ -5492,7 +5601,7 @@
                       </a:r>
                     </a:p>
                   </a:txBody>
-                  <a:tcPr anchor="ctr" marL="91440" marR="91440">
+                  <a:tcPr anchor="ctr">
                     <a:solidFill>
                       <a:srgbClr val="FBECEC"/>
                     </a:solidFill>
@@ -5500,7 +5609,7 @@
                 </a:tc>
                 <a:tc>
                   <a:txBody>
-                    <a:bodyPr wrap="square"/>
+                    <a:bodyPr/>
                     <a:lstStyle/>
                     <a:p>
                       <a:r>
@@ -5514,17 +5623,22 @@
                       </a:r>
                     </a:p>
                   </a:txBody>
-                  <a:tcPr anchor="ctr" marL="91440" marR="91440">
+                  <a:tcPr anchor="ctr">
                     <a:solidFill>
                       <a:srgbClr val="FBECEC"/>
                     </a:solidFill>
                   </a:tcPr>
                 </a:tc>
+                <a:extLst>
+                  <a:ext uri="{0D108BD9-81ED-4DB2-BD59-A6C34878D82A}">
+                    <a16:rowId xmlns:a16="http://schemas.microsoft.com/office/drawing/2014/main" val="10001"/>
+                  </a:ext>
+                </a:extLst>
               </a:tr>
               <a:tr h="397764">
                 <a:tc>
                   <a:txBody>
-                    <a:bodyPr wrap="square"/>
+                    <a:bodyPr/>
                     <a:lstStyle/>
                     <a:p>
                       <a:r>
@@ -5538,7 +5652,7 @@
                       </a:r>
                     </a:p>
                   </a:txBody>
-                  <a:tcPr anchor="ctr" marL="91440" marR="91440">
+                  <a:tcPr anchor="ctr">
                     <a:solidFill>
                       <a:srgbClr val="FBECEC"/>
                     </a:solidFill>
@@ -5546,7 +5660,7 @@
                 </a:tc>
                 <a:tc>
                   <a:txBody>
-                    <a:bodyPr wrap="square"/>
+                    <a:bodyPr/>
                     <a:lstStyle/>
                     <a:p>
                       <a:r>
@@ -5560,7 +5674,7 @@
                       </a:r>
                     </a:p>
                   </a:txBody>
-                  <a:tcPr anchor="ctr" marL="91440" marR="91440">
+                  <a:tcPr anchor="ctr">
                     <a:solidFill>
                       <a:srgbClr val="FBECEC"/>
                     </a:solidFill>
@@ -5568,7 +5682,7 @@
                 </a:tc>
                 <a:tc>
                   <a:txBody>
-                    <a:bodyPr wrap="square"/>
+                    <a:bodyPr/>
                     <a:lstStyle/>
                     <a:p>
                       <a:r>
@@ -5582,17 +5696,22 @@
                       </a:r>
                     </a:p>
                   </a:txBody>
-                  <a:tcPr anchor="ctr" marL="91440" marR="91440">
+                  <a:tcPr anchor="ctr">
                     <a:solidFill>
                       <a:srgbClr val="FBECEC"/>
                     </a:solidFill>
                   </a:tcPr>
                 </a:tc>
+                <a:extLst>
+                  <a:ext uri="{0D108BD9-81ED-4DB2-BD59-A6C34878D82A}">
+                    <a16:rowId xmlns:a16="http://schemas.microsoft.com/office/drawing/2014/main" val="10002"/>
+                  </a:ext>
+                </a:extLst>
               </a:tr>
               <a:tr h="397764">
                 <a:tc>
                   <a:txBody>
-                    <a:bodyPr wrap="square"/>
+                    <a:bodyPr/>
                     <a:lstStyle/>
                     <a:p>
                       <a:r>
@@ -5606,7 +5725,7 @@
                       </a:r>
                     </a:p>
                   </a:txBody>
-                  <a:tcPr anchor="ctr" marL="91440" marR="91440">
+                  <a:tcPr anchor="ctr">
                     <a:solidFill>
                       <a:srgbClr val="FDF1DF"/>
                     </a:solidFill>
@@ -5614,7 +5733,7 @@
                 </a:tc>
                 <a:tc>
                   <a:txBody>
-                    <a:bodyPr wrap="square"/>
+                    <a:bodyPr/>
                     <a:lstStyle/>
                     <a:p>
                       <a:r>
@@ -5628,7 +5747,7 @@
                       </a:r>
                     </a:p>
                   </a:txBody>
-                  <a:tcPr anchor="ctr" marL="91440" marR="91440">
+                  <a:tcPr anchor="ctr">
                     <a:solidFill>
                       <a:srgbClr val="FDF1DF"/>
                     </a:solidFill>
@@ -5636,7 +5755,7 @@
                 </a:tc>
                 <a:tc>
                   <a:txBody>
-                    <a:bodyPr wrap="square"/>
+                    <a:bodyPr/>
                     <a:lstStyle/>
                     <a:p>
                       <a:r>
@@ -5650,17 +5769,22 @@
                       </a:r>
                     </a:p>
                   </a:txBody>
-                  <a:tcPr anchor="ctr" marL="91440" marR="91440">
+                  <a:tcPr anchor="ctr">
                     <a:solidFill>
                       <a:srgbClr val="FDF1DF"/>
                     </a:solidFill>
                   </a:tcPr>
                 </a:tc>
+                <a:extLst>
+                  <a:ext uri="{0D108BD9-81ED-4DB2-BD59-A6C34878D82A}">
+                    <a16:rowId xmlns:a16="http://schemas.microsoft.com/office/drawing/2014/main" val="10003"/>
+                  </a:ext>
+                </a:extLst>
               </a:tr>
               <a:tr h="397764">
                 <a:tc>
                   <a:txBody>
-                    <a:bodyPr wrap="square"/>
+                    <a:bodyPr/>
                     <a:lstStyle/>
                     <a:p>
                       <a:r>
@@ -5674,7 +5798,7 @@
                       </a:r>
                     </a:p>
                   </a:txBody>
-                  <a:tcPr anchor="ctr" marL="91440" marR="91440">
+                  <a:tcPr anchor="ctr">
                     <a:solidFill>
                       <a:srgbClr val="FDF1DF"/>
                     </a:solidFill>
@@ -5682,7 +5806,7 @@
                 </a:tc>
                 <a:tc>
                   <a:txBody>
-                    <a:bodyPr wrap="square"/>
+                    <a:bodyPr/>
                     <a:lstStyle/>
                     <a:p>
                       <a:r>
@@ -5696,7 +5820,7 @@
                       </a:r>
                     </a:p>
                   </a:txBody>
-                  <a:tcPr anchor="ctr" marL="91440" marR="91440">
+                  <a:tcPr anchor="ctr">
                     <a:solidFill>
                       <a:srgbClr val="FDF1DF"/>
                     </a:solidFill>
@@ -5704,7 +5828,7 @@
                 </a:tc>
                 <a:tc>
                   <a:txBody>
-                    <a:bodyPr wrap="square"/>
+                    <a:bodyPr/>
                     <a:lstStyle/>
                     <a:p>
                       <a:r>
@@ -5718,17 +5842,22 @@
                       </a:r>
                     </a:p>
                   </a:txBody>
-                  <a:tcPr anchor="ctr" marL="91440" marR="91440">
+                  <a:tcPr anchor="ctr">
                     <a:solidFill>
                       <a:srgbClr val="FDF1DF"/>
                     </a:solidFill>
                   </a:tcPr>
                 </a:tc>
+                <a:extLst>
+                  <a:ext uri="{0D108BD9-81ED-4DB2-BD59-A6C34878D82A}">
+                    <a16:rowId xmlns:a16="http://schemas.microsoft.com/office/drawing/2014/main" val="10004"/>
+                  </a:ext>
+                </a:extLst>
               </a:tr>
               <a:tr h="397764">
                 <a:tc>
                   <a:txBody>
-                    <a:bodyPr wrap="square"/>
+                    <a:bodyPr/>
                     <a:lstStyle/>
                     <a:p>
                       <a:r>
@@ -5742,7 +5871,7 @@
                       </a:r>
                     </a:p>
                   </a:txBody>
-                  <a:tcPr anchor="ctr" marL="91440" marR="91440">
+                  <a:tcPr anchor="ctr">
                     <a:solidFill>
                       <a:srgbClr val="FDF1DF"/>
                     </a:solidFill>
@@ -5750,7 +5879,7 @@
                 </a:tc>
                 <a:tc>
                   <a:txBody>
-                    <a:bodyPr wrap="square"/>
+                    <a:bodyPr/>
                     <a:lstStyle/>
                     <a:p>
                       <a:r>
@@ -5764,7 +5893,7 @@
                       </a:r>
                     </a:p>
                   </a:txBody>
-                  <a:tcPr anchor="ctr" marL="91440" marR="91440">
+                  <a:tcPr anchor="ctr">
                     <a:solidFill>
                       <a:srgbClr val="FDF1DF"/>
                     </a:solidFill>
@@ -5772,7 +5901,7 @@
                 </a:tc>
                 <a:tc>
                   <a:txBody>
-                    <a:bodyPr wrap="square"/>
+                    <a:bodyPr/>
                     <a:lstStyle/>
                     <a:p>
                       <a:r>
@@ -5786,12 +5915,17 @@
                       </a:r>
                     </a:p>
                   </a:txBody>
-                  <a:tcPr anchor="ctr" marL="91440" marR="91440">
+                  <a:tcPr anchor="ctr">
                     <a:solidFill>
                       <a:srgbClr val="FDF1DF"/>
                     </a:solidFill>
                   </a:tcPr>
                 </a:tc>
+                <a:extLst>
+                  <a:ext uri="{0D108BD9-81ED-4DB2-BD59-A6C34878D82A}">
+                    <a16:rowId xmlns:a16="http://schemas.microsoft.com/office/drawing/2014/main" val="10005"/>
+                  </a:ext>
+                </a:extLst>
               </a:tr>
             </a:tbl>
           </a:graphicData>
@@ -5838,6 +5972,7 @@
           <a:lstStyle/>
           <a:p>
             <a:pPr algn="ctr"/>
+            <a:endParaRPr/>
           </a:p>
         </p:txBody>
       </p:sp>
@@ -5882,6 +6017,7 @@
           <a:lstStyle/>
           <a:p>
             <a:pPr algn="ctr"/>
+            <a:endParaRPr/>
           </a:p>
         </p:txBody>
       </p:sp>
@@ -5902,7 +6038,7 @@
           <a:noFill/>
         </p:spPr>
         <p:txBody>
-          <a:bodyPr wrap="square" anchor="t" lIns="0" rIns="0" tIns="0" bIns="0">
+          <a:bodyPr wrap="square" lIns="0" tIns="0" rIns="0" bIns="0" anchor="t">
             <a:spAutoFit/>
           </a:bodyPr>
           <a:lstStyle/>
@@ -5949,7 +6085,7 @@
 </file>
 
 <file path=ppt/slides/slide12.xml><?xml version="1.0" encoding="utf-8"?>
-<p:sld xmlns:a="http://schemas.openxmlformats.org/drawingml/2006/main" xmlns:p="http://schemas.openxmlformats.org/presentationml/2006/main" xmlns:r="http://schemas.openxmlformats.org/officeDocument/2006/relationships">
+<p:sld xmlns:a="http://schemas.openxmlformats.org/drawingml/2006/main" xmlns:r="http://schemas.openxmlformats.org/officeDocument/2006/relationships" xmlns:p="http://schemas.openxmlformats.org/presentationml/2006/main">
   <p:cSld>
     <p:spTree>
       <p:nvGrpSpPr>
@@ -5957,7 +6093,14 @@
         <p:cNvGrpSpPr/>
         <p:nvPr/>
       </p:nvGrpSpPr>
-      <p:grpSpPr/>
+      <p:grpSpPr>
+        <a:xfrm>
+          <a:off x="0" y="0"/>
+          <a:ext cx="0" cy="0"/>
+          <a:chOff x="0" y="0"/>
+          <a:chExt cx="0" cy="0"/>
+        </a:xfrm>
+      </p:grpSpPr>
       <p:sp>
         <p:nvSpPr>
           <p:cNvPr id="2" name="Rectangle 1"/>
@@ -5999,6 +6142,7 @@
           <a:lstStyle/>
           <a:p>
             <a:pPr algn="ctr"/>
+            <a:endParaRPr/>
           </a:p>
         </p:txBody>
       </p:sp>
@@ -6043,6 +6187,7 @@
           <a:lstStyle/>
           <a:p>
             <a:pPr algn="ctr"/>
+            <a:endParaRPr/>
           </a:p>
         </p:txBody>
       </p:sp>
@@ -6063,7 +6208,7 @@
           <a:noFill/>
         </p:spPr>
         <p:txBody>
-          <a:bodyPr wrap="square" anchor="t" lIns="0" rIns="0" tIns="0" bIns="0">
+          <a:bodyPr wrap="square" lIns="0" tIns="0" rIns="0" bIns="0" anchor="t">
             <a:spAutoFit/>
           </a:bodyPr>
           <a:lstStyle/>
@@ -6102,7 +6247,7 @@
           <a:noFill/>
         </p:spPr>
         <p:txBody>
-          <a:bodyPr wrap="square" anchor="t" lIns="0" rIns="0" tIns="0" bIns="0">
+          <a:bodyPr wrap="square" lIns="0" tIns="0" rIns="0" bIns="0" anchor="t">
             <a:spAutoFit/>
           </a:bodyPr>
           <a:lstStyle/>
@@ -6165,6 +6310,7 @@
           <a:lstStyle/>
           <a:p>
             <a:pPr algn="ctr"/>
+            <a:endParaRPr/>
           </a:p>
         </p:txBody>
       </p:sp>
@@ -6185,7 +6331,7 @@
           <a:noFill/>
         </p:spPr>
         <p:txBody>
-          <a:bodyPr wrap="square" anchor="t" lIns="0" rIns="0" tIns="0" bIns="0">
+          <a:bodyPr wrap="square" lIns="0" tIns="0" rIns="0" bIns="0" anchor="t">
             <a:spAutoFit/>
           </a:bodyPr>
           <a:lstStyle/>
@@ -6224,7 +6370,7 @@
           <a:noFill/>
         </p:spPr>
         <p:txBody>
-          <a:bodyPr wrap="square" anchor="t" lIns="0" rIns="0" tIns="0" bIns="0">
+          <a:bodyPr wrap="square" lIns="0" tIns="0" rIns="0" bIns="0" anchor="t">
             <a:spAutoFit/>
           </a:bodyPr>
           <a:lstStyle/>
@@ -6263,7 +6409,7 @@
           <a:noFill/>
         </p:spPr>
         <p:txBody>
-          <a:bodyPr wrap="square" anchor="t" lIns="0" rIns="0" tIns="0" bIns="0">
+          <a:bodyPr wrap="square" lIns="0" tIns="0" rIns="0" bIns="0" anchor="t">
             <a:spAutoFit/>
           </a:bodyPr>
           <a:lstStyle/>
@@ -6320,14 +6466,32 @@
                 <a:tableStyleId>{5C22544A-7EE6-4342-B048-85BDC9FD1C3A}</a:tableStyleId>
               </a:tblPr>
               <a:tblGrid>
-                <a:gridCol w="4480560"/>
-                <a:gridCol w="5120640"/>
-                <a:gridCol w="1273759"/>
+                <a:gridCol w="4480560">
+                  <a:extLst>
+                    <a:ext uri="{9D8B030D-6E8A-4147-A177-3AD203B41FA5}">
+                      <a16:colId xmlns:a16="http://schemas.microsoft.com/office/drawing/2014/main" val="20000"/>
+                    </a:ext>
+                  </a:extLst>
+                </a:gridCol>
+                <a:gridCol w="5120640">
+                  <a:extLst>
+                    <a:ext uri="{9D8B030D-6E8A-4147-A177-3AD203B41FA5}">
+                      <a16:colId xmlns:a16="http://schemas.microsoft.com/office/drawing/2014/main" val="20001"/>
+                    </a:ext>
+                  </a:extLst>
+                </a:gridCol>
+                <a:gridCol w="1273759">
+                  <a:extLst>
+                    <a:ext uri="{9D8B030D-6E8A-4147-A177-3AD203B41FA5}">
+                      <a16:colId xmlns:a16="http://schemas.microsoft.com/office/drawing/2014/main" val="20002"/>
+                    </a:ext>
+                  </a:extLst>
+                </a:gridCol>
               </a:tblGrid>
               <a:tr h="365760">
                 <a:tc>
                   <a:txBody>
-                    <a:bodyPr wrap="square"/>
+                    <a:bodyPr/>
                     <a:lstStyle/>
                     <a:p>
                       <a:r>
@@ -6341,7 +6505,7 @@
                       </a:r>
                     </a:p>
                   </a:txBody>
-                  <a:tcPr anchor="ctr" marL="91440" marR="91440">
+                  <a:tcPr anchor="ctr">
                     <a:solidFill>
                       <a:srgbClr val="123045"/>
                     </a:solidFill>
@@ -6349,7 +6513,7 @@
                 </a:tc>
                 <a:tc>
                   <a:txBody>
-                    <a:bodyPr wrap="square"/>
+                    <a:bodyPr/>
                     <a:lstStyle/>
                     <a:p>
                       <a:r>
@@ -6363,7 +6527,7 @@
                       </a:r>
                     </a:p>
                   </a:txBody>
-                  <a:tcPr anchor="ctr" marL="91440" marR="91440">
+                  <a:tcPr anchor="ctr">
                     <a:solidFill>
                       <a:srgbClr val="123045"/>
                     </a:solidFill>
@@ -6371,7 +6535,7 @@
                 </a:tc>
                 <a:tc>
                   <a:txBody>
-                    <a:bodyPr wrap="square"/>
+                    <a:bodyPr/>
                     <a:lstStyle/>
                     <a:p>
                       <a:r>
@@ -6385,17 +6549,22 @@
                       </a:r>
                     </a:p>
                   </a:txBody>
-                  <a:tcPr anchor="ctr" marL="91440" marR="91440">
+                  <a:tcPr anchor="ctr">
                     <a:solidFill>
                       <a:srgbClr val="123045"/>
                     </a:solidFill>
                   </a:tcPr>
                 </a:tc>
+                <a:extLst>
+                  <a:ext uri="{0D108BD9-81ED-4DB2-BD59-A6C34878D82A}">
+                    <a16:rowId xmlns:a16="http://schemas.microsoft.com/office/drawing/2014/main" val="10000"/>
+                  </a:ext>
+                </a:extLst>
               </a:tr>
               <a:tr h="397764">
                 <a:tc>
                   <a:txBody>
-                    <a:bodyPr wrap="square"/>
+                    <a:bodyPr/>
                     <a:lstStyle/>
                     <a:p>
                       <a:r>
@@ -6409,7 +6578,7 @@
                       </a:r>
                     </a:p>
                   </a:txBody>
-                  <a:tcPr anchor="ctr" marL="91440" marR="91440">
+                  <a:tcPr anchor="ctr">
                     <a:solidFill>
                       <a:srgbClr val="FBECEC"/>
                     </a:solidFill>
@@ -6417,7 +6586,7 @@
                 </a:tc>
                 <a:tc>
                   <a:txBody>
-                    <a:bodyPr wrap="square"/>
+                    <a:bodyPr/>
                     <a:lstStyle/>
                     <a:p>
                       <a:r>
@@ -6431,7 +6600,7 @@
                       </a:r>
                     </a:p>
                   </a:txBody>
-                  <a:tcPr anchor="ctr" marL="91440" marR="91440">
+                  <a:tcPr anchor="ctr">
                     <a:solidFill>
                       <a:srgbClr val="FBECEC"/>
                     </a:solidFill>
@@ -6439,7 +6608,7 @@
                 </a:tc>
                 <a:tc>
                   <a:txBody>
-                    <a:bodyPr wrap="square"/>
+                    <a:bodyPr/>
                     <a:lstStyle/>
                     <a:p>
                       <a:r>
@@ -6453,17 +6622,22 @@
                       </a:r>
                     </a:p>
                   </a:txBody>
-                  <a:tcPr anchor="ctr" marL="91440" marR="91440">
+                  <a:tcPr anchor="ctr">
                     <a:solidFill>
                       <a:srgbClr val="FBECEC"/>
                     </a:solidFill>
                   </a:tcPr>
                 </a:tc>
+                <a:extLst>
+                  <a:ext uri="{0D108BD9-81ED-4DB2-BD59-A6C34878D82A}">
+                    <a16:rowId xmlns:a16="http://schemas.microsoft.com/office/drawing/2014/main" val="10001"/>
+                  </a:ext>
+                </a:extLst>
               </a:tr>
               <a:tr h="397764">
                 <a:tc>
                   <a:txBody>
-                    <a:bodyPr wrap="square"/>
+                    <a:bodyPr/>
                     <a:lstStyle/>
                     <a:p>
                       <a:r>
@@ -6477,7 +6651,7 @@
                       </a:r>
                     </a:p>
                   </a:txBody>
-                  <a:tcPr anchor="ctr" marL="91440" marR="91440">
+                  <a:tcPr anchor="ctr">
                     <a:solidFill>
                       <a:srgbClr val="E7F4EC"/>
                     </a:solidFill>
@@ -6485,7 +6659,7 @@
                 </a:tc>
                 <a:tc>
                   <a:txBody>
-                    <a:bodyPr wrap="square"/>
+                    <a:bodyPr/>
                     <a:lstStyle/>
                     <a:p>
                       <a:r>
@@ -6499,7 +6673,7 @@
                       </a:r>
                     </a:p>
                   </a:txBody>
-                  <a:tcPr anchor="ctr" marL="91440" marR="91440">
+                  <a:tcPr anchor="ctr">
                     <a:solidFill>
                       <a:srgbClr val="E7F4EC"/>
                     </a:solidFill>
@@ -6507,7 +6681,7 @@
                 </a:tc>
                 <a:tc>
                   <a:txBody>
-                    <a:bodyPr wrap="square"/>
+                    <a:bodyPr/>
                     <a:lstStyle/>
                     <a:p>
                       <a:r>
@@ -6521,17 +6695,22 @@
                       </a:r>
                     </a:p>
                   </a:txBody>
-                  <a:tcPr anchor="ctr" marL="91440" marR="91440">
+                  <a:tcPr anchor="ctr">
                     <a:solidFill>
                       <a:srgbClr val="E7F4EC"/>
                     </a:solidFill>
                   </a:tcPr>
                 </a:tc>
+                <a:extLst>
+                  <a:ext uri="{0D108BD9-81ED-4DB2-BD59-A6C34878D82A}">
+                    <a16:rowId xmlns:a16="http://schemas.microsoft.com/office/drawing/2014/main" val="10002"/>
+                  </a:ext>
+                </a:extLst>
               </a:tr>
               <a:tr h="397764">
                 <a:tc>
                   <a:txBody>
-                    <a:bodyPr wrap="square"/>
+                    <a:bodyPr/>
                     <a:lstStyle/>
                     <a:p>
                       <a:r>
@@ -6545,7 +6724,7 @@
                       </a:r>
                     </a:p>
                   </a:txBody>
-                  <a:tcPr anchor="ctr" marL="91440" marR="91440">
+                  <a:tcPr anchor="ctr">
                     <a:solidFill>
                       <a:srgbClr val="E7F4EC"/>
                     </a:solidFill>
@@ -6553,7 +6732,7 @@
                 </a:tc>
                 <a:tc>
                   <a:txBody>
-                    <a:bodyPr wrap="square"/>
+                    <a:bodyPr/>
                     <a:lstStyle/>
                     <a:p>
                       <a:r>
@@ -6567,7 +6746,7 @@
                       </a:r>
                     </a:p>
                   </a:txBody>
-                  <a:tcPr anchor="ctr" marL="91440" marR="91440">
+                  <a:tcPr anchor="ctr">
                     <a:solidFill>
                       <a:srgbClr val="E7F4EC"/>
                     </a:solidFill>
@@ -6575,7 +6754,7 @@
                 </a:tc>
                 <a:tc>
                   <a:txBody>
-                    <a:bodyPr wrap="square"/>
+                    <a:bodyPr/>
                     <a:lstStyle/>
                     <a:p>
                       <a:r>
@@ -6589,12 +6768,17 @@
                       </a:r>
                     </a:p>
                   </a:txBody>
-                  <a:tcPr anchor="ctr" marL="91440" marR="91440">
+                  <a:tcPr anchor="ctr">
                     <a:solidFill>
                       <a:srgbClr val="E7F4EC"/>
                     </a:solidFill>
                   </a:tcPr>
                 </a:tc>
+                <a:extLst>
+                  <a:ext uri="{0D108BD9-81ED-4DB2-BD59-A6C34878D82A}">
+                    <a16:rowId xmlns:a16="http://schemas.microsoft.com/office/drawing/2014/main" val="10003"/>
+                  </a:ext>
+                </a:extLst>
               </a:tr>
             </a:tbl>
           </a:graphicData>
@@ -6641,6 +6825,7 @@
           <a:lstStyle/>
           <a:p>
             <a:pPr algn="ctr"/>
+            <a:endParaRPr/>
           </a:p>
         </p:txBody>
       </p:sp>
@@ -6685,6 +6870,7 @@
           <a:lstStyle/>
           <a:p>
             <a:pPr algn="ctr"/>
+            <a:endParaRPr/>
           </a:p>
         </p:txBody>
       </p:sp>
@@ -6705,7 +6891,7 @@
           <a:noFill/>
         </p:spPr>
         <p:txBody>
-          <a:bodyPr wrap="square" anchor="t" lIns="0" rIns="0" tIns="0" bIns="0">
+          <a:bodyPr wrap="square" lIns="0" tIns="0" rIns="0" bIns="0" anchor="t">
             <a:spAutoFit/>
           </a:bodyPr>
           <a:lstStyle/>
@@ -6752,7 +6938,7 @@
 </file>
 
 <file path=ppt/slides/slide13.xml><?xml version="1.0" encoding="utf-8"?>
-<p:sld xmlns:a="http://schemas.openxmlformats.org/drawingml/2006/main" xmlns:p="http://schemas.openxmlformats.org/presentationml/2006/main" xmlns:r="http://schemas.openxmlformats.org/officeDocument/2006/relationships">
+<p:sld xmlns:a="http://schemas.openxmlformats.org/drawingml/2006/main" xmlns:r="http://schemas.openxmlformats.org/officeDocument/2006/relationships" xmlns:p="http://schemas.openxmlformats.org/presentationml/2006/main">
   <p:cSld>
     <p:spTree>
       <p:nvGrpSpPr>
@@ -6760,7 +6946,14 @@
         <p:cNvGrpSpPr/>
         <p:nvPr/>
       </p:nvGrpSpPr>
-      <p:grpSpPr/>
+      <p:grpSpPr>
+        <a:xfrm>
+          <a:off x="0" y="0"/>
+          <a:ext cx="0" cy="0"/>
+          <a:chOff x="0" y="0"/>
+          <a:chExt cx="0" cy="0"/>
+        </a:xfrm>
+      </p:grpSpPr>
       <p:sp>
         <p:nvSpPr>
           <p:cNvPr id="2" name="Rectangle 1"/>
@@ -6802,6 +6995,7 @@
           <a:lstStyle/>
           <a:p>
             <a:pPr algn="ctr"/>
+            <a:endParaRPr/>
           </a:p>
         </p:txBody>
       </p:sp>
@@ -6846,6 +7040,7 @@
           <a:lstStyle/>
           <a:p>
             <a:pPr algn="ctr"/>
+            <a:endParaRPr/>
           </a:p>
         </p:txBody>
       </p:sp>
@@ -6866,7 +7061,7 @@
           <a:noFill/>
         </p:spPr>
         <p:txBody>
-          <a:bodyPr wrap="square" anchor="t" lIns="0" rIns="0" tIns="0" bIns="0">
+          <a:bodyPr wrap="square" lIns="0" tIns="0" rIns="0" bIns="0" anchor="t">
             <a:spAutoFit/>
           </a:bodyPr>
           <a:lstStyle/>
@@ -6905,7 +7100,7 @@
           <a:noFill/>
         </p:spPr>
         <p:txBody>
-          <a:bodyPr wrap="square" anchor="t" lIns="0" rIns="0" tIns="0" bIns="0">
+          <a:bodyPr wrap="square" lIns="0" tIns="0" rIns="0" bIns="0" anchor="t">
             <a:spAutoFit/>
           </a:bodyPr>
           <a:lstStyle/>
@@ -6968,6 +7163,7 @@
           <a:lstStyle/>
           <a:p>
             <a:pPr algn="ctr"/>
+            <a:endParaRPr/>
           </a:p>
         </p:txBody>
       </p:sp>
@@ -6988,7 +7184,7 @@
           <a:noFill/>
         </p:spPr>
         <p:txBody>
-          <a:bodyPr wrap="square" anchor="t" lIns="0" rIns="0" tIns="0" bIns="0">
+          <a:bodyPr wrap="square" lIns="0" tIns="0" rIns="0" bIns="0" anchor="t">
             <a:spAutoFit/>
           </a:bodyPr>
           <a:lstStyle/>
@@ -7027,7 +7223,7 @@
           <a:noFill/>
         </p:spPr>
         <p:txBody>
-          <a:bodyPr wrap="square" anchor="t" lIns="0" rIns="0" tIns="0" bIns="0">
+          <a:bodyPr wrap="square" lIns="0" tIns="0" rIns="0" bIns="0" anchor="t">
             <a:spAutoFit/>
           </a:bodyPr>
           <a:lstStyle/>
@@ -7090,6 +7286,7 @@
           <a:lstStyle/>
           <a:p>
             <a:pPr algn="ctr"/>
+            <a:endParaRPr/>
           </a:p>
         </p:txBody>
       </p:sp>
@@ -7110,7 +7307,7 @@
           <a:noFill/>
         </p:spPr>
         <p:txBody>
-          <a:bodyPr wrap="square" anchor="t" lIns="0" rIns="0" tIns="0" bIns="0">
+          <a:bodyPr wrap="square" lIns="0" tIns="0" rIns="0" bIns="0" anchor="t">
             <a:spAutoFit/>
           </a:bodyPr>
           <a:lstStyle/>
@@ -7151,14 +7348,32 @@
                 <a:tableStyleId>{5C22544A-7EE6-4342-B048-85BDC9FD1C3A}</a:tableStyleId>
               </a:tblPr>
               <a:tblGrid>
-                <a:gridCol w="4572000"/>
-                <a:gridCol w="1554480"/>
-                <a:gridCol w="4748479"/>
+                <a:gridCol w="4572000">
+                  <a:extLst>
+                    <a:ext uri="{9D8B030D-6E8A-4147-A177-3AD203B41FA5}">
+                      <a16:colId xmlns:a16="http://schemas.microsoft.com/office/drawing/2014/main" val="20000"/>
+                    </a:ext>
+                  </a:extLst>
+                </a:gridCol>
+                <a:gridCol w="1554480">
+                  <a:extLst>
+                    <a:ext uri="{9D8B030D-6E8A-4147-A177-3AD203B41FA5}">
+                      <a16:colId xmlns:a16="http://schemas.microsoft.com/office/drawing/2014/main" val="20001"/>
+                    </a:ext>
+                  </a:extLst>
+                </a:gridCol>
+                <a:gridCol w="4748479">
+                  <a:extLst>
+                    <a:ext uri="{9D8B030D-6E8A-4147-A177-3AD203B41FA5}">
+                      <a16:colId xmlns:a16="http://schemas.microsoft.com/office/drawing/2014/main" val="20002"/>
+                    </a:ext>
+                  </a:extLst>
+                </a:gridCol>
               </a:tblGrid>
               <a:tr h="365760">
                 <a:tc>
                   <a:txBody>
-                    <a:bodyPr wrap="square"/>
+                    <a:bodyPr/>
                     <a:lstStyle/>
                     <a:p>
                       <a:r>
@@ -7172,7 +7387,7 @@
                       </a:r>
                     </a:p>
                   </a:txBody>
-                  <a:tcPr anchor="ctr" marL="91440" marR="91440">
+                  <a:tcPr anchor="ctr">
                     <a:solidFill>
                       <a:srgbClr val="123045"/>
                     </a:solidFill>
@@ -7180,7 +7395,7 @@
                 </a:tc>
                 <a:tc>
                   <a:txBody>
-                    <a:bodyPr wrap="square"/>
+                    <a:bodyPr/>
                     <a:lstStyle/>
                     <a:p>
                       <a:r>
@@ -7194,7 +7409,7 @@
                       </a:r>
                     </a:p>
                   </a:txBody>
-                  <a:tcPr anchor="ctr" marL="91440" marR="91440">
+                  <a:tcPr anchor="ctr">
                     <a:solidFill>
                       <a:srgbClr val="123045"/>
                     </a:solidFill>
@@ -7202,7 +7417,7 @@
                 </a:tc>
                 <a:tc>
                   <a:txBody>
-                    <a:bodyPr wrap="square"/>
+                    <a:bodyPr/>
                     <a:lstStyle/>
                     <a:p>
                       <a:r>
@@ -7216,17 +7431,22 @@
                       </a:r>
                     </a:p>
                   </a:txBody>
-                  <a:tcPr anchor="ctr" marL="91440" marR="91440">
+                  <a:tcPr anchor="ctr">
                     <a:solidFill>
                       <a:srgbClr val="123045"/>
                     </a:solidFill>
                   </a:tcPr>
                 </a:tc>
+                <a:extLst>
+                  <a:ext uri="{0D108BD9-81ED-4DB2-BD59-A6C34878D82A}">
+                    <a16:rowId xmlns:a16="http://schemas.microsoft.com/office/drawing/2014/main" val="10000"/>
+                  </a:ext>
+                </a:extLst>
               </a:tr>
               <a:tr h="397764">
                 <a:tc>
                   <a:txBody>
-                    <a:bodyPr wrap="square"/>
+                    <a:bodyPr/>
                     <a:lstStyle/>
                     <a:p>
                       <a:r>
@@ -7240,7 +7460,7 @@
                       </a:r>
                     </a:p>
                   </a:txBody>
-                  <a:tcPr anchor="ctr" marL="91440" marR="91440">
+                  <a:tcPr anchor="ctr">
                     <a:solidFill>
                       <a:srgbClr val="E7F4EC"/>
                     </a:solidFill>
@@ -7248,7 +7468,7 @@
                 </a:tc>
                 <a:tc>
                   <a:txBody>
-                    <a:bodyPr wrap="square"/>
+                    <a:bodyPr/>
                     <a:lstStyle/>
                     <a:p>
                       <a:r>
@@ -7262,7 +7482,7 @@
                       </a:r>
                     </a:p>
                   </a:txBody>
-                  <a:tcPr anchor="ctr" marL="91440" marR="91440">
+                  <a:tcPr anchor="ctr">
                     <a:solidFill>
                       <a:srgbClr val="E7F4EC"/>
                     </a:solidFill>
@@ -7270,7 +7490,7 @@
                 </a:tc>
                 <a:tc>
                   <a:txBody>
-                    <a:bodyPr wrap="square"/>
+                    <a:bodyPr/>
                     <a:lstStyle/>
                     <a:p>
                       <a:r>
@@ -7284,17 +7504,22 @@
                       </a:r>
                     </a:p>
                   </a:txBody>
-                  <a:tcPr anchor="ctr" marL="91440" marR="91440">
+                  <a:tcPr anchor="ctr">
                     <a:solidFill>
                       <a:srgbClr val="E7F4EC"/>
                     </a:solidFill>
                   </a:tcPr>
                 </a:tc>
+                <a:extLst>
+                  <a:ext uri="{0D108BD9-81ED-4DB2-BD59-A6C34878D82A}">
+                    <a16:rowId xmlns:a16="http://schemas.microsoft.com/office/drawing/2014/main" val="10001"/>
+                  </a:ext>
+                </a:extLst>
               </a:tr>
               <a:tr h="397764">
                 <a:tc>
                   <a:txBody>
-                    <a:bodyPr wrap="square"/>
+                    <a:bodyPr/>
                     <a:lstStyle/>
                     <a:p>
                       <a:r>
@@ -7308,7 +7533,7 @@
                       </a:r>
                     </a:p>
                   </a:txBody>
-                  <a:tcPr anchor="ctr" marL="91440" marR="91440">
+                  <a:tcPr anchor="ctr">
                     <a:solidFill>
                       <a:srgbClr val="E7F4EC"/>
                     </a:solidFill>
@@ -7316,7 +7541,7 @@
                 </a:tc>
                 <a:tc>
                   <a:txBody>
-                    <a:bodyPr wrap="square"/>
+                    <a:bodyPr/>
                     <a:lstStyle/>
                     <a:p>
                       <a:r>
@@ -7330,7 +7555,7 @@
                       </a:r>
                     </a:p>
                   </a:txBody>
-                  <a:tcPr anchor="ctr" marL="91440" marR="91440">
+                  <a:tcPr anchor="ctr">
                     <a:solidFill>
                       <a:srgbClr val="E7F4EC"/>
                     </a:solidFill>
@@ -7338,7 +7563,7 @@
                 </a:tc>
                 <a:tc>
                   <a:txBody>
-                    <a:bodyPr wrap="square"/>
+                    <a:bodyPr/>
                     <a:lstStyle/>
                     <a:p>
                       <a:r>
@@ -7352,17 +7577,22 @@
                       </a:r>
                     </a:p>
                   </a:txBody>
-                  <a:tcPr anchor="ctr" marL="91440" marR="91440">
+                  <a:tcPr anchor="ctr">
                     <a:solidFill>
                       <a:srgbClr val="E7F4EC"/>
                     </a:solidFill>
                   </a:tcPr>
                 </a:tc>
+                <a:extLst>
+                  <a:ext uri="{0D108BD9-81ED-4DB2-BD59-A6C34878D82A}">
+                    <a16:rowId xmlns:a16="http://schemas.microsoft.com/office/drawing/2014/main" val="10002"/>
+                  </a:ext>
+                </a:extLst>
               </a:tr>
               <a:tr h="397764">
                 <a:tc>
                   <a:txBody>
-                    <a:bodyPr wrap="square"/>
+                    <a:bodyPr/>
                     <a:lstStyle/>
                     <a:p>
                       <a:r>
@@ -7376,7 +7606,7 @@
                       </a:r>
                     </a:p>
                   </a:txBody>
-                  <a:tcPr anchor="ctr" marL="91440" marR="91440">
+                  <a:tcPr anchor="ctr">
                     <a:solidFill>
                       <a:srgbClr val="FDF1DF"/>
                     </a:solidFill>
@@ -7384,7 +7614,7 @@
                 </a:tc>
                 <a:tc>
                   <a:txBody>
-                    <a:bodyPr wrap="square"/>
+                    <a:bodyPr/>
                     <a:lstStyle/>
                     <a:p>
                       <a:r>
@@ -7398,7 +7628,7 @@
                       </a:r>
                     </a:p>
                   </a:txBody>
-                  <a:tcPr anchor="ctr" marL="91440" marR="91440">
+                  <a:tcPr anchor="ctr">
                     <a:solidFill>
                       <a:srgbClr val="FDF1DF"/>
                     </a:solidFill>
@@ -7406,7 +7636,7 @@
                 </a:tc>
                 <a:tc>
                   <a:txBody>
-                    <a:bodyPr wrap="square"/>
+                    <a:bodyPr/>
                     <a:lstStyle/>
                     <a:p>
                       <a:r>
@@ -7420,12 +7650,17 @@
                       </a:r>
                     </a:p>
                   </a:txBody>
-                  <a:tcPr anchor="ctr" marL="91440" marR="91440">
+                  <a:tcPr anchor="ctr">
                     <a:solidFill>
                       <a:srgbClr val="FDF1DF"/>
                     </a:solidFill>
                   </a:tcPr>
                 </a:tc>
+                <a:extLst>
+                  <a:ext uri="{0D108BD9-81ED-4DB2-BD59-A6C34878D82A}">
+                    <a16:rowId xmlns:a16="http://schemas.microsoft.com/office/drawing/2014/main" val="10003"/>
+                  </a:ext>
+                </a:extLst>
               </a:tr>
             </a:tbl>
           </a:graphicData>
@@ -7472,6 +7707,7 @@
           <a:lstStyle/>
           <a:p>
             <a:pPr algn="ctr"/>
+            <a:endParaRPr/>
           </a:p>
         </p:txBody>
       </p:sp>
@@ -7516,6 +7752,7 @@
           <a:lstStyle/>
           <a:p>
             <a:pPr algn="ctr"/>
+            <a:endParaRPr/>
           </a:p>
         </p:txBody>
       </p:sp>
@@ -7536,7 +7773,7 @@
           <a:noFill/>
         </p:spPr>
         <p:txBody>
-          <a:bodyPr wrap="square" anchor="t" lIns="0" rIns="0" tIns="0" bIns="0">
+          <a:bodyPr wrap="square" lIns="0" tIns="0" rIns="0" bIns="0" anchor="t">
             <a:spAutoFit/>
           </a:bodyPr>
           <a:lstStyle/>
@@ -7583,7 +7820,7 @@
 </file>
 
 <file path=ppt/slides/slide14.xml><?xml version="1.0" encoding="utf-8"?>
-<p:sld xmlns:a="http://schemas.openxmlformats.org/drawingml/2006/main" xmlns:p="http://schemas.openxmlformats.org/presentationml/2006/main" xmlns:r="http://schemas.openxmlformats.org/officeDocument/2006/relationships">
+<p:sld xmlns:a="http://schemas.openxmlformats.org/drawingml/2006/main" xmlns:r="http://schemas.openxmlformats.org/officeDocument/2006/relationships" xmlns:p="http://schemas.openxmlformats.org/presentationml/2006/main">
   <p:cSld>
     <p:spTree>
       <p:nvGrpSpPr>
@@ -7591,7 +7828,14 @@
         <p:cNvGrpSpPr/>
         <p:nvPr/>
       </p:nvGrpSpPr>
-      <p:grpSpPr/>
+      <p:grpSpPr>
+        <a:xfrm>
+          <a:off x="0" y="0"/>
+          <a:ext cx="0" cy="0"/>
+          <a:chOff x="0" y="0"/>
+          <a:chExt cx="0" cy="0"/>
+        </a:xfrm>
+      </p:grpSpPr>
       <p:sp>
         <p:nvSpPr>
           <p:cNvPr id="2" name="Rectangle 1"/>
@@ -7633,6 +7877,7 @@
           <a:lstStyle/>
           <a:p>
             <a:pPr algn="ctr"/>
+            <a:endParaRPr/>
           </a:p>
         </p:txBody>
       </p:sp>
@@ -7677,6 +7922,7 @@
           <a:lstStyle/>
           <a:p>
             <a:pPr algn="ctr"/>
+            <a:endParaRPr/>
           </a:p>
         </p:txBody>
       </p:sp>
@@ -7697,7 +7943,7 @@
           <a:noFill/>
         </p:spPr>
         <p:txBody>
-          <a:bodyPr wrap="square" anchor="t" lIns="0" rIns="0" tIns="0" bIns="0">
+          <a:bodyPr wrap="square" lIns="0" tIns="0" rIns="0" bIns="0" anchor="t">
             <a:spAutoFit/>
           </a:bodyPr>
           <a:lstStyle/>
@@ -7736,7 +7982,7 @@
           <a:noFill/>
         </p:spPr>
         <p:txBody>
-          <a:bodyPr wrap="square" anchor="t" lIns="0" rIns="0" tIns="0" bIns="0">
+          <a:bodyPr wrap="square" lIns="0" tIns="0" rIns="0" bIns="0" anchor="t">
             <a:spAutoFit/>
           </a:bodyPr>
           <a:lstStyle/>
@@ -7799,6 +8045,7 @@
           <a:lstStyle/>
           <a:p>
             <a:pPr algn="ctr"/>
+            <a:endParaRPr/>
           </a:p>
         </p:txBody>
       </p:sp>
@@ -7819,7 +8066,7 @@
           <a:noFill/>
         </p:spPr>
         <p:txBody>
-          <a:bodyPr wrap="square" anchor="t" lIns="0" rIns="0" tIns="0" bIns="0">
+          <a:bodyPr wrap="square" lIns="0" tIns="0" rIns="0" bIns="0" anchor="t">
             <a:spAutoFit/>
           </a:bodyPr>
           <a:lstStyle/>
@@ -7858,7 +8105,7 @@
           <a:noFill/>
         </p:spPr>
         <p:txBody>
-          <a:bodyPr wrap="square" anchor="t" lIns="0" rIns="0" tIns="0" bIns="0">
+          <a:bodyPr wrap="square" lIns="0" tIns="0" rIns="0" bIns="0" anchor="t">
             <a:spAutoFit/>
           </a:bodyPr>
           <a:lstStyle/>
@@ -7921,6 +8168,7 @@
           <a:lstStyle/>
           <a:p>
             <a:pPr algn="ctr"/>
+            <a:endParaRPr/>
           </a:p>
         </p:txBody>
       </p:sp>
@@ -7965,6 +8213,7 @@
           <a:lstStyle/>
           <a:p>
             <a:pPr algn="ctr"/>
+            <a:endParaRPr/>
           </a:p>
         </p:txBody>
       </p:sp>
@@ -7985,7 +8234,7 @@
           <a:noFill/>
         </p:spPr>
         <p:txBody>
-          <a:bodyPr wrap="square" anchor="t" lIns="0" rIns="0" tIns="0" bIns="0">
+          <a:bodyPr wrap="square" lIns="0" tIns="0" rIns="0" bIns="0" anchor="t">
             <a:spAutoFit/>
           </a:bodyPr>
           <a:lstStyle/>
@@ -8064,6 +8313,7 @@
           <a:lstStyle/>
           <a:p>
             <a:pPr algn="ctr"/>
+            <a:endParaRPr/>
           </a:p>
         </p:txBody>
       </p:sp>
@@ -8108,6 +8358,7 @@
           <a:lstStyle/>
           <a:p>
             <a:pPr algn="ctr"/>
+            <a:endParaRPr/>
           </a:p>
         </p:txBody>
       </p:sp>
@@ -8128,7 +8379,7 @@
           <a:noFill/>
         </p:spPr>
         <p:txBody>
-          <a:bodyPr wrap="square" anchor="t" lIns="0" rIns="0" tIns="0" bIns="0">
+          <a:bodyPr wrap="square" lIns="0" tIns="0" rIns="0" bIns="0" anchor="t">
             <a:spAutoFit/>
           </a:bodyPr>
           <a:lstStyle/>
@@ -8207,6 +8458,7 @@
           <a:lstStyle/>
           <a:p>
             <a:pPr algn="ctr"/>
+            <a:endParaRPr/>
           </a:p>
         </p:txBody>
       </p:sp>
@@ -8251,6 +8503,7 @@
           <a:lstStyle/>
           <a:p>
             <a:pPr algn="ctr"/>
+            <a:endParaRPr/>
           </a:p>
         </p:txBody>
       </p:sp>
@@ -8271,7 +8524,7 @@
           <a:noFill/>
         </p:spPr>
         <p:txBody>
-          <a:bodyPr wrap="square" anchor="t" lIns="0" rIns="0" tIns="0" bIns="0">
+          <a:bodyPr wrap="square" lIns="0" tIns="0" rIns="0" bIns="0" anchor="t">
             <a:spAutoFit/>
           </a:bodyPr>
           <a:lstStyle/>
@@ -8328,13 +8581,25 @@
                 <a:tableStyleId>{5C22544A-7EE6-4342-B048-85BDC9FD1C3A}</a:tableStyleId>
               </a:tblPr>
               <a:tblGrid>
-                <a:gridCol w="4572000"/>
-                <a:gridCol w="6302959"/>
+                <a:gridCol w="4572000">
+                  <a:extLst>
+                    <a:ext uri="{9D8B030D-6E8A-4147-A177-3AD203B41FA5}">
+                      <a16:colId xmlns:a16="http://schemas.microsoft.com/office/drawing/2014/main" val="20000"/>
+                    </a:ext>
+                  </a:extLst>
+                </a:gridCol>
+                <a:gridCol w="6302959">
+                  <a:extLst>
+                    <a:ext uri="{9D8B030D-6E8A-4147-A177-3AD203B41FA5}">
+                      <a16:colId xmlns:a16="http://schemas.microsoft.com/office/drawing/2014/main" val="20001"/>
+                    </a:ext>
+                  </a:extLst>
+                </a:gridCol>
               </a:tblGrid>
               <a:tr h="365760">
                 <a:tc>
                   <a:txBody>
-                    <a:bodyPr wrap="square"/>
+                    <a:bodyPr/>
                     <a:lstStyle/>
                     <a:p>
                       <a:r>
@@ -8348,7 +8613,7 @@
                       </a:r>
                     </a:p>
                   </a:txBody>
-                  <a:tcPr anchor="ctr" marL="91440" marR="91440">
+                  <a:tcPr anchor="ctr">
                     <a:solidFill>
                       <a:srgbClr val="123045"/>
                     </a:solidFill>
@@ -8356,7 +8621,7 @@
                 </a:tc>
                 <a:tc>
                   <a:txBody>
-                    <a:bodyPr wrap="square"/>
+                    <a:bodyPr/>
                     <a:lstStyle/>
                     <a:p>
                       <a:r>
@@ -8370,17 +8635,22 @@
                       </a:r>
                     </a:p>
                   </a:txBody>
-                  <a:tcPr anchor="ctr" marL="91440" marR="91440">
+                  <a:tcPr anchor="ctr">
                     <a:solidFill>
                       <a:srgbClr val="123045"/>
                     </a:solidFill>
                   </a:tcPr>
                 </a:tc>
+                <a:extLst>
+                  <a:ext uri="{0D108BD9-81ED-4DB2-BD59-A6C34878D82A}">
+                    <a16:rowId xmlns:a16="http://schemas.microsoft.com/office/drawing/2014/main" val="10000"/>
+                  </a:ext>
+                </a:extLst>
               </a:tr>
               <a:tr h="397764">
                 <a:tc>
                   <a:txBody>
-                    <a:bodyPr wrap="square"/>
+                    <a:bodyPr/>
                     <a:lstStyle/>
                     <a:p>
                       <a:r>
@@ -8394,7 +8664,7 @@
                       </a:r>
                     </a:p>
                   </a:txBody>
-                  <a:tcPr anchor="ctr" marL="91440" marR="91440">
+                  <a:tcPr anchor="ctr">
                     <a:solidFill>
                       <a:srgbClr val="E7F4EC"/>
                     </a:solidFill>
@@ -8402,7 +8672,7 @@
                 </a:tc>
                 <a:tc>
                   <a:txBody>
-                    <a:bodyPr wrap="square"/>
+                    <a:bodyPr/>
                     <a:lstStyle/>
                     <a:p>
                       <a:r>
@@ -8416,17 +8686,22 @@
                       </a:r>
                     </a:p>
                   </a:txBody>
-                  <a:tcPr anchor="ctr" marL="91440" marR="91440">
+                  <a:tcPr anchor="ctr">
                     <a:solidFill>
                       <a:srgbClr val="E7F4EC"/>
                     </a:solidFill>
                   </a:tcPr>
                 </a:tc>
+                <a:extLst>
+                  <a:ext uri="{0D108BD9-81ED-4DB2-BD59-A6C34878D82A}">
+                    <a16:rowId xmlns:a16="http://schemas.microsoft.com/office/drawing/2014/main" val="10001"/>
+                  </a:ext>
+                </a:extLst>
               </a:tr>
               <a:tr h="397764">
                 <a:tc>
                   <a:txBody>
-                    <a:bodyPr wrap="square"/>
+                    <a:bodyPr/>
                     <a:lstStyle/>
                     <a:p>
                       <a:r>
@@ -8440,7 +8715,7 @@
                       </a:r>
                     </a:p>
                   </a:txBody>
-                  <a:tcPr anchor="ctr" marL="91440" marR="91440">
+                  <a:tcPr anchor="ctr">
                     <a:solidFill>
                       <a:srgbClr val="E7F4EC"/>
                     </a:solidFill>
@@ -8448,7 +8723,7 @@
                 </a:tc>
                 <a:tc>
                   <a:txBody>
-                    <a:bodyPr wrap="square"/>
+                    <a:bodyPr/>
                     <a:lstStyle/>
                     <a:p>
                       <a:r>
@@ -8462,17 +8737,22 @@
                       </a:r>
                     </a:p>
                   </a:txBody>
-                  <a:tcPr anchor="ctr" marL="91440" marR="91440">
+                  <a:tcPr anchor="ctr">
                     <a:solidFill>
                       <a:srgbClr val="E7F4EC"/>
                     </a:solidFill>
                   </a:tcPr>
                 </a:tc>
+                <a:extLst>
+                  <a:ext uri="{0D108BD9-81ED-4DB2-BD59-A6C34878D82A}">
+                    <a16:rowId xmlns:a16="http://schemas.microsoft.com/office/drawing/2014/main" val="10002"/>
+                  </a:ext>
+                </a:extLst>
               </a:tr>
               <a:tr h="397764">
                 <a:tc>
                   <a:txBody>
-                    <a:bodyPr wrap="square"/>
+                    <a:bodyPr/>
                     <a:lstStyle/>
                     <a:p>
                       <a:r>
@@ -8486,7 +8766,7 @@
                       </a:r>
                     </a:p>
                   </a:txBody>
-                  <a:tcPr anchor="ctr" marL="91440" marR="91440">
+                  <a:tcPr anchor="ctr">
                     <a:solidFill>
                       <a:srgbClr val="E7F4EC"/>
                     </a:solidFill>
@@ -8494,7 +8774,7 @@
                 </a:tc>
                 <a:tc>
                   <a:txBody>
-                    <a:bodyPr wrap="square"/>
+                    <a:bodyPr/>
                     <a:lstStyle/>
                     <a:p>
                       <a:r>
@@ -8508,12 +8788,17 @@
                       </a:r>
                     </a:p>
                   </a:txBody>
-                  <a:tcPr anchor="ctr" marL="91440" marR="91440">
+                  <a:tcPr anchor="ctr">
                     <a:solidFill>
                       <a:srgbClr val="E7F4EC"/>
                     </a:solidFill>
                   </a:tcPr>
                 </a:tc>
+                <a:extLst>
+                  <a:ext uri="{0D108BD9-81ED-4DB2-BD59-A6C34878D82A}">
+                    <a16:rowId xmlns:a16="http://schemas.microsoft.com/office/drawing/2014/main" val="10003"/>
+                  </a:ext>
+                </a:extLst>
               </a:tr>
             </a:tbl>
           </a:graphicData>
@@ -8528,7 +8813,7 @@
 </file>
 
 <file path=ppt/slides/slide15.xml><?xml version="1.0" encoding="utf-8"?>
-<p:sld xmlns:a="http://schemas.openxmlformats.org/drawingml/2006/main" xmlns:p="http://schemas.openxmlformats.org/presentationml/2006/main" xmlns:r="http://schemas.openxmlformats.org/officeDocument/2006/relationships">
+<p:sld xmlns:a="http://schemas.openxmlformats.org/drawingml/2006/main" xmlns:r="http://schemas.openxmlformats.org/officeDocument/2006/relationships" xmlns:p="http://schemas.openxmlformats.org/presentationml/2006/main">
   <p:cSld>
     <p:spTree>
       <p:nvGrpSpPr>
@@ -8536,7 +8821,14 @@
         <p:cNvGrpSpPr/>
         <p:nvPr/>
       </p:nvGrpSpPr>
-      <p:grpSpPr/>
+      <p:grpSpPr>
+        <a:xfrm>
+          <a:off x="0" y="0"/>
+          <a:ext cx="0" cy="0"/>
+          <a:chOff x="0" y="0"/>
+          <a:chExt cx="0" cy="0"/>
+        </a:xfrm>
+      </p:grpSpPr>
       <p:sp>
         <p:nvSpPr>
           <p:cNvPr id="2" name="Rectangle 1"/>
@@ -8578,6 +8870,7 @@
           <a:lstStyle/>
           <a:p>
             <a:pPr algn="ctr"/>
+            <a:endParaRPr/>
           </a:p>
         </p:txBody>
       </p:sp>
@@ -8622,6 +8915,7 @@
           <a:lstStyle/>
           <a:p>
             <a:pPr algn="ctr"/>
+            <a:endParaRPr/>
           </a:p>
         </p:txBody>
       </p:sp>
@@ -8642,7 +8936,7 @@
           <a:noFill/>
         </p:spPr>
         <p:txBody>
-          <a:bodyPr wrap="square" anchor="t" lIns="0" rIns="0" tIns="0" bIns="0">
+          <a:bodyPr wrap="square" lIns="0" tIns="0" rIns="0" bIns="0" anchor="t">
             <a:spAutoFit/>
           </a:bodyPr>
           <a:lstStyle/>
@@ -8681,7 +8975,7 @@
           <a:noFill/>
         </p:spPr>
         <p:txBody>
-          <a:bodyPr wrap="square" anchor="t" lIns="0" rIns="0" tIns="0" bIns="0">
+          <a:bodyPr wrap="square" lIns="0" tIns="0" rIns="0" bIns="0" anchor="t">
             <a:spAutoFit/>
           </a:bodyPr>
           <a:lstStyle/>
@@ -8744,6 +9038,7 @@
           <a:lstStyle/>
           <a:p>
             <a:pPr algn="ctr"/>
+            <a:endParaRPr/>
           </a:p>
         </p:txBody>
       </p:sp>
@@ -8764,7 +9059,7 @@
           <a:noFill/>
         </p:spPr>
         <p:txBody>
-          <a:bodyPr wrap="square" anchor="t" lIns="0" rIns="0" tIns="0" bIns="0">
+          <a:bodyPr wrap="square" lIns="0" tIns="0" rIns="0" bIns="0" anchor="t">
             <a:spAutoFit/>
           </a:bodyPr>
           <a:lstStyle/>
@@ -8803,7 +9098,7 @@
           <a:noFill/>
         </p:spPr>
         <p:txBody>
-          <a:bodyPr wrap="square" anchor="t" lIns="0" rIns="0" tIns="0" bIns="0">
+          <a:bodyPr wrap="square" lIns="0" tIns="0" rIns="0" bIns="0" anchor="t">
             <a:spAutoFit/>
           </a:bodyPr>
           <a:lstStyle/>
@@ -8866,6 +9161,7 @@
           <a:lstStyle/>
           <a:p>
             <a:pPr algn="ctr"/>
+            <a:endParaRPr/>
           </a:p>
         </p:txBody>
       </p:sp>
@@ -8886,7 +9182,7 @@
           <a:noFill/>
         </p:spPr>
         <p:txBody>
-          <a:bodyPr wrap="square" anchor="t" lIns="0" rIns="0" tIns="0" bIns="0">
+          <a:bodyPr wrap="square" lIns="0" tIns="0" rIns="0" bIns="0" anchor="t">
             <a:spAutoFit/>
           </a:bodyPr>
           <a:lstStyle/>
@@ -8949,6 +9245,7 @@
           <a:lstStyle/>
           <a:p>
             <a:pPr algn="ctr"/>
+            <a:endParaRPr/>
           </a:p>
         </p:txBody>
       </p:sp>
@@ -8993,6 +9290,7 @@
           <a:lstStyle/>
           <a:p>
             <a:pPr algn="ctr"/>
+            <a:endParaRPr/>
           </a:p>
         </p:txBody>
       </p:sp>
@@ -9013,7 +9311,7 @@
           <a:noFill/>
         </p:spPr>
         <p:txBody>
-          <a:bodyPr wrap="square" anchor="t" lIns="0" rIns="0" tIns="0" bIns="0">
+          <a:bodyPr wrap="square" lIns="0" tIns="0" rIns="0" bIns="0" anchor="t">
             <a:spAutoFit/>
           </a:bodyPr>
           <a:lstStyle/>
@@ -9092,6 +9390,7 @@
           <a:lstStyle/>
           <a:p>
             <a:pPr algn="ctr"/>
+            <a:endParaRPr/>
           </a:p>
         </p:txBody>
       </p:sp>
@@ -9136,6 +9435,7 @@
           <a:lstStyle/>
           <a:p>
             <a:pPr algn="ctr"/>
+            <a:endParaRPr/>
           </a:p>
         </p:txBody>
       </p:sp>
@@ -9156,7 +9456,7 @@
           <a:noFill/>
         </p:spPr>
         <p:txBody>
-          <a:bodyPr wrap="square" anchor="t" lIns="0" rIns="0" tIns="0" bIns="0">
+          <a:bodyPr wrap="square" lIns="0" tIns="0" rIns="0" bIns="0" anchor="t">
             <a:spAutoFit/>
           </a:bodyPr>
           <a:lstStyle/>
@@ -9235,6 +9535,7 @@
           <a:lstStyle/>
           <a:p>
             <a:pPr algn="ctr"/>
+            <a:endParaRPr/>
           </a:p>
         </p:txBody>
       </p:sp>
@@ -9279,6 +9580,7 @@
           <a:lstStyle/>
           <a:p>
             <a:pPr algn="ctr"/>
+            <a:endParaRPr/>
           </a:p>
         </p:txBody>
       </p:sp>
@@ -9299,7 +9601,7 @@
           <a:noFill/>
         </p:spPr>
         <p:txBody>
-          <a:bodyPr wrap="square" anchor="t" lIns="0" rIns="0" tIns="0" bIns="0">
+          <a:bodyPr wrap="square" lIns="0" tIns="0" rIns="0" bIns="0" anchor="t">
             <a:spAutoFit/>
           </a:bodyPr>
           <a:lstStyle/>
@@ -9354,7 +9656,7 @@
           <a:noFill/>
         </p:spPr>
         <p:txBody>
-          <a:bodyPr wrap="square" anchor="t" lIns="0" rIns="0" tIns="0" bIns="0">
+          <a:bodyPr wrap="square" lIns="0" tIns="0" rIns="0" bIns="0" anchor="t">
             <a:spAutoFit/>
           </a:bodyPr>
           <a:lstStyle/>
@@ -9389,7 +9691,7 @@
 </file>
 
 <file path=ppt/slides/slide16.xml><?xml version="1.0" encoding="utf-8"?>
-<p:sld xmlns:a="http://schemas.openxmlformats.org/drawingml/2006/main" xmlns:p="http://schemas.openxmlformats.org/presentationml/2006/main" xmlns:r="http://schemas.openxmlformats.org/officeDocument/2006/relationships">
+<p:sld xmlns:a="http://schemas.openxmlformats.org/drawingml/2006/main" xmlns:r="http://schemas.openxmlformats.org/officeDocument/2006/relationships" xmlns:p="http://schemas.openxmlformats.org/presentationml/2006/main">
   <p:cSld>
     <p:spTree>
       <p:nvGrpSpPr>
@@ -9397,7 +9699,14 @@
         <p:cNvGrpSpPr/>
         <p:nvPr/>
       </p:nvGrpSpPr>
-      <p:grpSpPr/>
+      <p:grpSpPr>
+        <a:xfrm>
+          <a:off x="0" y="0"/>
+          <a:ext cx="0" cy="0"/>
+          <a:chOff x="0" y="0"/>
+          <a:chExt cx="0" cy="0"/>
+        </a:xfrm>
+      </p:grpSpPr>
       <p:sp>
         <p:nvSpPr>
           <p:cNvPr id="2" name="Rectangle 1"/>
@@ -9439,6 +9748,7 @@
           <a:lstStyle/>
           <a:p>
             <a:pPr algn="ctr"/>
+            <a:endParaRPr/>
           </a:p>
         </p:txBody>
       </p:sp>
@@ -9483,6 +9793,7 @@
           <a:lstStyle/>
           <a:p>
             <a:pPr algn="ctr"/>
+            <a:endParaRPr/>
           </a:p>
         </p:txBody>
       </p:sp>
@@ -9503,7 +9814,7 @@
           <a:noFill/>
         </p:spPr>
         <p:txBody>
-          <a:bodyPr wrap="square" anchor="t" lIns="0" rIns="0" tIns="0" bIns="0">
+          <a:bodyPr wrap="square" lIns="0" tIns="0" rIns="0" bIns="0" anchor="t">
             <a:spAutoFit/>
           </a:bodyPr>
           <a:lstStyle/>
@@ -9542,7 +9853,7 @@
           <a:noFill/>
         </p:spPr>
         <p:txBody>
-          <a:bodyPr wrap="square" anchor="t" lIns="0" rIns="0" tIns="0" bIns="0">
+          <a:bodyPr wrap="square" lIns="0" tIns="0" rIns="0" bIns="0" anchor="t">
             <a:spAutoFit/>
           </a:bodyPr>
           <a:lstStyle/>
@@ -9605,6 +9916,7 @@
           <a:lstStyle/>
           <a:p>
             <a:pPr algn="ctr"/>
+            <a:endParaRPr/>
           </a:p>
         </p:txBody>
       </p:sp>
@@ -9625,7 +9937,7 @@
           <a:noFill/>
         </p:spPr>
         <p:txBody>
-          <a:bodyPr wrap="square" anchor="t" lIns="0" rIns="0" tIns="0" bIns="0">
+          <a:bodyPr wrap="square" lIns="0" tIns="0" rIns="0" bIns="0" anchor="t">
             <a:spAutoFit/>
           </a:bodyPr>
           <a:lstStyle/>
@@ -9664,7 +9976,7 @@
           <a:noFill/>
         </p:spPr>
         <p:txBody>
-          <a:bodyPr wrap="square" anchor="t" lIns="0" rIns="0" tIns="0" bIns="0">
+          <a:bodyPr wrap="square" lIns="0" tIns="0" rIns="0" bIns="0" anchor="t">
             <a:spAutoFit/>
           </a:bodyPr>
           <a:lstStyle/>
@@ -9727,6 +10039,7 @@
           <a:lstStyle/>
           <a:p>
             <a:pPr algn="ctr"/>
+            <a:endParaRPr/>
           </a:p>
         </p:txBody>
       </p:sp>
@@ -9771,6 +10084,7 @@
           <a:lstStyle/>
           <a:p>
             <a:pPr algn="ctr"/>
+            <a:endParaRPr/>
           </a:p>
         </p:txBody>
       </p:sp>
@@ -9791,7 +10105,7 @@
           <a:noFill/>
         </p:spPr>
         <p:txBody>
-          <a:bodyPr wrap="square" anchor="t" lIns="0" rIns="0" tIns="0" bIns="0">
+          <a:bodyPr wrap="square" lIns="0" tIns="0" rIns="0" bIns="0" anchor="t">
             <a:spAutoFit/>
           </a:bodyPr>
           <a:lstStyle/>
@@ -9848,14 +10162,32 @@
                 <a:tableStyleId>{5C22544A-7EE6-4342-B048-85BDC9FD1C3A}</a:tableStyleId>
               </a:tblPr>
               <a:tblGrid>
-                <a:gridCol w="4480560"/>
-                <a:gridCol w="4754880"/>
-                <a:gridCol w="1639519"/>
+                <a:gridCol w="4480560">
+                  <a:extLst>
+                    <a:ext uri="{9D8B030D-6E8A-4147-A177-3AD203B41FA5}">
+                      <a16:colId xmlns:a16="http://schemas.microsoft.com/office/drawing/2014/main" val="20000"/>
+                    </a:ext>
+                  </a:extLst>
+                </a:gridCol>
+                <a:gridCol w="4754880">
+                  <a:extLst>
+                    <a:ext uri="{9D8B030D-6E8A-4147-A177-3AD203B41FA5}">
+                      <a16:colId xmlns:a16="http://schemas.microsoft.com/office/drawing/2014/main" val="20001"/>
+                    </a:ext>
+                  </a:extLst>
+                </a:gridCol>
+                <a:gridCol w="1639519">
+                  <a:extLst>
+                    <a:ext uri="{9D8B030D-6E8A-4147-A177-3AD203B41FA5}">
+                      <a16:colId xmlns:a16="http://schemas.microsoft.com/office/drawing/2014/main" val="20002"/>
+                    </a:ext>
+                  </a:extLst>
+                </a:gridCol>
               </a:tblGrid>
               <a:tr h="365760">
                 <a:tc>
                   <a:txBody>
-                    <a:bodyPr wrap="square"/>
+                    <a:bodyPr/>
                     <a:lstStyle/>
                     <a:p>
                       <a:r>
@@ -9869,7 +10201,7 @@
                       </a:r>
                     </a:p>
                   </a:txBody>
-                  <a:tcPr anchor="ctr" marL="91440" marR="91440">
+                  <a:tcPr anchor="ctr">
                     <a:solidFill>
                       <a:srgbClr val="123045"/>
                     </a:solidFill>
@@ -9877,7 +10209,7 @@
                 </a:tc>
                 <a:tc>
                   <a:txBody>
-                    <a:bodyPr wrap="square"/>
+                    <a:bodyPr/>
                     <a:lstStyle/>
                     <a:p>
                       <a:r>
@@ -9891,7 +10223,7 @@
                       </a:r>
                     </a:p>
                   </a:txBody>
-                  <a:tcPr anchor="ctr" marL="91440" marR="91440">
+                  <a:tcPr anchor="ctr">
                     <a:solidFill>
                       <a:srgbClr val="123045"/>
                     </a:solidFill>
@@ -9899,7 +10231,7 @@
                 </a:tc>
                 <a:tc>
                   <a:txBody>
-                    <a:bodyPr wrap="square"/>
+                    <a:bodyPr/>
                     <a:lstStyle/>
                     <a:p>
                       <a:r>
@@ -9913,17 +10245,22 @@
                       </a:r>
                     </a:p>
                   </a:txBody>
-                  <a:tcPr anchor="ctr" marL="91440" marR="91440">
+                  <a:tcPr anchor="ctr">
                     <a:solidFill>
                       <a:srgbClr val="123045"/>
                     </a:solidFill>
                   </a:tcPr>
                 </a:tc>
+                <a:extLst>
+                  <a:ext uri="{0D108BD9-81ED-4DB2-BD59-A6C34878D82A}">
+                    <a16:rowId xmlns:a16="http://schemas.microsoft.com/office/drawing/2014/main" val="10000"/>
+                  </a:ext>
+                </a:extLst>
               </a:tr>
               <a:tr h="397764">
                 <a:tc>
                   <a:txBody>
-                    <a:bodyPr wrap="square"/>
+                    <a:bodyPr/>
                     <a:lstStyle/>
                     <a:p>
                       <a:r>
@@ -9937,7 +10274,7 @@
                       </a:r>
                     </a:p>
                   </a:txBody>
-                  <a:tcPr anchor="ctr" marL="91440" marR="91440">
+                  <a:tcPr anchor="ctr">
                     <a:solidFill>
                       <a:srgbClr val="FBECEC"/>
                     </a:solidFill>
@@ -9945,7 +10282,7 @@
                 </a:tc>
                 <a:tc>
                   <a:txBody>
-                    <a:bodyPr wrap="square"/>
+                    <a:bodyPr/>
                     <a:lstStyle/>
                     <a:p>
                       <a:r>
@@ -9959,7 +10296,7 @@
                       </a:r>
                     </a:p>
                   </a:txBody>
-                  <a:tcPr anchor="ctr" marL="91440" marR="91440">
+                  <a:tcPr anchor="ctr">
                     <a:solidFill>
                       <a:srgbClr val="FBECEC"/>
                     </a:solidFill>
@@ -9967,7 +10304,7 @@
                 </a:tc>
                 <a:tc>
                   <a:txBody>
-                    <a:bodyPr wrap="square"/>
+                    <a:bodyPr/>
                     <a:lstStyle/>
                     <a:p>
                       <a:r>
@@ -9981,17 +10318,22 @@
                       </a:r>
                     </a:p>
                   </a:txBody>
-                  <a:tcPr anchor="ctr" marL="91440" marR="91440">
+                  <a:tcPr anchor="ctr">
                     <a:solidFill>
                       <a:srgbClr val="FBECEC"/>
                     </a:solidFill>
                   </a:tcPr>
                 </a:tc>
+                <a:extLst>
+                  <a:ext uri="{0D108BD9-81ED-4DB2-BD59-A6C34878D82A}">
+                    <a16:rowId xmlns:a16="http://schemas.microsoft.com/office/drawing/2014/main" val="10001"/>
+                  </a:ext>
+                </a:extLst>
               </a:tr>
               <a:tr h="397764">
                 <a:tc>
                   <a:txBody>
-                    <a:bodyPr wrap="square"/>
+                    <a:bodyPr/>
                     <a:lstStyle/>
                     <a:p>
                       <a:r>
@@ -10005,7 +10347,7 @@
                       </a:r>
                     </a:p>
                   </a:txBody>
-                  <a:tcPr anchor="ctr" marL="91440" marR="91440">
+                  <a:tcPr anchor="ctr">
                     <a:solidFill>
                       <a:srgbClr val="E7F4EC"/>
                     </a:solidFill>
@@ -10013,7 +10355,7 @@
                 </a:tc>
                 <a:tc>
                   <a:txBody>
-                    <a:bodyPr wrap="square"/>
+                    <a:bodyPr/>
                     <a:lstStyle/>
                     <a:p>
                       <a:r>
@@ -10027,7 +10369,7 @@
                       </a:r>
                     </a:p>
                   </a:txBody>
-                  <a:tcPr anchor="ctr" marL="91440" marR="91440">
+                  <a:tcPr anchor="ctr">
                     <a:solidFill>
                       <a:srgbClr val="E7F4EC"/>
                     </a:solidFill>
@@ -10035,7 +10377,7 @@
                 </a:tc>
                 <a:tc>
                   <a:txBody>
-                    <a:bodyPr wrap="square"/>
+                    <a:bodyPr/>
                     <a:lstStyle/>
                     <a:p>
                       <a:r>
@@ -10049,17 +10391,22 @@
                       </a:r>
                     </a:p>
                   </a:txBody>
-                  <a:tcPr anchor="ctr" marL="91440" marR="91440">
+                  <a:tcPr anchor="ctr">
                     <a:solidFill>
                       <a:srgbClr val="E7F4EC"/>
                     </a:solidFill>
                   </a:tcPr>
                 </a:tc>
+                <a:extLst>
+                  <a:ext uri="{0D108BD9-81ED-4DB2-BD59-A6C34878D82A}">
+                    <a16:rowId xmlns:a16="http://schemas.microsoft.com/office/drawing/2014/main" val="10002"/>
+                  </a:ext>
+                </a:extLst>
               </a:tr>
               <a:tr h="397764">
                 <a:tc>
                   <a:txBody>
-                    <a:bodyPr wrap="square"/>
+                    <a:bodyPr/>
                     <a:lstStyle/>
                     <a:p>
                       <a:r>
@@ -10073,7 +10420,7 @@
                       </a:r>
                     </a:p>
                   </a:txBody>
-                  <a:tcPr anchor="ctr" marL="91440" marR="91440">
+                  <a:tcPr anchor="ctr">
                     <a:solidFill>
                       <a:srgbClr val="FDF1DF"/>
                     </a:solidFill>
@@ -10081,7 +10428,7 @@
                 </a:tc>
                 <a:tc>
                   <a:txBody>
-                    <a:bodyPr wrap="square"/>
+                    <a:bodyPr/>
                     <a:lstStyle/>
                     <a:p>
                       <a:r>
@@ -10095,7 +10442,7 @@
                       </a:r>
                     </a:p>
                   </a:txBody>
-                  <a:tcPr anchor="ctr" marL="91440" marR="91440">
+                  <a:tcPr anchor="ctr">
                     <a:solidFill>
                       <a:srgbClr val="FDF1DF"/>
                     </a:solidFill>
@@ -10103,7 +10450,7 @@
                 </a:tc>
                 <a:tc>
                   <a:txBody>
-                    <a:bodyPr wrap="square"/>
+                    <a:bodyPr/>
                     <a:lstStyle/>
                     <a:p>
                       <a:r>
@@ -10117,17 +10464,22 @@
                       </a:r>
                     </a:p>
                   </a:txBody>
-                  <a:tcPr anchor="ctr" marL="91440" marR="91440">
+                  <a:tcPr anchor="ctr">
                     <a:solidFill>
                       <a:srgbClr val="FDF1DF"/>
                     </a:solidFill>
                   </a:tcPr>
                 </a:tc>
+                <a:extLst>
+                  <a:ext uri="{0D108BD9-81ED-4DB2-BD59-A6C34878D82A}">
+                    <a16:rowId xmlns:a16="http://schemas.microsoft.com/office/drawing/2014/main" val="10003"/>
+                  </a:ext>
+                </a:extLst>
               </a:tr>
               <a:tr h="397764">
                 <a:tc>
                   <a:txBody>
-                    <a:bodyPr wrap="square"/>
+                    <a:bodyPr/>
                     <a:lstStyle/>
                     <a:p>
                       <a:r>
@@ -10141,7 +10493,7 @@
                       </a:r>
                     </a:p>
                   </a:txBody>
-                  <a:tcPr anchor="ctr" marL="91440" marR="91440">
+                  <a:tcPr anchor="ctr">
                     <a:solidFill>
                       <a:srgbClr val="FDF1DF"/>
                     </a:solidFill>
@@ -10149,7 +10501,7 @@
                 </a:tc>
                 <a:tc>
                   <a:txBody>
-                    <a:bodyPr wrap="square"/>
+                    <a:bodyPr/>
                     <a:lstStyle/>
                     <a:p>
                       <a:r>
@@ -10163,7 +10515,7 @@
                       </a:r>
                     </a:p>
                   </a:txBody>
-                  <a:tcPr anchor="ctr" marL="91440" marR="91440">
+                  <a:tcPr anchor="ctr">
                     <a:solidFill>
                       <a:srgbClr val="FDF1DF"/>
                     </a:solidFill>
@@ -10171,7 +10523,7 @@
                 </a:tc>
                 <a:tc>
                   <a:txBody>
-                    <a:bodyPr wrap="square"/>
+                    <a:bodyPr/>
                     <a:lstStyle/>
                     <a:p>
                       <a:r>
@@ -10185,17 +10537,22 @@
                       </a:r>
                     </a:p>
                   </a:txBody>
-                  <a:tcPr anchor="ctr" marL="91440" marR="91440">
+                  <a:tcPr anchor="ctr">
                     <a:solidFill>
                       <a:srgbClr val="FDF1DF"/>
                     </a:solidFill>
                   </a:tcPr>
                 </a:tc>
+                <a:extLst>
+                  <a:ext uri="{0D108BD9-81ED-4DB2-BD59-A6C34878D82A}">
+                    <a16:rowId xmlns:a16="http://schemas.microsoft.com/office/drawing/2014/main" val="10004"/>
+                  </a:ext>
+                </a:extLst>
               </a:tr>
               <a:tr h="397764">
                 <a:tc>
                   <a:txBody>
-                    <a:bodyPr wrap="square"/>
+                    <a:bodyPr/>
                     <a:lstStyle/>
                     <a:p>
                       <a:r>
@@ -10209,7 +10566,7 @@
                       </a:r>
                     </a:p>
                   </a:txBody>
-                  <a:tcPr anchor="ctr" marL="91440" marR="91440">
+                  <a:tcPr anchor="ctr">
                     <a:solidFill>
                       <a:srgbClr val="FDF1DF"/>
                     </a:solidFill>
@@ -10217,7 +10574,7 @@
                 </a:tc>
                 <a:tc>
                   <a:txBody>
-                    <a:bodyPr wrap="square"/>
+                    <a:bodyPr/>
                     <a:lstStyle/>
                     <a:p>
                       <a:r>
@@ -10231,7 +10588,7 @@
                       </a:r>
                     </a:p>
                   </a:txBody>
-                  <a:tcPr anchor="ctr" marL="91440" marR="91440">
+                  <a:tcPr anchor="ctr">
                     <a:solidFill>
                       <a:srgbClr val="FDF1DF"/>
                     </a:solidFill>
@@ -10239,7 +10596,7 @@
                 </a:tc>
                 <a:tc>
                   <a:txBody>
-                    <a:bodyPr wrap="square"/>
+                    <a:bodyPr/>
                     <a:lstStyle/>
                     <a:p>
                       <a:r>
@@ -10253,12 +10610,17 @@
                       </a:r>
                     </a:p>
                   </a:txBody>
-                  <a:tcPr anchor="ctr" marL="91440" marR="91440">
+                  <a:tcPr anchor="ctr">
                     <a:solidFill>
                       <a:srgbClr val="FDF1DF"/>
                     </a:solidFill>
                   </a:tcPr>
                 </a:tc>
+                <a:extLst>
+                  <a:ext uri="{0D108BD9-81ED-4DB2-BD59-A6C34878D82A}">
+                    <a16:rowId xmlns:a16="http://schemas.microsoft.com/office/drawing/2014/main" val="10005"/>
+                  </a:ext>
+                </a:extLst>
               </a:tr>
             </a:tbl>
           </a:graphicData>
@@ -10273,7 +10635,7 @@
 </file>
 
 <file path=ppt/slides/slide17.xml><?xml version="1.0" encoding="utf-8"?>
-<p:sld xmlns:a="http://schemas.openxmlformats.org/drawingml/2006/main" xmlns:p="http://schemas.openxmlformats.org/presentationml/2006/main" xmlns:r="http://schemas.openxmlformats.org/officeDocument/2006/relationships">
+<p:sld xmlns:a="http://schemas.openxmlformats.org/drawingml/2006/main" xmlns:r="http://schemas.openxmlformats.org/officeDocument/2006/relationships" xmlns:p="http://schemas.openxmlformats.org/presentationml/2006/main">
   <p:cSld>
     <p:spTree>
       <p:nvGrpSpPr>
@@ -10281,7 +10643,14 @@
         <p:cNvGrpSpPr/>
         <p:nvPr/>
       </p:nvGrpSpPr>
-      <p:grpSpPr/>
+      <p:grpSpPr>
+        <a:xfrm>
+          <a:off x="0" y="0"/>
+          <a:ext cx="0" cy="0"/>
+          <a:chOff x="0" y="0"/>
+          <a:chExt cx="0" cy="0"/>
+        </a:xfrm>
+      </p:grpSpPr>
       <p:sp>
         <p:nvSpPr>
           <p:cNvPr id="2" name="Rectangle 1"/>
@@ -10323,6 +10692,7 @@
           <a:lstStyle/>
           <a:p>
             <a:pPr algn="ctr"/>
+            <a:endParaRPr/>
           </a:p>
         </p:txBody>
       </p:sp>
@@ -10367,6 +10737,7 @@
           <a:lstStyle/>
           <a:p>
             <a:pPr algn="ctr"/>
+            <a:endParaRPr/>
           </a:p>
         </p:txBody>
       </p:sp>
@@ -10387,7 +10758,7 @@
           <a:noFill/>
         </p:spPr>
         <p:txBody>
-          <a:bodyPr wrap="square" anchor="t" lIns="0" rIns="0" tIns="0" bIns="0">
+          <a:bodyPr wrap="square" lIns="0" tIns="0" rIns="0" bIns="0" anchor="t">
             <a:spAutoFit/>
           </a:bodyPr>
           <a:lstStyle/>
@@ -10426,7 +10797,7 @@
           <a:noFill/>
         </p:spPr>
         <p:txBody>
-          <a:bodyPr wrap="square" anchor="t" lIns="0" rIns="0" tIns="0" bIns="0">
+          <a:bodyPr wrap="square" lIns="0" tIns="0" rIns="0" bIns="0" anchor="t">
             <a:spAutoFit/>
           </a:bodyPr>
           <a:lstStyle/>
@@ -10489,6 +10860,7 @@
           <a:lstStyle/>
           <a:p>
             <a:pPr algn="ctr"/>
+            <a:endParaRPr/>
           </a:p>
         </p:txBody>
       </p:sp>
@@ -10509,7 +10881,7 @@
           <a:noFill/>
         </p:spPr>
         <p:txBody>
-          <a:bodyPr wrap="square" anchor="t" lIns="0" rIns="0" tIns="0" bIns="0">
+          <a:bodyPr wrap="square" lIns="0" tIns="0" rIns="0" bIns="0" anchor="t">
             <a:spAutoFit/>
           </a:bodyPr>
           <a:lstStyle/>
@@ -10548,7 +10920,7 @@
           <a:noFill/>
         </p:spPr>
         <p:txBody>
-          <a:bodyPr wrap="square" anchor="t" lIns="0" rIns="0" tIns="0" bIns="0">
+          <a:bodyPr wrap="square" lIns="0" tIns="0" rIns="0" bIns="0" anchor="t">
             <a:spAutoFit/>
           </a:bodyPr>
           <a:lstStyle/>
@@ -10611,6 +10983,7 @@
           <a:lstStyle/>
           <a:p>
             <a:pPr algn="ctr"/>
+            <a:endParaRPr/>
           </a:p>
         </p:txBody>
       </p:sp>
@@ -10655,6 +11028,7 @@
           <a:lstStyle/>
           <a:p>
             <a:pPr algn="ctr"/>
+            <a:endParaRPr/>
           </a:p>
         </p:txBody>
       </p:sp>
@@ -10675,7 +11049,7 @@
           <a:noFill/>
         </p:spPr>
         <p:txBody>
-          <a:bodyPr wrap="square" anchor="t" lIns="0" rIns="0" tIns="0" bIns="0">
+          <a:bodyPr wrap="square" lIns="0" tIns="0" rIns="0" bIns="0" anchor="t">
             <a:spAutoFit/>
           </a:bodyPr>
           <a:lstStyle/>
@@ -10754,6 +11128,7 @@
           <a:lstStyle/>
           <a:p>
             <a:pPr algn="ctr"/>
+            <a:endParaRPr/>
           </a:p>
         </p:txBody>
       </p:sp>
@@ -10798,6 +11173,7 @@
           <a:lstStyle/>
           <a:p>
             <a:pPr algn="ctr"/>
+            <a:endParaRPr/>
           </a:p>
         </p:txBody>
       </p:sp>
@@ -10818,7 +11194,7 @@
           <a:noFill/>
         </p:spPr>
         <p:txBody>
-          <a:bodyPr wrap="square" anchor="t" lIns="0" rIns="0" tIns="0" bIns="0">
+          <a:bodyPr wrap="square" lIns="0" tIns="0" rIns="0" bIns="0" anchor="t">
             <a:spAutoFit/>
           </a:bodyPr>
           <a:lstStyle/>
@@ -10897,6 +11273,7 @@
           <a:lstStyle/>
           <a:p>
             <a:pPr algn="ctr"/>
+            <a:endParaRPr/>
           </a:p>
         </p:txBody>
       </p:sp>
@@ -10941,6 +11318,7 @@
           <a:lstStyle/>
           <a:p>
             <a:pPr algn="ctr"/>
+            <a:endParaRPr/>
           </a:p>
         </p:txBody>
       </p:sp>
@@ -10961,7 +11339,7 @@
           <a:noFill/>
         </p:spPr>
         <p:txBody>
-          <a:bodyPr wrap="square" anchor="t" lIns="0" rIns="0" tIns="0" bIns="0">
+          <a:bodyPr wrap="square" lIns="0" tIns="0" rIns="0" bIns="0" anchor="t">
             <a:spAutoFit/>
           </a:bodyPr>
           <a:lstStyle/>
@@ -11040,6 +11418,7 @@
           <a:lstStyle/>
           <a:p>
             <a:pPr algn="ctr"/>
+            <a:endParaRPr/>
           </a:p>
         </p:txBody>
       </p:sp>
@@ -11084,6 +11463,7 @@
           <a:lstStyle/>
           <a:p>
             <a:pPr algn="ctr"/>
+            <a:endParaRPr/>
           </a:p>
         </p:txBody>
       </p:sp>
@@ -11104,7 +11484,7 @@
           <a:noFill/>
         </p:spPr>
         <p:txBody>
-          <a:bodyPr wrap="square" anchor="t" lIns="0" rIns="0" tIns="0" bIns="0">
+          <a:bodyPr wrap="square" lIns="0" tIns="0" rIns="0" bIns="0" anchor="t">
             <a:spAutoFit/>
           </a:bodyPr>
           <a:lstStyle/>
@@ -11151,7 +11531,7 @@
 </file>
 
 <file path=ppt/slides/slide18.xml><?xml version="1.0" encoding="utf-8"?>
-<p:sld xmlns:a="http://schemas.openxmlformats.org/drawingml/2006/main" xmlns:p="http://schemas.openxmlformats.org/presentationml/2006/main" xmlns:r="http://schemas.openxmlformats.org/officeDocument/2006/relationships">
+<p:sld xmlns:a="http://schemas.openxmlformats.org/drawingml/2006/main" xmlns:r="http://schemas.openxmlformats.org/officeDocument/2006/relationships" xmlns:p="http://schemas.openxmlformats.org/presentationml/2006/main">
   <p:cSld>
     <p:spTree>
       <p:nvGrpSpPr>
@@ -11159,7 +11539,14 @@
         <p:cNvGrpSpPr/>
         <p:nvPr/>
       </p:nvGrpSpPr>
-      <p:grpSpPr/>
+      <p:grpSpPr>
+        <a:xfrm>
+          <a:off x="0" y="0"/>
+          <a:ext cx="0" cy="0"/>
+          <a:chOff x="0" y="0"/>
+          <a:chExt cx="0" cy="0"/>
+        </a:xfrm>
+      </p:grpSpPr>
       <p:sp>
         <p:nvSpPr>
           <p:cNvPr id="2" name="Rectangle 1"/>
@@ -11201,6 +11588,7 @@
           <a:lstStyle/>
           <a:p>
             <a:pPr algn="ctr"/>
+            <a:endParaRPr/>
           </a:p>
         </p:txBody>
       </p:sp>
@@ -11245,6 +11633,7 @@
           <a:lstStyle/>
           <a:p>
             <a:pPr algn="ctr"/>
+            <a:endParaRPr/>
           </a:p>
         </p:txBody>
       </p:sp>
@@ -11265,7 +11654,7 @@
           <a:noFill/>
         </p:spPr>
         <p:txBody>
-          <a:bodyPr wrap="square" anchor="t" lIns="0" rIns="0" tIns="0" bIns="0">
+          <a:bodyPr wrap="square" lIns="0" tIns="0" rIns="0" bIns="0" anchor="t">
             <a:spAutoFit/>
           </a:bodyPr>
           <a:lstStyle/>
@@ -11304,7 +11693,7 @@
           <a:noFill/>
         </p:spPr>
         <p:txBody>
-          <a:bodyPr wrap="square" anchor="t" lIns="0" rIns="0" tIns="0" bIns="0">
+          <a:bodyPr wrap="square" lIns="0" tIns="0" rIns="0" bIns="0" anchor="t">
             <a:spAutoFit/>
           </a:bodyPr>
           <a:lstStyle/>
@@ -11367,6 +11756,7 @@
           <a:lstStyle/>
           <a:p>
             <a:pPr algn="ctr"/>
+            <a:endParaRPr/>
           </a:p>
         </p:txBody>
       </p:sp>
@@ -11387,7 +11777,7 @@
           <a:noFill/>
         </p:spPr>
         <p:txBody>
-          <a:bodyPr wrap="square" anchor="t" lIns="0" rIns="0" tIns="0" bIns="0">
+          <a:bodyPr wrap="square" lIns="0" tIns="0" rIns="0" bIns="0" anchor="t">
             <a:spAutoFit/>
           </a:bodyPr>
           <a:lstStyle/>
@@ -11426,7 +11816,7 @@
           <a:noFill/>
         </p:spPr>
         <p:txBody>
-          <a:bodyPr wrap="square" anchor="t" lIns="0" rIns="0" tIns="0" bIns="0">
+          <a:bodyPr wrap="square" lIns="0" tIns="0" rIns="0" bIns="0" anchor="t">
             <a:spAutoFit/>
           </a:bodyPr>
           <a:lstStyle/>
@@ -11489,6 +11879,7 @@
           <a:lstStyle/>
           <a:p>
             <a:pPr algn="ctr"/>
+            <a:endParaRPr/>
           </a:p>
         </p:txBody>
       </p:sp>
@@ -11509,7 +11900,7 @@
           <a:noFill/>
         </p:spPr>
         <p:txBody>
-          <a:bodyPr wrap="square" anchor="ctr" lIns="0" rIns="0" tIns="0" bIns="0">
+          <a:bodyPr wrap="square" lIns="0" tIns="0" rIns="0" bIns="0" anchor="ctr">
             <a:spAutoFit/>
           </a:bodyPr>
           <a:lstStyle/>
@@ -11548,7 +11939,7 @@
           <a:noFill/>
         </p:spPr>
         <p:txBody>
-          <a:bodyPr wrap="square" anchor="t" lIns="0" rIns="0" tIns="0" bIns="0">
+          <a:bodyPr wrap="square" lIns="0" tIns="0" rIns="0" bIns="0" anchor="t">
             <a:spAutoFit/>
           </a:bodyPr>
           <a:lstStyle/>
@@ -11627,6 +12018,7 @@
           <a:lstStyle/>
           <a:p>
             <a:pPr algn="ctr"/>
+            <a:endParaRPr/>
           </a:p>
         </p:txBody>
       </p:sp>
@@ -11647,7 +12039,7 @@
           <a:noFill/>
         </p:spPr>
         <p:txBody>
-          <a:bodyPr wrap="square" anchor="ctr" lIns="0" rIns="0" tIns="0" bIns="0">
+          <a:bodyPr wrap="square" lIns="0" tIns="0" rIns="0" bIns="0" anchor="ctr">
             <a:spAutoFit/>
           </a:bodyPr>
           <a:lstStyle/>
@@ -11686,7 +12078,7 @@
           <a:noFill/>
         </p:spPr>
         <p:txBody>
-          <a:bodyPr wrap="square" anchor="t" lIns="0" rIns="0" tIns="0" bIns="0">
+          <a:bodyPr wrap="square" lIns="0" tIns="0" rIns="0" bIns="0" anchor="t">
             <a:spAutoFit/>
           </a:bodyPr>
           <a:lstStyle/>
@@ -11765,6 +12157,7 @@
           <a:lstStyle/>
           <a:p>
             <a:pPr algn="ctr"/>
+            <a:endParaRPr/>
           </a:p>
         </p:txBody>
       </p:sp>
@@ -11785,7 +12178,7 @@
           <a:noFill/>
         </p:spPr>
         <p:txBody>
-          <a:bodyPr wrap="square" anchor="ctr" lIns="0" rIns="0" tIns="0" bIns="0">
+          <a:bodyPr wrap="square" lIns="0" tIns="0" rIns="0" bIns="0" anchor="ctr">
             <a:spAutoFit/>
           </a:bodyPr>
           <a:lstStyle/>
@@ -11824,7 +12217,7 @@
           <a:noFill/>
         </p:spPr>
         <p:txBody>
-          <a:bodyPr wrap="square" anchor="t" lIns="0" rIns="0" tIns="0" bIns="0">
+          <a:bodyPr wrap="square" lIns="0" tIns="0" rIns="0" bIns="0" anchor="t">
             <a:spAutoFit/>
           </a:bodyPr>
           <a:lstStyle/>
@@ -11879,7 +12272,7 @@
           <a:noFill/>
         </p:spPr>
         <p:txBody>
-          <a:bodyPr wrap="square" anchor="t" lIns="0" rIns="0" tIns="0" bIns="0">
+          <a:bodyPr wrap="square" lIns="0" tIns="0" rIns="0" bIns="0" anchor="t">
             <a:spAutoFit/>
           </a:bodyPr>
           <a:lstStyle/>
@@ -11990,6 +12383,7 @@
           <a:lstStyle/>
           <a:p>
             <a:pPr algn="ctr"/>
+            <a:endParaRPr/>
           </a:p>
         </p:txBody>
       </p:sp>
@@ -12034,6 +12428,7 @@
           <a:lstStyle/>
           <a:p>
             <a:pPr algn="ctr"/>
+            <a:endParaRPr/>
           </a:p>
         </p:txBody>
       </p:sp>
@@ -12054,7 +12449,7 @@
           <a:noFill/>
         </p:spPr>
         <p:txBody>
-          <a:bodyPr wrap="square" anchor="t" lIns="0" rIns="0" tIns="0" bIns="0">
+          <a:bodyPr wrap="square" lIns="0" tIns="0" rIns="0" bIns="0" anchor="t">
             <a:spAutoFit/>
           </a:bodyPr>
           <a:lstStyle/>
@@ -12101,7 +12496,7 @@
 </file>
 
 <file path=ppt/slides/slide2.xml><?xml version="1.0" encoding="utf-8"?>
-<p:sld xmlns:a="http://schemas.openxmlformats.org/drawingml/2006/main" xmlns:p="http://schemas.openxmlformats.org/presentationml/2006/main" xmlns:r="http://schemas.openxmlformats.org/officeDocument/2006/relationships">
+<p:sld xmlns:a="http://schemas.openxmlformats.org/drawingml/2006/main" xmlns:r="http://schemas.openxmlformats.org/officeDocument/2006/relationships" xmlns:p="http://schemas.openxmlformats.org/presentationml/2006/main">
   <p:cSld>
     <p:spTree>
       <p:nvGrpSpPr>
@@ -12109,7 +12504,14 @@
         <p:cNvGrpSpPr/>
         <p:nvPr/>
       </p:nvGrpSpPr>
-      <p:grpSpPr/>
+      <p:grpSpPr>
+        <a:xfrm>
+          <a:off x="0" y="0"/>
+          <a:ext cx="0" cy="0"/>
+          <a:chOff x="0" y="0"/>
+          <a:chExt cx="0" cy="0"/>
+        </a:xfrm>
+      </p:grpSpPr>
       <p:sp>
         <p:nvSpPr>
           <p:cNvPr id="2" name="Rectangle 1"/>
@@ -12118,7 +12520,7 @@
         </p:nvSpPr>
         <p:spPr>
           <a:xfrm>
-            <a:off x="0" y="0"/>
+            <a:off x="13960" y="0"/>
             <a:ext cx="12191695" cy="6858000"/>
           </a:xfrm>
           <a:prstGeom prst="rect">
@@ -12151,6 +12553,7 @@
           <a:lstStyle/>
           <a:p>
             <a:pPr algn="ctr"/>
+            <a:endParaRPr/>
           </a:p>
         </p:txBody>
       </p:sp>
@@ -12195,6 +12598,7 @@
           <a:lstStyle/>
           <a:p>
             <a:pPr algn="ctr"/>
+            <a:endParaRPr/>
           </a:p>
         </p:txBody>
       </p:sp>
@@ -12215,7 +12619,7 @@
           <a:noFill/>
         </p:spPr>
         <p:txBody>
-          <a:bodyPr wrap="square" anchor="t" lIns="0" rIns="0" tIns="0" bIns="0">
+          <a:bodyPr wrap="square" lIns="0" tIns="0" rIns="0" bIns="0" anchor="t">
             <a:spAutoFit/>
           </a:bodyPr>
           <a:lstStyle/>
@@ -12254,7 +12658,7 @@
           <a:noFill/>
         </p:spPr>
         <p:txBody>
-          <a:bodyPr wrap="square" anchor="t" lIns="0" rIns="0" tIns="0" bIns="0">
+          <a:bodyPr wrap="square" lIns="0" tIns="0" rIns="0" bIns="0" anchor="t">
             <a:spAutoFit/>
           </a:bodyPr>
           <a:lstStyle/>
@@ -12317,6 +12721,7 @@
           <a:lstStyle/>
           <a:p>
             <a:pPr algn="ctr"/>
+            <a:endParaRPr/>
           </a:p>
         </p:txBody>
       </p:sp>
@@ -12337,7 +12742,7 @@
           <a:noFill/>
         </p:spPr>
         <p:txBody>
-          <a:bodyPr wrap="square" anchor="t" lIns="0" rIns="0" tIns="0" bIns="0">
+          <a:bodyPr wrap="square" lIns="0" tIns="0" rIns="0" bIns="0" anchor="t">
             <a:spAutoFit/>
           </a:bodyPr>
           <a:lstStyle/>
@@ -12376,7 +12781,7 @@
           <a:noFill/>
         </p:spPr>
         <p:txBody>
-          <a:bodyPr wrap="square" anchor="t" lIns="0" rIns="0" tIns="0" bIns="0">
+          <a:bodyPr wrap="square" lIns="0" tIns="0" rIns="0" bIns="0" anchor="t">
             <a:spAutoFit/>
           </a:bodyPr>
           <a:lstStyle/>
@@ -12439,6 +12844,7 @@
           <a:lstStyle/>
           <a:p>
             <a:pPr algn="ctr"/>
+            <a:endParaRPr/>
           </a:p>
         </p:txBody>
       </p:sp>
@@ -12483,6 +12889,7 @@
           <a:lstStyle/>
           <a:p>
             <a:pPr algn="ctr"/>
+            <a:endParaRPr/>
           </a:p>
         </p:txBody>
       </p:sp>
@@ -12503,7 +12910,7 @@
           <a:noFill/>
         </p:spPr>
         <p:txBody>
-          <a:bodyPr wrap="square" anchor="t" lIns="0" rIns="0" tIns="0" bIns="0">
+          <a:bodyPr wrap="square" lIns="0" tIns="0" rIns="0" bIns="0" anchor="t">
             <a:spAutoFit/>
           </a:bodyPr>
           <a:lstStyle/>
@@ -12582,6 +12989,7 @@
           <a:lstStyle/>
           <a:p>
             <a:pPr algn="ctr"/>
+            <a:endParaRPr/>
           </a:p>
         </p:txBody>
       </p:sp>
@@ -12626,6 +13034,7 @@
           <a:lstStyle/>
           <a:p>
             <a:pPr algn="ctr"/>
+            <a:endParaRPr/>
           </a:p>
         </p:txBody>
       </p:sp>
@@ -12646,7 +13055,7 @@
           <a:noFill/>
         </p:spPr>
         <p:txBody>
-          <a:bodyPr wrap="square" anchor="t" lIns="0" rIns="0" tIns="0" bIns="0">
+          <a:bodyPr wrap="square" lIns="0" tIns="0" rIns="0" bIns="0" anchor="t">
             <a:spAutoFit/>
           </a:bodyPr>
           <a:lstStyle/>
@@ -12725,6 +13134,7 @@
           <a:lstStyle/>
           <a:p>
             <a:pPr algn="ctr"/>
+            <a:endParaRPr/>
           </a:p>
         </p:txBody>
       </p:sp>
@@ -12769,6 +13179,7 @@
           <a:lstStyle/>
           <a:p>
             <a:pPr algn="ctr"/>
+            <a:endParaRPr/>
           </a:p>
         </p:txBody>
       </p:sp>
@@ -12789,7 +13200,7 @@
           <a:noFill/>
         </p:spPr>
         <p:txBody>
-          <a:bodyPr wrap="square" anchor="t" lIns="0" rIns="0" tIns="0" bIns="0">
+          <a:bodyPr wrap="square" lIns="0" tIns="0" rIns="0" bIns="0" anchor="t">
             <a:spAutoFit/>
           </a:bodyPr>
           <a:lstStyle/>
@@ -12844,7 +13255,7 @@
           <a:noFill/>
         </p:spPr>
         <p:txBody>
-          <a:bodyPr wrap="square" anchor="t" lIns="0" rIns="0" tIns="0" bIns="0">
+          <a:bodyPr wrap="square" lIns="0" tIns="0" rIns="0" bIns="0" anchor="t">
             <a:spAutoFit/>
           </a:bodyPr>
           <a:lstStyle/>
@@ -12911,6 +13322,7 @@
           <a:lstStyle/>
           <a:p>
             <a:pPr algn="ctr"/>
+            <a:endParaRPr/>
           </a:p>
         </p:txBody>
       </p:sp>
@@ -12955,6 +13367,7 @@
           <a:lstStyle/>
           <a:p>
             <a:pPr algn="ctr"/>
+            <a:endParaRPr/>
           </a:p>
         </p:txBody>
       </p:sp>
@@ -12967,7 +13380,7 @@
         <p:spPr>
           <a:xfrm>
             <a:off x="932688" y="4974336"/>
-            <a:ext cx="10372039" cy="768096"/>
+            <a:ext cx="10372039" cy="353943"/>
           </a:xfrm>
           <a:prstGeom prst="rect">
             <a:avLst/>
@@ -12975,26 +13388,10 @@
           <a:noFill/>
         </p:spPr>
         <p:txBody>
-          <a:bodyPr wrap="square" anchor="t" lIns="0" rIns="0" tIns="0" bIns="0">
+          <a:bodyPr wrap="square" lIns="0" tIns="0" rIns="0" bIns="0" anchor="t">
             <a:spAutoFit/>
           </a:bodyPr>
           <a:lstStyle/>
-          <a:p>
-            <a:pPr>
-              <a:spcAft>
-                <a:spcPts val="400"/>
-              </a:spcAft>
-            </a:pPr>
-            <a:r>
-              <a:rPr sz="1150" b="1">
-                <a:solidFill>
-                  <a:srgbClr val="B45309"/>
-                </a:solidFill>
-                <a:latin typeface="Segoe UI"/>
-              </a:rPr>
-              <a:t>Why that is the right state to be in</a:t>
-            </a:r>
-          </a:p>
           <a:p>
             <a:pPr>
               <a:spcAft>
@@ -13002,7 +13399,7 @@
               </a:spcAft>
             </a:pPr>
             <a:r>
-              <a:rPr sz="1150" b="0">
+              <a:rPr sz="1150" b="0" dirty="0">
                 <a:solidFill>
                   <a:srgbClr val="0D1F2D"/>
                 </a:solidFill>
@@ -13022,7 +13419,7 @@
 </file>
 
 <file path=ppt/slides/slide3.xml><?xml version="1.0" encoding="utf-8"?>
-<p:sld xmlns:a="http://schemas.openxmlformats.org/drawingml/2006/main" xmlns:p="http://schemas.openxmlformats.org/presentationml/2006/main" xmlns:r="http://schemas.openxmlformats.org/officeDocument/2006/relationships">
+<p:sld xmlns:a="http://schemas.openxmlformats.org/drawingml/2006/main" xmlns:r="http://schemas.openxmlformats.org/officeDocument/2006/relationships" xmlns:p="http://schemas.openxmlformats.org/presentationml/2006/main">
   <p:cSld>
     <p:spTree>
       <p:nvGrpSpPr>
@@ -13030,7 +13427,14 @@
         <p:cNvGrpSpPr/>
         <p:nvPr/>
       </p:nvGrpSpPr>
-      <p:grpSpPr/>
+      <p:grpSpPr>
+        <a:xfrm>
+          <a:off x="0" y="0"/>
+          <a:ext cx="0" cy="0"/>
+          <a:chOff x="0" y="0"/>
+          <a:chExt cx="0" cy="0"/>
+        </a:xfrm>
+      </p:grpSpPr>
       <p:sp>
         <p:nvSpPr>
           <p:cNvPr id="2" name="Rectangle 1"/>
@@ -13072,6 +13476,7 @@
           <a:lstStyle/>
           <a:p>
             <a:pPr algn="ctr"/>
+            <a:endParaRPr/>
           </a:p>
         </p:txBody>
       </p:sp>
@@ -13116,6 +13521,7 @@
           <a:lstStyle/>
           <a:p>
             <a:pPr algn="ctr"/>
+            <a:endParaRPr/>
           </a:p>
         </p:txBody>
       </p:sp>
@@ -13136,7 +13542,7 @@
           <a:noFill/>
         </p:spPr>
         <p:txBody>
-          <a:bodyPr wrap="square" anchor="t" lIns="0" rIns="0" tIns="0" bIns="0">
+          <a:bodyPr wrap="square" lIns="0" tIns="0" rIns="0" bIns="0" anchor="t">
             <a:spAutoFit/>
           </a:bodyPr>
           <a:lstStyle/>
@@ -13175,7 +13581,7 @@
           <a:noFill/>
         </p:spPr>
         <p:txBody>
-          <a:bodyPr wrap="square" anchor="t" lIns="0" rIns="0" tIns="0" bIns="0">
+          <a:bodyPr wrap="square" lIns="0" tIns="0" rIns="0" bIns="0" anchor="t">
             <a:spAutoFit/>
           </a:bodyPr>
           <a:lstStyle/>
@@ -13238,6 +13644,7 @@
           <a:lstStyle/>
           <a:p>
             <a:pPr algn="ctr"/>
+            <a:endParaRPr/>
           </a:p>
         </p:txBody>
       </p:sp>
@@ -13258,7 +13665,7 @@
           <a:noFill/>
         </p:spPr>
         <p:txBody>
-          <a:bodyPr wrap="square" anchor="t" lIns="0" rIns="0" tIns="0" bIns="0">
+          <a:bodyPr wrap="square" lIns="0" tIns="0" rIns="0" bIns="0" anchor="t">
             <a:spAutoFit/>
           </a:bodyPr>
           <a:lstStyle/>
@@ -13297,7 +13704,7 @@
           <a:noFill/>
         </p:spPr>
         <p:txBody>
-          <a:bodyPr wrap="square" anchor="t" lIns="0" rIns="0" tIns="0" bIns="0">
+          <a:bodyPr wrap="square" lIns="0" tIns="0" rIns="0" bIns="0" anchor="t">
             <a:spAutoFit/>
           </a:bodyPr>
           <a:lstStyle/>
@@ -13360,6 +13767,7 @@
           <a:lstStyle/>
           <a:p>
             <a:pPr algn="ctr"/>
+            <a:endParaRPr/>
           </a:p>
         </p:txBody>
       </p:sp>
@@ -13380,7 +13788,7 @@
           <a:noFill/>
         </p:spPr>
         <p:txBody>
-          <a:bodyPr wrap="square" anchor="t" lIns="0" rIns="0" tIns="0" bIns="0">
+          <a:bodyPr wrap="square" lIns="0" tIns="0" rIns="0" bIns="0" anchor="t">
             <a:spAutoFit/>
           </a:bodyPr>
           <a:lstStyle/>
@@ -13443,6 +13851,7 @@
           <a:lstStyle/>
           <a:p>
             <a:pPr algn="ctr"/>
+            <a:endParaRPr/>
           </a:p>
         </p:txBody>
       </p:sp>
@@ -13487,6 +13896,7 @@
           <a:lstStyle/>
           <a:p>
             <a:pPr algn="ctr"/>
+            <a:endParaRPr/>
           </a:p>
         </p:txBody>
       </p:sp>
@@ -13507,7 +13917,7 @@
           <a:noFill/>
         </p:spPr>
         <p:txBody>
-          <a:bodyPr wrap="square" anchor="t" lIns="0" rIns="0" tIns="0" bIns="0">
+          <a:bodyPr wrap="square" lIns="0" tIns="0" rIns="0" bIns="0" anchor="t">
             <a:spAutoFit/>
           </a:bodyPr>
           <a:lstStyle/>
@@ -13586,6 +13996,7 @@
           <a:lstStyle/>
           <a:p>
             <a:pPr algn="ctr"/>
+            <a:endParaRPr/>
           </a:p>
         </p:txBody>
       </p:sp>
@@ -13630,6 +14041,7 @@
           <a:lstStyle/>
           <a:p>
             <a:pPr algn="ctr"/>
+            <a:endParaRPr/>
           </a:p>
         </p:txBody>
       </p:sp>
@@ -13650,7 +14062,7 @@
           <a:noFill/>
         </p:spPr>
         <p:txBody>
-          <a:bodyPr wrap="square" anchor="t" lIns="0" rIns="0" tIns="0" bIns="0">
+          <a:bodyPr wrap="square" lIns="0" tIns="0" rIns="0" bIns="0" anchor="t">
             <a:spAutoFit/>
           </a:bodyPr>
           <a:lstStyle/>
@@ -13729,6 +14141,7 @@
           <a:lstStyle/>
           <a:p>
             <a:pPr algn="ctr"/>
+            <a:endParaRPr/>
           </a:p>
         </p:txBody>
       </p:sp>
@@ -13773,6 +14186,7 @@
           <a:lstStyle/>
           <a:p>
             <a:pPr algn="ctr"/>
+            <a:endParaRPr/>
           </a:p>
         </p:txBody>
       </p:sp>
@@ -13793,7 +14207,7 @@
           <a:noFill/>
         </p:spPr>
         <p:txBody>
-          <a:bodyPr wrap="square" anchor="t" lIns="0" rIns="0" tIns="0" bIns="0">
+          <a:bodyPr wrap="square" lIns="0" tIns="0" rIns="0" bIns="0" anchor="t">
             <a:spAutoFit/>
           </a:bodyPr>
           <a:lstStyle/>
@@ -13848,7 +14262,7 @@
           <a:noFill/>
         </p:spPr>
         <p:txBody>
-          <a:bodyPr wrap="square" anchor="t" lIns="0" rIns="0" tIns="0" bIns="0">
+          <a:bodyPr wrap="square" lIns="0" tIns="0" rIns="0" bIns="0" anchor="t">
             <a:spAutoFit/>
           </a:bodyPr>
           <a:lstStyle/>
@@ -13883,7 +14297,7 @@
 </file>
 
 <file path=ppt/slides/slide4.xml><?xml version="1.0" encoding="utf-8"?>
-<p:sld xmlns:a="http://schemas.openxmlformats.org/drawingml/2006/main" xmlns:p="http://schemas.openxmlformats.org/presentationml/2006/main" xmlns:r="http://schemas.openxmlformats.org/officeDocument/2006/relationships">
+<p:sld xmlns:a="http://schemas.openxmlformats.org/drawingml/2006/main" xmlns:r="http://schemas.openxmlformats.org/officeDocument/2006/relationships" xmlns:p="http://schemas.openxmlformats.org/presentationml/2006/main">
   <p:cSld>
     <p:spTree>
       <p:nvGrpSpPr>
@@ -13891,7 +14305,14 @@
         <p:cNvGrpSpPr/>
         <p:nvPr/>
       </p:nvGrpSpPr>
-      <p:grpSpPr/>
+      <p:grpSpPr>
+        <a:xfrm>
+          <a:off x="0" y="0"/>
+          <a:ext cx="0" cy="0"/>
+          <a:chOff x="0" y="0"/>
+          <a:chExt cx="0" cy="0"/>
+        </a:xfrm>
+      </p:grpSpPr>
       <p:sp>
         <p:nvSpPr>
           <p:cNvPr id="2" name="Rectangle 1"/>
@@ -13933,6 +14354,7 @@
           <a:lstStyle/>
           <a:p>
             <a:pPr algn="ctr"/>
+            <a:endParaRPr/>
           </a:p>
         </p:txBody>
       </p:sp>
@@ -13977,6 +14399,7 @@
           <a:lstStyle/>
           <a:p>
             <a:pPr algn="ctr"/>
+            <a:endParaRPr/>
           </a:p>
         </p:txBody>
       </p:sp>
@@ -13997,7 +14420,7 @@
           <a:noFill/>
         </p:spPr>
         <p:txBody>
-          <a:bodyPr wrap="square" anchor="t" lIns="0" rIns="0" tIns="0" bIns="0">
+          <a:bodyPr wrap="square" lIns="0" tIns="0" rIns="0" bIns="0" anchor="t">
             <a:spAutoFit/>
           </a:bodyPr>
           <a:lstStyle/>
@@ -14036,7 +14459,7 @@
           <a:noFill/>
         </p:spPr>
         <p:txBody>
-          <a:bodyPr wrap="square" anchor="t" lIns="0" rIns="0" tIns="0" bIns="0">
+          <a:bodyPr wrap="square" lIns="0" tIns="0" rIns="0" bIns="0" anchor="t">
             <a:spAutoFit/>
           </a:bodyPr>
           <a:lstStyle/>
@@ -14099,6 +14522,7 @@
           <a:lstStyle/>
           <a:p>
             <a:pPr algn="ctr"/>
+            <a:endParaRPr/>
           </a:p>
         </p:txBody>
       </p:sp>
@@ -14119,7 +14543,7 @@
           <a:noFill/>
         </p:spPr>
         <p:txBody>
-          <a:bodyPr wrap="square" anchor="t" lIns="0" rIns="0" tIns="0" bIns="0">
+          <a:bodyPr wrap="square" lIns="0" tIns="0" rIns="0" bIns="0" anchor="t">
             <a:spAutoFit/>
           </a:bodyPr>
           <a:lstStyle/>
@@ -14158,7 +14582,7 @@
           <a:noFill/>
         </p:spPr>
         <p:txBody>
-          <a:bodyPr wrap="square" anchor="t" lIns="0" rIns="0" tIns="0" bIns="0">
+          <a:bodyPr wrap="square" lIns="0" tIns="0" rIns="0" bIns="0" anchor="t">
             <a:spAutoFit/>
           </a:bodyPr>
           <a:lstStyle/>
@@ -14189,7 +14613,7 @@
         <p:spPr>
           <a:xfrm>
             <a:off x="658368" y="1700784"/>
-            <a:ext cx="10874959" cy="1828800"/>
+            <a:ext cx="10874959" cy="1582484"/>
           </a:xfrm>
           <a:prstGeom prst="rect">
             <a:avLst/>
@@ -14197,7 +14621,7 @@
           <a:noFill/>
         </p:spPr>
         <p:txBody>
-          <a:bodyPr wrap="square" anchor="t" lIns="0" rIns="0" tIns="0" bIns="0">
+          <a:bodyPr wrap="square" lIns="0" tIns="0" rIns="0" bIns="0" anchor="t">
             <a:spAutoFit/>
           </a:bodyPr>
           <a:lstStyle/>
@@ -14208,11 +14632,11 @@
               </a:spcAft>
             </a:pPr>
             <a:r>
-              <a:rPr sz="1700" b="0">
+              <a:rPr sz="1700" b="0" dirty="0">
                 <a:solidFill>
                   <a:srgbClr val="0D1F2D"/>
                 </a:solidFill>
-                <a:latin typeface="Segoe UI"/>
+                <a:latin typeface="+mj-lt"/>
               </a:rPr>
               <a:t>TTT-E2E compresses long context by updating “fast weights” during inference.</a:t>
             </a:r>
@@ -14224,11 +14648,11 @@
               </a:spcAft>
             </a:pPr>
             <a:r>
-              <a:rPr sz="1350" b="0">
+              <a:rPr sz="1350" b="0" dirty="0">
                 <a:solidFill>
                   <a:srgbClr val="5C6B78"/>
                 </a:solidFill>
-                <a:latin typeface="Segoe UI"/>
+                <a:latin typeface="+mj-lt"/>
               </a:rPr>
               <a:t>An inner SGD loop runs inside the forward pass — one step per mini-batch chunk of the context.</a:t>
             </a:r>
@@ -14240,11 +14664,11 @@
               </a:spcAft>
             </a:pPr>
             <a:r>
-              <a:rPr sz="1700" b="1">
+              <a:rPr sz="1700" b="1" dirty="0">
                 <a:solidFill>
                   <a:srgbClr val="123045"/>
                 </a:solidFill>
-                <a:latin typeface="Segoe UI"/>
+                <a:latin typeface="+mj-lt"/>
               </a:rPr>
               <a:t>That is the whole benefit, and the whole exposure.</a:t>
             </a:r>
@@ -14256,11 +14680,11 @@
               </a:spcAft>
             </a:pPr>
             <a:r>
-              <a:rPr sz="1350" b="0">
+              <a:rPr sz="1350" b="0" dirty="0">
                 <a:solidFill>
                   <a:srgbClr val="5C6B78"/>
                 </a:solidFill>
-                <a:latin typeface="Segoe UI"/>
+                <a:latin typeface="+mj-lt"/>
               </a:rPr>
               <a:t>Conventional inference is stateless: a bad prompt harms one response and is gone.</a:t>
             </a:r>
@@ -14272,11 +14696,11 @@
               </a:spcAft>
             </a:pPr>
             <a:r>
-              <a:rPr sz="1350" b="0">
+              <a:rPr sz="1350" b="0" dirty="0">
                 <a:solidFill>
                   <a:srgbClr val="B45309"/>
                 </a:solidFill>
-                <a:latin typeface="Segoe UI"/>
+                <a:latin typeface="+mj-lt"/>
               </a:rPr>
               <a:t>Here the context stream mutates model weights, so harm can persist past the request that caused it.</a:t>
             </a:r>
@@ -14289,7 +14713,13 @@
           <p:cNvGraphicFramePr>
             <a:graphicFrameLocks noGrp="1"/>
           </p:cNvGraphicFramePr>
-          <p:nvPr/>
+          <p:nvPr>
+            <p:extLst>
+              <p:ext uri="{D42A27DB-BD31-4B8C-83A1-F6EECF244321}">
+                <p14:modId xmlns:p14="http://schemas.microsoft.com/office/powerpoint/2010/main" val="32678581"/>
+              </p:ext>
+            </p:extLst>
+          </p:nvPr>
         </p:nvGraphicFramePr>
         <p:xfrm>
           <a:off x="658368" y="3657600"/>
@@ -14302,14 +14732,32 @@
                 <a:tableStyleId>{5C22544A-7EE6-4342-B048-85BDC9FD1C3A}</a:tableStyleId>
               </a:tblPr>
               <a:tblGrid>
-                <a:gridCol w="3108960"/>
-                <a:gridCol w="1828800"/>
-                <a:gridCol w="5937199"/>
+                <a:gridCol w="3108960">
+                  <a:extLst>
+                    <a:ext uri="{9D8B030D-6E8A-4147-A177-3AD203B41FA5}">
+                      <a16:colId xmlns:a16="http://schemas.microsoft.com/office/drawing/2014/main" val="20000"/>
+                    </a:ext>
+                  </a:extLst>
+                </a:gridCol>
+                <a:gridCol w="1828800">
+                  <a:extLst>
+                    <a:ext uri="{9D8B030D-6E8A-4147-A177-3AD203B41FA5}">
+                      <a16:colId xmlns:a16="http://schemas.microsoft.com/office/drawing/2014/main" val="20001"/>
+                    </a:ext>
+                  </a:extLst>
+                </a:gridCol>
+                <a:gridCol w="5937199">
+                  <a:extLst>
+                    <a:ext uri="{9D8B030D-6E8A-4147-A177-3AD203B41FA5}">
+                      <a16:colId xmlns:a16="http://schemas.microsoft.com/office/drawing/2014/main" val="20002"/>
+                    </a:ext>
+                  </a:extLst>
+                </a:gridCol>
               </a:tblGrid>
               <a:tr h="365760">
                 <a:tc>
                   <a:txBody>
-                    <a:bodyPr wrap="square"/>
+                    <a:bodyPr/>
                     <a:lstStyle/>
                     <a:p>
                       <a:r>
@@ -14323,7 +14771,7 @@
                       </a:r>
                     </a:p>
                   </a:txBody>
-                  <a:tcPr anchor="ctr" marL="91440" marR="91440">
+                  <a:tcPr anchor="ctr">
                     <a:solidFill>
                       <a:srgbClr val="123045"/>
                     </a:solidFill>
@@ -14331,7 +14779,7 @@
                 </a:tc>
                 <a:tc>
                   <a:txBody>
-                    <a:bodyPr wrap="square"/>
+                    <a:bodyPr/>
                     <a:lstStyle/>
                     <a:p>
                       <a:r>
@@ -14345,7 +14793,7 @@
                       </a:r>
                     </a:p>
                   </a:txBody>
-                  <a:tcPr anchor="ctr" marL="91440" marR="91440">
+                  <a:tcPr anchor="ctr">
                     <a:solidFill>
                       <a:srgbClr val="123045"/>
                     </a:solidFill>
@@ -14353,7 +14801,7 @@
                 </a:tc>
                 <a:tc>
                   <a:txBody>
-                    <a:bodyPr wrap="square"/>
+                    <a:bodyPr/>
                     <a:lstStyle/>
                     <a:p>
                       <a:r>
@@ -14367,17 +14815,22 @@
                       </a:r>
                     </a:p>
                   </a:txBody>
-                  <a:tcPr anchor="ctr" marL="91440" marR="91440">
+                  <a:tcPr anchor="ctr">
                     <a:solidFill>
                       <a:srgbClr val="123045"/>
                     </a:solidFill>
                   </a:tcPr>
                 </a:tc>
+                <a:extLst>
+                  <a:ext uri="{0D108BD9-81ED-4DB2-BD59-A6C34878D82A}">
+                    <a16:rowId xmlns:a16="http://schemas.microsoft.com/office/drawing/2014/main" val="10000"/>
+                  </a:ext>
+                </a:extLst>
               </a:tr>
               <a:tr h="397764">
                 <a:tc>
                   <a:txBody>
-                    <a:bodyPr wrap="square"/>
+                    <a:bodyPr/>
                     <a:lstStyle/>
                     <a:p>
                       <a:r>
@@ -14391,7 +14844,7 @@
                       </a:r>
                     </a:p>
                   </a:txBody>
-                  <a:tcPr anchor="ctr" marL="91440" marR="91440">
+                  <a:tcPr anchor="ctr">
                     <a:solidFill>
                       <a:srgbClr val="E7F4EC"/>
                     </a:solidFill>
@@ -14399,7 +14852,7 @@
                 </a:tc>
                 <a:tc>
                   <a:txBody>
-                    <a:bodyPr wrap="square"/>
+                    <a:bodyPr/>
                     <a:lstStyle/>
                     <a:p>
                       <a:r>
@@ -14413,7 +14866,7 @@
                       </a:r>
                     </a:p>
                   </a:txBody>
-                  <a:tcPr anchor="ctr" marL="91440" marR="91440">
+                  <a:tcPr anchor="ctr">
                     <a:solidFill>
                       <a:srgbClr val="E7F4EC"/>
                     </a:solidFill>
@@ -14421,7 +14874,7 @@
                 </a:tc>
                 <a:tc>
                   <a:txBody>
-                    <a:bodyPr wrap="square"/>
+                    <a:bodyPr/>
                     <a:lstStyle/>
                     <a:p>
                       <a:r>
@@ -14435,17 +14888,22 @@
                       </a:r>
                     </a:p>
                   </a:txBody>
-                  <a:tcPr anchor="ctr" marL="91440" marR="91440">
+                  <a:tcPr anchor="ctr">
                     <a:solidFill>
                       <a:srgbClr val="E7F4EC"/>
                     </a:solidFill>
                   </a:tcPr>
                 </a:tc>
+                <a:extLst>
+                  <a:ext uri="{0D108BD9-81ED-4DB2-BD59-A6C34878D82A}">
+                    <a16:rowId xmlns:a16="http://schemas.microsoft.com/office/drawing/2014/main" val="10001"/>
+                  </a:ext>
+                </a:extLst>
               </a:tr>
               <a:tr h="397764">
                 <a:tc>
                   <a:txBody>
-                    <a:bodyPr wrap="square"/>
+                    <a:bodyPr/>
                     <a:lstStyle/>
                     <a:p>
                       <a:r>
@@ -14459,7 +14917,7 @@
                       </a:r>
                     </a:p>
                   </a:txBody>
-                  <a:tcPr anchor="ctr" marL="91440" marR="91440">
+                  <a:tcPr anchor="ctr">
                     <a:solidFill>
                       <a:srgbClr val="E7F4EC"/>
                     </a:solidFill>
@@ -14467,7 +14925,7 @@
                 </a:tc>
                 <a:tc>
                   <a:txBody>
-                    <a:bodyPr wrap="square"/>
+                    <a:bodyPr/>
                     <a:lstStyle/>
                     <a:p>
                       <a:r>
@@ -14481,7 +14939,7 @@
                       </a:r>
                     </a:p>
                   </a:txBody>
-                  <a:tcPr anchor="ctr" marL="91440" marR="91440">
+                  <a:tcPr anchor="ctr">
                     <a:solidFill>
                       <a:srgbClr val="E7F4EC"/>
                     </a:solidFill>
@@ -14489,7 +14947,7 @@
                 </a:tc>
                 <a:tc>
                   <a:txBody>
-                    <a:bodyPr wrap="square"/>
+                    <a:bodyPr/>
                     <a:lstStyle/>
                     <a:p>
                       <a:r>
@@ -14503,17 +14961,22 @@
                       </a:r>
                     </a:p>
                   </a:txBody>
-                  <a:tcPr anchor="ctr" marL="91440" marR="91440">
+                  <a:tcPr anchor="ctr">
                     <a:solidFill>
                       <a:srgbClr val="E7F4EC"/>
                     </a:solidFill>
                   </a:tcPr>
                 </a:tc>
+                <a:extLst>
+                  <a:ext uri="{0D108BD9-81ED-4DB2-BD59-A6C34878D82A}">
+                    <a16:rowId xmlns:a16="http://schemas.microsoft.com/office/drawing/2014/main" val="10002"/>
+                  </a:ext>
+                </a:extLst>
               </a:tr>
               <a:tr h="397764">
                 <a:tc>
                   <a:txBody>
-                    <a:bodyPr wrap="square"/>
+                    <a:bodyPr/>
                     <a:lstStyle/>
                     <a:p>
                       <a:r>
@@ -14527,7 +14990,7 @@
                       </a:r>
                     </a:p>
                   </a:txBody>
-                  <a:tcPr anchor="ctr" marL="91440" marR="91440">
+                  <a:tcPr anchor="ctr">
                     <a:solidFill>
                       <a:srgbClr val="FDF1DF"/>
                     </a:solidFill>
@@ -14535,7 +14998,7 @@
                 </a:tc>
                 <a:tc>
                   <a:txBody>
-                    <a:bodyPr wrap="square"/>
+                    <a:bodyPr/>
                     <a:lstStyle/>
                     <a:p>
                       <a:r>
@@ -14549,7 +15012,7 @@
                       </a:r>
                     </a:p>
                   </a:txBody>
-                  <a:tcPr anchor="ctr" marL="91440" marR="91440">
+                  <a:tcPr anchor="ctr">
                     <a:solidFill>
                       <a:srgbClr val="FDF1DF"/>
                     </a:solidFill>
@@ -14557,7 +15020,7 @@
                 </a:tc>
                 <a:tc>
                   <a:txBody>
-                    <a:bodyPr wrap="square"/>
+                    <a:bodyPr/>
                     <a:lstStyle/>
                     <a:p>
                       <a:r>
@@ -14571,31 +15034,78 @@
                       </a:r>
                     </a:p>
                   </a:txBody>
-                  <a:tcPr anchor="ctr" marL="91440" marR="91440">
+                  <a:tcPr anchor="ctr">
                     <a:solidFill>
                       <a:srgbClr val="FDF1DF"/>
                     </a:solidFill>
                   </a:tcPr>
                 </a:tc>
+                <a:extLst>
+                  <a:ext uri="{0D108BD9-81ED-4DB2-BD59-A6C34878D82A}">
+                    <a16:rowId xmlns:a16="http://schemas.microsoft.com/office/drawing/2014/main" val="10003"/>
+                  </a:ext>
+                </a:extLst>
               </a:tr>
               <a:tr h="397764">
                 <a:tc>
                   <a:txBody>
-                    <a:bodyPr wrap="square"/>
+                    <a:bodyPr/>
                     <a:lstStyle/>
                     <a:p>
                       <a:r>
-                        <a:rPr sz="1150" b="0">
+                        <a:rPr sz="1150" b="0" dirty="0">
                           <a:solidFill>
                             <a:srgbClr val="0D1F2D"/>
                           </a:solidFill>
                           <a:latin typeface="Segoe UI"/>
                         </a:rPr>
-                        <a:t>Weights the attacker may touch</a:t>
+                        <a:t>Weights </a:t>
                       </a:r>
+                      <a:r>
+                        <a:rPr sz="1150" b="0" dirty="0" err="1">
+                          <a:solidFill>
+                            <a:srgbClr val="0D1F2D"/>
+                          </a:solidFill>
+                          <a:latin typeface="Segoe UI"/>
+                        </a:rPr>
+                        <a:t>th</a:t>
+                      </a:r>
+                      <a:r>
+                        <a:rPr lang="en-IN" sz="1150" b="0" dirty="0">
+                          <a:solidFill>
+                            <a:srgbClr val="0D1F2D"/>
+                          </a:solidFill>
+                          <a:latin typeface="Segoe UI"/>
+                        </a:rPr>
+                        <a:t>at</a:t>
+                      </a:r>
+                      <a:r>
+                        <a:rPr sz="1150" b="0" dirty="0">
+                          <a:solidFill>
+                            <a:srgbClr val="0D1F2D"/>
+                          </a:solidFill>
+                          <a:latin typeface="Segoe UI"/>
+                        </a:rPr>
+                        <a:t> may </a:t>
+                      </a:r>
+                      <a:r>
+                        <a:rPr lang="en-IN" sz="1150" b="0" dirty="0">
+                          <a:solidFill>
+                            <a:srgbClr val="0D1F2D"/>
+                          </a:solidFill>
+                          <a:latin typeface="Segoe UI"/>
+                        </a:rPr>
+                        <a:t>change</a:t>
+                      </a:r>
+                      <a:endParaRPr sz="1150" b="0" dirty="0">
+                        <a:solidFill>
+                          <a:srgbClr val="0D1F2D"/>
+                        </a:solidFill>
+                        <a:latin typeface="Segoe UI"/>
+                      </a:endParaRPr>
                     </a:p>
                   </a:txBody>
-                  <a:tcPr anchor="ctr" marL="91440" marR="91440">
+                  <a:tcPr anchor="ctr">
                     <a:solidFill>
                       <a:srgbClr val="E7F4EC"/>
                     </a:solidFill>
@@ -14603,7 +15113,7 @@
                 </a:tc>
                 <a:tc>
                   <a:txBody>
-                    <a:bodyPr wrap="square"/>
+                    <a:bodyPr/>
                     <a:lstStyle/>
                     <a:p>
                       <a:r>
@@ -14617,7 +15127,7 @@
                       </a:r>
                     </a:p>
                   </a:txBody>
-                  <a:tcPr anchor="ctr" marL="91440" marR="91440">
+                  <a:tcPr anchor="ctr">
                     <a:solidFill>
                       <a:srgbClr val="E7F4EC"/>
                     </a:solidFill>
@@ -14625,11 +15135,11 @@
                 </a:tc>
                 <a:tc>
                   <a:txBody>
-                    <a:bodyPr wrap="square"/>
+                    <a:bodyPr/>
                     <a:lstStyle/>
                     <a:p>
                       <a:r>
-                        <a:rPr sz="1100" b="0">
+                        <a:rPr sz="1100" b="0" dirty="0">
                           <a:solidFill>
                             <a:srgbClr val="5C6B78"/>
                           </a:solidFill>
@@ -14639,12 +15149,17 @@
                       </a:r>
                     </a:p>
                   </a:txBody>
-                  <a:tcPr anchor="ctr" marL="91440" marR="91440">
+                  <a:tcPr anchor="ctr">
                     <a:solidFill>
                       <a:srgbClr val="E7F4EC"/>
                     </a:solidFill>
                   </a:tcPr>
                 </a:tc>
+                <a:extLst>
+                  <a:ext uri="{0D108BD9-81ED-4DB2-BD59-A6C34878D82A}">
+                    <a16:rowId xmlns:a16="http://schemas.microsoft.com/office/drawing/2014/main" val="10004"/>
+                  </a:ext>
+                </a:extLst>
               </a:tr>
             </a:tbl>
           </a:graphicData>
@@ -14659,7 +15174,7 @@
 </file>
 
 <file path=ppt/slides/slide5.xml><?xml version="1.0" encoding="utf-8"?>
-<p:sld xmlns:a="http://schemas.openxmlformats.org/drawingml/2006/main" xmlns:p="http://schemas.openxmlformats.org/presentationml/2006/main" xmlns:r="http://schemas.openxmlformats.org/officeDocument/2006/relationships">
+<p:sld xmlns:a="http://schemas.openxmlformats.org/drawingml/2006/main" xmlns:r="http://schemas.openxmlformats.org/officeDocument/2006/relationships" xmlns:p="http://schemas.openxmlformats.org/presentationml/2006/main">
   <p:cSld>
     <p:spTree>
       <p:nvGrpSpPr>
@@ -14667,7 +15182,14 @@
         <p:cNvGrpSpPr/>
         <p:nvPr/>
       </p:nvGrpSpPr>
-      <p:grpSpPr/>
+      <p:grpSpPr>
+        <a:xfrm>
+          <a:off x="0" y="0"/>
+          <a:ext cx="0" cy="0"/>
+          <a:chOff x="0" y="0"/>
+          <a:chExt cx="0" cy="0"/>
+        </a:xfrm>
+      </p:grpSpPr>
       <p:sp>
         <p:nvSpPr>
           <p:cNvPr id="2" name="Rectangle 1"/>
@@ -14676,7 +15198,7 @@
         </p:nvSpPr>
         <p:spPr>
           <a:xfrm>
-            <a:off x="0" y="0"/>
+            <a:off x="-6980" y="0"/>
             <a:ext cx="12191695" cy="6858000"/>
           </a:xfrm>
           <a:prstGeom prst="rect">
@@ -14709,6 +15231,7 @@
           <a:lstStyle/>
           <a:p>
             <a:pPr algn="ctr"/>
+            <a:endParaRPr/>
           </a:p>
         </p:txBody>
       </p:sp>
@@ -14753,6 +15276,7 @@
           <a:lstStyle/>
           <a:p>
             <a:pPr algn="ctr"/>
+            <a:endParaRPr/>
           </a:p>
         </p:txBody>
       </p:sp>
@@ -14773,7 +15297,7 @@
           <a:noFill/>
         </p:spPr>
         <p:txBody>
-          <a:bodyPr wrap="square" anchor="t" lIns="0" rIns="0" tIns="0" bIns="0">
+          <a:bodyPr wrap="square" lIns="0" tIns="0" rIns="0" bIns="0" anchor="t">
             <a:spAutoFit/>
           </a:bodyPr>
           <a:lstStyle/>
@@ -14784,52 +15308,13 @@
               </a:spcAft>
             </a:pPr>
             <a:r>
-              <a:rPr sz="2700" b="1">
+              <a:rPr sz="2700" b="1" dirty="0">
                 <a:solidFill>
                   <a:srgbClr val="123045"/>
                 </a:solidFill>
                 <a:latin typeface="Segoe UI"/>
               </a:rPr>
               <a:t>Why this problem, and not another</a:t>
-            </a:r>
-          </a:p>
-        </p:txBody>
-      </p:sp>
-      <p:sp>
-        <p:nvSpPr>
-          <p:cNvPr id="5" name="TextBox 4"/>
-          <p:cNvSpPr txBox="1"/>
-          <p:nvPr/>
-        </p:nvSpPr>
-        <p:spPr>
-          <a:xfrm>
-            <a:off x="859536" y="969264"/>
-            <a:ext cx="10600639" cy="365760"/>
-          </a:xfrm>
-          <a:prstGeom prst="rect">
-            <a:avLst/>
-          </a:prstGeom>
-          <a:noFill/>
-        </p:spPr>
-        <p:txBody>
-          <a:bodyPr wrap="square" anchor="t" lIns="0" rIns="0" tIns="0" bIns="0">
-            <a:spAutoFit/>
-          </a:bodyPr>
-          <a:lstStyle/>
-          <a:p>
-            <a:pPr>
-              <a:spcAft>
-                <a:spcPts val="0"/>
-              </a:spcAft>
-            </a:pPr>
-            <a:r>
-              <a:rPr sz="1350" b="0">
-                <a:solidFill>
-                  <a:srgbClr val="5C6B78"/>
-                </a:solidFill>
-                <a:latin typeface="Segoe UI"/>
-              </a:rPr>
-              <a:t>The gap our literature survey actually found</a:t>
             </a:r>
           </a:p>
         </p:txBody>
@@ -14875,6 +15360,7 @@
           <a:lstStyle/>
           <a:p>
             <a:pPr algn="ctr"/>
+            <a:endParaRPr/>
           </a:p>
         </p:txBody>
       </p:sp>
@@ -14895,7 +15381,7 @@
           <a:noFill/>
         </p:spPr>
         <p:txBody>
-          <a:bodyPr wrap="square" anchor="t" lIns="0" rIns="0" tIns="0" bIns="0">
+          <a:bodyPr wrap="square" lIns="0" tIns="0" rIns="0" bIns="0" anchor="t">
             <a:spAutoFit/>
           </a:bodyPr>
           <a:lstStyle/>
@@ -14934,7 +15420,7 @@
           <a:noFill/>
         </p:spPr>
         <p:txBody>
-          <a:bodyPr wrap="square" anchor="t" lIns="0" rIns="0" tIns="0" bIns="0">
+          <a:bodyPr wrap="square" lIns="0" tIns="0" rIns="0" bIns="0" anchor="t">
             <a:spAutoFit/>
           </a:bodyPr>
           <a:lstStyle/>
@@ -14962,7 +15448,13 @@
           <p:cNvGraphicFramePr>
             <a:graphicFrameLocks noGrp="1"/>
           </p:cNvGraphicFramePr>
-          <p:nvPr/>
+          <p:nvPr>
+            <p:extLst>
+              <p:ext uri="{D42A27DB-BD31-4B8C-83A1-F6EECF244321}">
+                <p14:modId xmlns:p14="http://schemas.microsoft.com/office/powerpoint/2010/main" val="2677442054"/>
+              </p:ext>
+            </p:extLst>
+          </p:nvPr>
         </p:nvGraphicFramePr>
         <p:xfrm>
           <a:off x="658368" y="1700784"/>
@@ -14975,14 +15467,32 @@
                 <a:tableStyleId>{5C22544A-7EE6-4342-B048-85BDC9FD1C3A}</a:tableStyleId>
               </a:tblPr>
               <a:tblGrid>
-                <a:gridCol w="3657600"/>
-                <a:gridCol w="2834640"/>
-                <a:gridCol w="4382719"/>
+                <a:gridCol w="3657600">
+                  <a:extLst>
+                    <a:ext uri="{9D8B030D-6E8A-4147-A177-3AD203B41FA5}">
+                      <a16:colId xmlns:a16="http://schemas.microsoft.com/office/drawing/2014/main" val="20000"/>
+                    </a:ext>
+                  </a:extLst>
+                </a:gridCol>
+                <a:gridCol w="2834640">
+                  <a:extLst>
+                    <a:ext uri="{9D8B030D-6E8A-4147-A177-3AD203B41FA5}">
+                      <a16:colId xmlns:a16="http://schemas.microsoft.com/office/drawing/2014/main" val="20001"/>
+                    </a:ext>
+                  </a:extLst>
+                </a:gridCol>
+                <a:gridCol w="4382719">
+                  <a:extLst>
+                    <a:ext uri="{9D8B030D-6E8A-4147-A177-3AD203B41FA5}">
+                      <a16:colId xmlns:a16="http://schemas.microsoft.com/office/drawing/2014/main" val="20002"/>
+                    </a:ext>
+                  </a:extLst>
+                </a:gridCol>
               </a:tblGrid>
               <a:tr h="365760">
                 <a:tc>
                   <a:txBody>
-                    <a:bodyPr wrap="square"/>
+                    <a:bodyPr/>
                     <a:lstStyle/>
                     <a:p>
                       <a:r>
@@ -14996,7 +15506,7 @@
                       </a:r>
                     </a:p>
                   </a:txBody>
-                  <a:tcPr anchor="ctr" marL="91440" marR="91440">
+                  <a:tcPr anchor="ctr">
                     <a:solidFill>
                       <a:srgbClr val="123045"/>
                     </a:solidFill>
@@ -15004,7 +15514,7 @@
                 </a:tc>
                 <a:tc>
                   <a:txBody>
-                    <a:bodyPr wrap="square"/>
+                    <a:bodyPr/>
                     <a:lstStyle/>
                     <a:p>
                       <a:r>
@@ -15018,7 +15528,7 @@
                       </a:r>
                     </a:p>
                   </a:txBody>
-                  <a:tcPr anchor="ctr" marL="91440" marR="91440">
+                  <a:tcPr anchor="ctr">
                     <a:solidFill>
                       <a:srgbClr val="123045"/>
                     </a:solidFill>
@@ -15026,7 +15536,7 @@
                 </a:tc>
                 <a:tc>
                   <a:txBody>
-                    <a:bodyPr wrap="square"/>
+                    <a:bodyPr/>
                     <a:lstStyle/>
                     <a:p>
                       <a:r>
@@ -15040,17 +15550,22 @@
                       </a:r>
                     </a:p>
                   </a:txBody>
-                  <a:tcPr anchor="ctr" marL="91440" marR="91440">
+                  <a:tcPr anchor="ctr">
                     <a:solidFill>
                       <a:srgbClr val="123045"/>
                     </a:solidFill>
                   </a:tcPr>
                 </a:tc>
+                <a:extLst>
+                  <a:ext uri="{0D108BD9-81ED-4DB2-BD59-A6C34878D82A}">
+                    <a16:rowId xmlns:a16="http://schemas.microsoft.com/office/drawing/2014/main" val="10000"/>
+                  </a:ext>
+                </a:extLst>
               </a:tr>
               <a:tr h="397764">
                 <a:tc>
                   <a:txBody>
-                    <a:bodyPr wrap="square"/>
+                    <a:bodyPr/>
                     <a:lstStyle/>
                     <a:p>
                       <a:r>
@@ -15064,7 +15579,7 @@
                       </a:r>
                     </a:p>
                   </a:txBody>
-                  <a:tcPr anchor="ctr" marL="91440" marR="91440">
+                  <a:tcPr anchor="ctr">
                     <a:solidFill>
                       <a:srgbClr val="FDF1DF"/>
                     </a:solidFill>
@@ -15072,21 +15587,21 @@
                 </a:tc>
                 <a:tc>
                   <a:txBody>
-                    <a:bodyPr wrap="square"/>
+                    <a:bodyPr/>
                     <a:lstStyle/>
                     <a:p>
                       <a:r>
                         <a:rPr sz="1100" b="0">
                           <a:solidFill>
-                            <a:srgbClr val="5C6B78"/>
+                            <a:schemeClr val="tx1"/>
                           </a:solidFill>
-                          <a:latin typeface="Segoe UI"/>
+                          <a:latin typeface="+mj-lt"/>
                         </a:rPr>
                         <a:t>BatchNorm statistics, vision models</a:t>
                       </a:r>
                     </a:p>
                   </a:txBody>
-                  <a:tcPr anchor="ctr" marL="91440" marR="91440">
+                  <a:tcPr anchor="ctr">
                     <a:solidFill>
                       <a:srgbClr val="FDF1DF"/>
                     </a:solidFill>
@@ -15094,31 +15609,36 @@
                 </a:tc>
                 <a:tc>
                   <a:txBody>
-                    <a:bodyPr wrap="square"/>
+                    <a:bodyPr/>
                     <a:lstStyle/>
                     <a:p>
                       <a:r>
                         <a:rPr sz="1100" b="0">
                           <a:solidFill>
-                            <a:srgbClr val="5C6B78"/>
+                            <a:schemeClr val="tx1"/>
                           </a:solidFill>
-                          <a:latin typeface="Segoe UI"/>
+                          <a:latin typeface="+mj-lt"/>
                         </a:rPr>
                         <a:t>Not a fast-weight method; the principle must be ported, not reused</a:t>
                       </a:r>
                     </a:p>
                   </a:txBody>
-                  <a:tcPr anchor="ctr" marL="91440" marR="91440">
+                  <a:tcPr anchor="ctr">
                     <a:solidFill>
                       <a:srgbClr val="FDF1DF"/>
                     </a:solidFill>
                   </a:tcPr>
                 </a:tc>
+                <a:extLst>
+                  <a:ext uri="{0D108BD9-81ED-4DB2-BD59-A6C34878D82A}">
+                    <a16:rowId xmlns:a16="http://schemas.microsoft.com/office/drawing/2014/main" val="10001"/>
+                  </a:ext>
+                </a:extLst>
               </a:tr>
               <a:tr h="397764">
                 <a:tc>
                   <a:txBody>
-                    <a:bodyPr wrap="square"/>
+                    <a:bodyPr/>
                     <a:lstStyle/>
                     <a:p>
                       <a:r>
@@ -15132,7 +15652,7 @@
                       </a:r>
                     </a:p>
                   </a:txBody>
-                  <a:tcPr anchor="ctr" marL="91440" marR="91440">
+                  <a:tcPr anchor="ctr">
                     <a:solidFill>
                       <a:srgbClr val="FDF1DF"/>
                     </a:solidFill>
@@ -15140,21 +15660,21 @@
                 </a:tc>
                 <a:tc>
                   <a:txBody>
-                    <a:bodyPr wrap="square"/>
+                    <a:bodyPr/>
                     <a:lstStyle/>
                     <a:p>
                       <a:r>
                         <a:rPr sz="1100" b="0">
                           <a:solidFill>
-                            <a:srgbClr val="5C6B78"/>
+                            <a:schemeClr val="tx1"/>
                           </a:solidFill>
-                          <a:latin typeface="Segoe UI"/>
+                          <a:latin typeface="+mj-lt"/>
                         </a:rPr>
                         <a:t>The training set and its provenance</a:t>
                       </a:r>
                     </a:p>
                   </a:txBody>
-                  <a:tcPr anchor="ctr" marL="91440" marR="91440">
+                  <a:tcPr anchor="ctr">
                     <a:solidFill>
                       <a:srgbClr val="FDF1DF"/>
                     </a:solidFill>
@@ -15162,31 +15682,36 @@
                 </a:tc>
                 <a:tc>
                   <a:txBody>
-                    <a:bodyPr wrap="square"/>
+                    <a:bodyPr/>
                     <a:lstStyle/>
                     <a:p>
                       <a:r>
                         <a:rPr sz="1100" b="0">
                           <a:solidFill>
-                            <a:srgbClr val="5C6B78"/>
+                            <a:schemeClr val="tx1"/>
                           </a:solidFill>
-                          <a:latin typeface="Segoe UI"/>
+                          <a:latin typeface="+mj-lt"/>
                         </a:rPr>
                         <a:t>The attack never touches training data</a:t>
                       </a:r>
                     </a:p>
                   </a:txBody>
-                  <a:tcPr anchor="ctr" marL="91440" marR="91440">
+                  <a:tcPr anchor="ctr">
                     <a:solidFill>
                       <a:srgbClr val="FDF1DF"/>
                     </a:solidFill>
                   </a:tcPr>
                 </a:tc>
+                <a:extLst>
+                  <a:ext uri="{0D108BD9-81ED-4DB2-BD59-A6C34878D82A}">
+                    <a16:rowId xmlns:a16="http://schemas.microsoft.com/office/drawing/2014/main" val="10002"/>
+                  </a:ext>
+                </a:extLst>
               </a:tr>
               <a:tr h="397764">
                 <a:tc>
                   <a:txBody>
-                    <a:bodyPr wrap="square"/>
+                    <a:bodyPr/>
                     <a:lstStyle/>
                     <a:p>
                       <a:r>
@@ -15200,7 +15725,7 @@
                       </a:r>
                     </a:p>
                   </a:txBody>
-                  <a:tcPr anchor="ctr" marL="91440" marR="91440">
+                  <a:tcPr anchor="ctr">
                     <a:solidFill>
                       <a:srgbClr val="FDF1DF"/>
                     </a:solidFill>
@@ -15208,21 +15733,21 @@
                 </a:tc>
                 <a:tc>
                   <a:txBody>
-                    <a:bodyPr wrap="square"/>
+                    <a:bodyPr/>
                     <a:lstStyle/>
                     <a:p>
                       <a:r>
                         <a:rPr sz="1100" b="0">
                           <a:solidFill>
-                            <a:srgbClr val="5C6B78"/>
+                            <a:schemeClr val="tx1"/>
                           </a:solidFill>
-                          <a:latin typeface="Segoe UI"/>
+                          <a:latin typeface="+mj-lt"/>
                         </a:rPr>
                         <a:t>A single malicious request</a:t>
                       </a:r>
                     </a:p>
                   </a:txBody>
-                  <a:tcPr anchor="ctr" marL="91440" marR="91440">
+                  <a:tcPr anchor="ctr">
                     <a:solidFill>
                       <a:srgbClr val="FDF1DF"/>
                     </a:solidFill>
@@ -15230,31 +15755,36 @@
                 </a:tc>
                 <a:tc>
                   <a:txBody>
-                    <a:bodyPr wrap="square"/>
+                    <a:bodyPr/>
                     <a:lstStyle/>
                     <a:p>
                       <a:r>
                         <a:rPr sz="1100" b="0">
                           <a:solidFill>
-                            <a:srgbClr val="5C6B78"/>
+                            <a:schemeClr val="tx1"/>
                           </a:solidFill>
-                          <a:latin typeface="Segoe UI"/>
+                          <a:latin typeface="+mj-lt"/>
                         </a:rPr>
                         <a:t>The stream is benign-looking by construction; no request is malformed</a:t>
                       </a:r>
                     </a:p>
                   </a:txBody>
-                  <a:tcPr anchor="ctr" marL="91440" marR="91440">
+                  <a:tcPr anchor="ctr">
                     <a:solidFill>
                       <a:srgbClr val="FDF1DF"/>
                     </a:solidFill>
                   </a:tcPr>
                 </a:tc>
+                <a:extLst>
+                  <a:ext uri="{0D108BD9-81ED-4DB2-BD59-A6C34878D82A}">
+                    <a16:rowId xmlns:a16="http://schemas.microsoft.com/office/drawing/2014/main" val="10003"/>
+                  </a:ext>
+                </a:extLst>
               </a:tr>
               <a:tr h="397764">
                 <a:tc>
                   <a:txBody>
-                    <a:bodyPr wrap="square"/>
+                    <a:bodyPr/>
                     <a:lstStyle/>
                     <a:p>
                       <a:r>
@@ -15268,7 +15798,7 @@
                       </a:r>
                     </a:p>
                   </a:txBody>
-                  <a:tcPr anchor="ctr" marL="91440" marR="91440">
+                  <a:tcPr anchor="ctr">
                     <a:solidFill>
                       <a:srgbClr val="FDF1DF"/>
                     </a:solidFill>
@@ -15276,21 +15806,21 @@
                 </a:tc>
                 <a:tc>
                   <a:txBody>
-                    <a:bodyPr wrap="square"/>
+                    <a:bodyPr/>
                     <a:lstStyle/>
                     <a:p>
                       <a:r>
                         <a:rPr sz="1100" b="0">
                           <a:solidFill>
-                            <a:srgbClr val="5C6B78"/>
+                            <a:schemeClr val="tx1"/>
                           </a:solidFill>
-                          <a:latin typeface="Segoe UI"/>
+                          <a:latin typeface="+mj-lt"/>
                         </a:rPr>
                         <a:t>Weights at rest</a:t>
                       </a:r>
                     </a:p>
                   </a:txBody>
-                  <a:tcPr anchor="ctr" marL="91440" marR="91440">
+                  <a:tcPr anchor="ctr">
                     <a:solidFill>
                       <a:srgbClr val="FDF1DF"/>
                     </a:solidFill>
@@ -15298,26 +15828,31 @@
                 </a:tc>
                 <a:tc>
                   <a:txBody>
-                    <a:bodyPr wrap="square"/>
+                    <a:bodyPr/>
                     <a:lstStyle/>
                     <a:p>
                       <a:r>
-                        <a:rPr sz="1100" b="0">
+                        <a:rPr sz="1100" b="0" dirty="0">
                           <a:solidFill>
-                            <a:srgbClr val="5C6B78"/>
+                            <a:schemeClr val="tx1"/>
                           </a:solidFill>
-                          <a:latin typeface="Segoe UI"/>
+                          <a:latin typeface="+mj-lt"/>
                         </a:rPr>
                         <a:t>Base weights are never modified</a:t>
                       </a:r>
                     </a:p>
                   </a:txBody>
-                  <a:tcPr anchor="ctr" marL="91440" marR="91440">
+                  <a:tcPr anchor="ctr">
                     <a:solidFill>
                       <a:srgbClr val="FDF1DF"/>
                     </a:solidFill>
                   </a:tcPr>
                 </a:tc>
+                <a:extLst>
+                  <a:ext uri="{0D108BD9-81ED-4DB2-BD59-A6C34878D82A}">
+                    <a16:rowId xmlns:a16="http://schemas.microsoft.com/office/drawing/2014/main" val="10004"/>
+                  </a:ext>
+                </a:extLst>
               </a:tr>
             </a:tbl>
           </a:graphicData>
@@ -15325,94 +15860,6 @@
       </p:graphicFrame>
       <p:sp>
         <p:nvSpPr>
-          <p:cNvPr id="10" name="Rectangle 9"/>
-          <p:cNvSpPr/>
-          <p:nvPr/>
-        </p:nvSpPr>
-        <p:spPr>
-          <a:xfrm>
-            <a:off x="658368" y="4114800"/>
-            <a:ext cx="10874959" cy="914400"/>
-          </a:xfrm>
-          <a:prstGeom prst="rect">
-            <a:avLst/>
-          </a:prstGeom>
-          <a:solidFill>
-            <a:srgbClr val="E7F4EC"/>
-          </a:solidFill>
-          <a:ln>
-            <a:noFill/>
-          </a:ln>
-          <a:effectLst/>
-        </p:spPr>
-        <p:style>
-          <a:lnRef idx="1">
-            <a:schemeClr val="accent1"/>
-          </a:lnRef>
-          <a:fillRef idx="3">
-            <a:schemeClr val="accent1"/>
-          </a:fillRef>
-          <a:effectRef idx="2">
-            <a:schemeClr val="accent1"/>
-          </a:effectRef>
-          <a:fontRef idx="minor">
-            <a:schemeClr val="lt1"/>
-          </a:fontRef>
-        </p:style>
-        <p:txBody>
-          <a:bodyPr rtlCol="0" anchor="ctr"/>
-          <a:lstStyle/>
-          <a:p>
-            <a:pPr algn="ctr"/>
-          </a:p>
-        </p:txBody>
-      </p:sp>
-      <p:sp>
-        <p:nvSpPr>
-          <p:cNvPr id="11" name="Rectangle 10"/>
-          <p:cNvSpPr/>
-          <p:nvPr/>
-        </p:nvSpPr>
-        <p:spPr>
-          <a:xfrm>
-            <a:off x="658368" y="4114800"/>
-            <a:ext cx="45720" cy="914400"/>
-          </a:xfrm>
-          <a:prstGeom prst="rect">
-            <a:avLst/>
-          </a:prstGeom>
-          <a:solidFill>
-            <a:srgbClr val="0E9F94"/>
-          </a:solidFill>
-          <a:ln>
-            <a:noFill/>
-          </a:ln>
-          <a:effectLst/>
-        </p:spPr>
-        <p:style>
-          <a:lnRef idx="1">
-            <a:schemeClr val="accent1"/>
-          </a:lnRef>
-          <a:fillRef idx="3">
-            <a:schemeClr val="accent1"/>
-          </a:fillRef>
-          <a:effectRef idx="2">
-            <a:schemeClr val="accent1"/>
-          </a:effectRef>
-          <a:fontRef idx="minor">
-            <a:schemeClr val="lt1"/>
-          </a:fontRef>
-        </p:style>
-        <p:txBody>
-          <a:bodyPr rtlCol="0" anchor="ctr"/>
-          <a:lstStyle/>
-          <a:p>
-            <a:pPr algn="ctr"/>
-          </a:p>
-        </p:txBody>
-      </p:sp>
-      <p:sp>
-        <p:nvSpPr>
           <p:cNvPr id="12" name="TextBox 11"/>
           <p:cNvSpPr txBox="1"/>
           <p:nvPr/>
@@ -15420,7 +15867,7 @@
         <p:spPr>
           <a:xfrm>
             <a:off x="932688" y="4242816"/>
-            <a:ext cx="10372039" cy="676656"/>
+            <a:ext cx="10372039" cy="353943"/>
           </a:xfrm>
           <a:prstGeom prst="rect">
             <a:avLst/>
@@ -15428,26 +15875,10 @@
           <a:noFill/>
         </p:spPr>
         <p:txBody>
-          <a:bodyPr wrap="square" anchor="t" lIns="0" rIns="0" tIns="0" bIns="0">
+          <a:bodyPr wrap="square" lIns="0" tIns="0" rIns="0" bIns="0" anchor="t">
             <a:spAutoFit/>
           </a:bodyPr>
           <a:lstStyle/>
-          <a:p>
-            <a:pPr>
-              <a:spcAft>
-                <a:spcPts val="400"/>
-              </a:spcAft>
-            </a:pPr>
-            <a:r>
-              <a:rPr sz="1150" b="1">
-                <a:solidFill>
-                  <a:srgbClr val="0E9F94"/>
-                </a:solidFill>
-                <a:latin typeface="Segoe UI"/>
-              </a:rPr>
-              <a:t>The gap, stated plainly</a:t>
-            </a:r>
-          </a:p>
           <a:p>
             <a:pPr>
               <a:spcAft>
@@ -15455,7 +15886,7 @@
               </a:spcAft>
             </a:pPr>
             <a:r>
-              <a:rPr sz="1150" b="0">
+              <a:rPr sz="1150" b="0" dirty="0">
                 <a:solidFill>
                   <a:srgbClr val="0D1F2D"/>
                 </a:solidFill>
@@ -15475,7 +15906,7 @@
         <p:spPr>
           <a:xfrm>
             <a:off x="658368" y="5257800"/>
-            <a:ext cx="10874959" cy="822960"/>
+            <a:ext cx="10874959" cy="230832"/>
           </a:xfrm>
           <a:prstGeom prst="rect">
             <a:avLst/>
@@ -15483,28 +15914,46 @@
           <a:noFill/>
         </p:spPr>
         <p:txBody>
-          <a:bodyPr wrap="square" anchor="t" lIns="0" rIns="0" tIns="0" bIns="0">
+          <a:bodyPr wrap="square" lIns="0" tIns="0" rIns="0" bIns="0" anchor="t">
             <a:spAutoFit/>
           </a:bodyPr>
           <a:lstStyle/>
           <a:p>
             <a:r>
-              <a:rPr sz="1500" b="1">
+              <a:rPr sz="1500" b="1" dirty="0">
                 <a:solidFill>
                   <a:srgbClr val="123045"/>
                 </a:solidFill>
                 <a:latin typeface="Segoe UI"/>
               </a:rPr>
-              <a:t>Our position.  </a:t>
-            </a:r>
-            <a:r>
-              <a:rPr sz="1500" b="0">
+              <a:t>Our position. </a:t>
+            </a:r>
+            <a:r>
+              <a:rPr sz="1500" b="0" dirty="0">
                 <a:solidFill>
                   <a:srgbClr val="0D1F2D"/>
                 </a:solidFill>
                 <a:latin typeface="Segoe UI"/>
               </a:rPr>
-              <a:t>The novelty we can defend is the system — interceptor, drift budget, rollback — not a detector.</a:t>
+              <a:t>interceptor, drift budget, rollback </a:t>
+            </a:r>
+            <a:r>
+              <a:rPr lang="en-IN" sz="1500" dirty="0">
+                <a:solidFill>
+                  <a:srgbClr val="0D1F2D"/>
+                </a:solidFill>
+                <a:latin typeface="Segoe UI"/>
+              </a:rPr>
+              <a:t>we do detect and leave it at that like </a:t>
+            </a:r>
+            <a:r>
+              <a:rPr sz="1500" b="0" dirty="0">
+                <a:solidFill>
+                  <a:srgbClr val="0D1F2D"/>
+                </a:solidFill>
+                <a:latin typeface="Segoe UI"/>
+              </a:rPr>
+              <a:t> a detector.</a:t>
             </a:r>
           </a:p>
         </p:txBody>
@@ -15518,7 +15967,7 @@
 </file>
 
 <file path=ppt/slides/slide6.xml><?xml version="1.0" encoding="utf-8"?>
-<p:sld xmlns:a="http://schemas.openxmlformats.org/drawingml/2006/main" xmlns:p="http://schemas.openxmlformats.org/presentationml/2006/main" xmlns:r="http://schemas.openxmlformats.org/officeDocument/2006/relationships">
+<p:sld xmlns:a="http://schemas.openxmlformats.org/drawingml/2006/main" xmlns:r="http://schemas.openxmlformats.org/officeDocument/2006/relationships" xmlns:p="http://schemas.openxmlformats.org/presentationml/2006/main">
   <p:cSld>
     <p:spTree>
       <p:nvGrpSpPr>
@@ -15526,7 +15975,14 @@
         <p:cNvGrpSpPr/>
         <p:nvPr/>
       </p:nvGrpSpPr>
-      <p:grpSpPr/>
+      <p:grpSpPr>
+        <a:xfrm>
+          <a:off x="0" y="0"/>
+          <a:ext cx="0" cy="0"/>
+          <a:chOff x="0" y="0"/>
+          <a:chExt cx="0" cy="0"/>
+        </a:xfrm>
+      </p:grpSpPr>
       <p:sp>
         <p:nvSpPr>
           <p:cNvPr id="2" name="Rectangle 1"/>
@@ -15568,6 +16024,7 @@
           <a:lstStyle/>
           <a:p>
             <a:pPr algn="ctr"/>
+            <a:endParaRPr/>
           </a:p>
         </p:txBody>
       </p:sp>
@@ -15612,6 +16069,7 @@
           <a:lstStyle/>
           <a:p>
             <a:pPr algn="ctr"/>
+            <a:endParaRPr/>
           </a:p>
         </p:txBody>
       </p:sp>
@@ -15632,7 +16090,7 @@
           <a:noFill/>
         </p:spPr>
         <p:txBody>
-          <a:bodyPr wrap="square" anchor="t" lIns="0" rIns="0" tIns="0" bIns="0">
+          <a:bodyPr wrap="square" lIns="0" tIns="0" rIns="0" bIns="0" anchor="t">
             <a:spAutoFit/>
           </a:bodyPr>
           <a:lstStyle/>
@@ -15671,7 +16129,7 @@
           <a:noFill/>
         </p:spPr>
         <p:txBody>
-          <a:bodyPr wrap="square" anchor="t" lIns="0" rIns="0" tIns="0" bIns="0">
+          <a:bodyPr wrap="square" lIns="0" tIns="0" rIns="0" bIns="0" anchor="t">
             <a:spAutoFit/>
           </a:bodyPr>
           <a:lstStyle/>
@@ -15734,6 +16192,7 @@
           <a:lstStyle/>
           <a:p>
             <a:pPr algn="ctr"/>
+            <a:endParaRPr/>
           </a:p>
         </p:txBody>
       </p:sp>
@@ -15754,7 +16213,7 @@
           <a:noFill/>
         </p:spPr>
         <p:txBody>
-          <a:bodyPr wrap="square" anchor="t" lIns="0" rIns="0" tIns="0" bIns="0">
+          <a:bodyPr wrap="square" lIns="0" tIns="0" rIns="0" bIns="0" anchor="t">
             <a:spAutoFit/>
           </a:bodyPr>
           <a:lstStyle/>
@@ -15793,7 +16252,7 @@
           <a:noFill/>
         </p:spPr>
         <p:txBody>
-          <a:bodyPr wrap="square" anchor="t" lIns="0" rIns="0" tIns="0" bIns="0">
+          <a:bodyPr wrap="square" lIns="0" tIns="0" rIns="0" bIns="0" anchor="t">
             <a:spAutoFit/>
           </a:bodyPr>
           <a:lstStyle/>
@@ -15856,6 +16315,7 @@
           <a:lstStyle/>
           <a:p>
             <a:pPr algn="ctr"/>
+            <a:endParaRPr/>
           </a:p>
         </p:txBody>
       </p:sp>
@@ -15900,6 +16360,7 @@
           <a:lstStyle/>
           <a:p>
             <a:pPr algn="ctr"/>
+            <a:endParaRPr/>
           </a:p>
         </p:txBody>
       </p:sp>
@@ -15920,7 +16381,7 @@
           <a:noFill/>
         </p:spPr>
         <p:txBody>
-          <a:bodyPr wrap="square" anchor="t" lIns="0" rIns="0" tIns="0" bIns="0">
+          <a:bodyPr wrap="square" lIns="0" tIns="0" rIns="0" bIns="0" anchor="t">
             <a:spAutoFit/>
           </a:bodyPr>
           <a:lstStyle/>
@@ -15999,6 +16460,7 @@
           <a:lstStyle/>
           <a:p>
             <a:pPr algn="ctr"/>
+            <a:endParaRPr/>
           </a:p>
         </p:txBody>
       </p:sp>
@@ -16043,6 +16505,7 @@
           <a:lstStyle/>
           <a:p>
             <a:pPr algn="ctr"/>
+            <a:endParaRPr/>
           </a:p>
         </p:txBody>
       </p:sp>
@@ -16063,7 +16526,7 @@
           <a:noFill/>
         </p:spPr>
         <p:txBody>
-          <a:bodyPr wrap="square" anchor="t" lIns="0" rIns="0" tIns="0" bIns="0">
+          <a:bodyPr wrap="square" lIns="0" tIns="0" rIns="0" bIns="0" anchor="t">
             <a:spAutoFit/>
           </a:bodyPr>
           <a:lstStyle/>
@@ -16142,6 +16605,7 @@
           <a:lstStyle/>
           <a:p>
             <a:pPr algn="ctr"/>
+            <a:endParaRPr/>
           </a:p>
         </p:txBody>
       </p:sp>
@@ -16186,6 +16650,7 @@
           <a:lstStyle/>
           <a:p>
             <a:pPr algn="ctr"/>
+            <a:endParaRPr/>
           </a:p>
         </p:txBody>
       </p:sp>
@@ -16206,7 +16671,7 @@
           <a:noFill/>
         </p:spPr>
         <p:txBody>
-          <a:bodyPr wrap="square" anchor="t" lIns="0" rIns="0" tIns="0" bIns="0">
+          <a:bodyPr wrap="square" lIns="0" tIns="0" rIns="0" bIns="0" anchor="t">
             <a:spAutoFit/>
           </a:bodyPr>
           <a:lstStyle/>
@@ -16285,6 +16750,7 @@
           <a:lstStyle/>
           <a:p>
             <a:pPr algn="ctr"/>
+            <a:endParaRPr/>
           </a:p>
         </p:txBody>
       </p:sp>
@@ -16329,6 +16795,7 @@
           <a:lstStyle/>
           <a:p>
             <a:pPr algn="ctr"/>
+            <a:endParaRPr/>
           </a:p>
         </p:txBody>
       </p:sp>
@@ -16349,7 +16816,7 @@
           <a:noFill/>
         </p:spPr>
         <p:txBody>
-          <a:bodyPr wrap="square" anchor="t" lIns="0" rIns="0" tIns="0" bIns="0">
+          <a:bodyPr wrap="square" lIns="0" tIns="0" rIns="0" bIns="0" anchor="t">
             <a:spAutoFit/>
           </a:bodyPr>
           <a:lstStyle/>
@@ -16404,7 +16871,7 @@
           <a:noFill/>
         </p:spPr>
         <p:txBody>
-          <a:bodyPr wrap="square" anchor="t" lIns="0" rIns="0" tIns="0" bIns="0">
+          <a:bodyPr wrap="square" lIns="0" tIns="0" rIns="0" bIns="0" anchor="t">
             <a:spAutoFit/>
           </a:bodyPr>
           <a:lstStyle/>
@@ -16439,7 +16906,7 @@
 </file>
 
 <file path=ppt/slides/slide7.xml><?xml version="1.0" encoding="utf-8"?>
-<p:sld xmlns:a="http://schemas.openxmlformats.org/drawingml/2006/main" xmlns:p="http://schemas.openxmlformats.org/presentationml/2006/main" xmlns:r="http://schemas.openxmlformats.org/officeDocument/2006/relationships">
+<p:sld xmlns:a="http://schemas.openxmlformats.org/drawingml/2006/main" xmlns:r="http://schemas.openxmlformats.org/officeDocument/2006/relationships" xmlns:p="http://schemas.openxmlformats.org/presentationml/2006/main">
   <p:cSld>
     <p:spTree>
       <p:nvGrpSpPr>
@@ -16447,7 +16914,14 @@
         <p:cNvGrpSpPr/>
         <p:nvPr/>
       </p:nvGrpSpPr>
-      <p:grpSpPr/>
+      <p:grpSpPr>
+        <a:xfrm>
+          <a:off x="0" y="0"/>
+          <a:ext cx="0" cy="0"/>
+          <a:chOff x="0" y="0"/>
+          <a:chExt cx="0" cy="0"/>
+        </a:xfrm>
+      </p:grpSpPr>
       <p:sp>
         <p:nvSpPr>
           <p:cNvPr id="2" name="Rectangle 1"/>
@@ -16489,6 +16963,7 @@
           <a:lstStyle/>
           <a:p>
             <a:pPr algn="ctr"/>
+            <a:endParaRPr/>
           </a:p>
         </p:txBody>
       </p:sp>
@@ -16533,6 +17008,7 @@
           <a:lstStyle/>
           <a:p>
             <a:pPr algn="ctr"/>
+            <a:endParaRPr/>
           </a:p>
         </p:txBody>
       </p:sp>
@@ -16553,7 +17029,7 @@
           <a:noFill/>
         </p:spPr>
         <p:txBody>
-          <a:bodyPr wrap="square" anchor="t" lIns="0" rIns="0" tIns="0" bIns="0">
+          <a:bodyPr wrap="square" lIns="0" tIns="0" rIns="0" bIns="0" anchor="t">
             <a:spAutoFit/>
           </a:bodyPr>
           <a:lstStyle/>
@@ -16584,7 +17060,7 @@
         <p:spPr>
           <a:xfrm>
             <a:off x="859536" y="969264"/>
-            <a:ext cx="10600639" cy="365760"/>
+            <a:ext cx="10600639" cy="207749"/>
           </a:xfrm>
           <a:prstGeom prst="rect">
             <a:avLst/>
@@ -16592,7 +17068,7 @@
           <a:noFill/>
         </p:spPr>
         <p:txBody>
-          <a:bodyPr wrap="square" anchor="t" lIns="0" rIns="0" tIns="0" bIns="0">
+          <a:bodyPr wrap="square" lIns="0" tIns="0" rIns="0" bIns="0" anchor="t">
             <a:spAutoFit/>
           </a:bodyPr>
           <a:lstStyle/>
@@ -16603,13 +17079,31 @@
               </a:spcAft>
             </a:pPr>
             <a:r>
-              <a:rPr sz="1350" b="0">
+              <a:rPr sz="1350" b="0" dirty="0">
                 <a:solidFill>
                   <a:srgbClr val="5C6B78"/>
                 </a:solidFill>
                 <a:latin typeface="Segoe UI"/>
               </a:rPr>
-              <a:t>Section 2 of 3  ·  Building the experiment</a:t>
+              <a:t>Building </a:t>
+            </a:r>
+            <a:r>
+              <a:rPr lang="en-IN" sz="1350" b="0" dirty="0">
+                <a:solidFill>
+                  <a:srgbClr val="5C6B78"/>
+                </a:solidFill>
+                <a:latin typeface="Segoe UI"/>
+              </a:rPr>
+              <a:t>an</a:t>
+            </a:r>
+            <a:r>
+              <a:rPr sz="1350" b="0" dirty="0">
+                <a:solidFill>
+                  <a:srgbClr val="5C6B78"/>
+                </a:solidFill>
+                <a:latin typeface="Segoe UI"/>
+              </a:rPr>
+              <a:t> experiment</a:t>
             </a:r>
           </a:p>
         </p:txBody>
@@ -16655,6 +17149,7 @@
           <a:lstStyle/>
           <a:p>
             <a:pPr algn="ctr"/>
+            <a:endParaRPr/>
           </a:p>
         </p:txBody>
       </p:sp>
@@ -16675,7 +17170,7 @@
           <a:noFill/>
         </p:spPr>
         <p:txBody>
-          <a:bodyPr wrap="square" anchor="t" lIns="0" rIns="0" tIns="0" bIns="0">
+          <a:bodyPr wrap="square" lIns="0" tIns="0" rIns="0" bIns="0" anchor="t">
             <a:spAutoFit/>
           </a:bodyPr>
           <a:lstStyle/>
@@ -16714,7 +17209,7 @@
           <a:noFill/>
         </p:spPr>
         <p:txBody>
-          <a:bodyPr wrap="square" anchor="t" lIns="0" rIns="0" tIns="0" bIns="0">
+          <a:bodyPr wrap="square" lIns="0" tIns="0" rIns="0" bIns="0" anchor="t">
             <a:spAutoFit/>
           </a:bodyPr>
           <a:lstStyle/>
@@ -16777,6 +17272,7 @@
           <a:lstStyle/>
           <a:p>
             <a:pPr algn="ctr"/>
+            <a:endParaRPr/>
           </a:p>
         </p:txBody>
       </p:sp>
@@ -16789,7 +17285,7 @@
         <p:spPr>
           <a:xfrm>
             <a:off x="1042416" y="1883664"/>
-            <a:ext cx="10106863" cy="621792"/>
+            <a:ext cx="10106863" cy="646331"/>
           </a:xfrm>
           <a:prstGeom prst="rect">
             <a:avLst/>
@@ -16797,7 +17293,7 @@
           <a:noFill/>
         </p:spPr>
         <p:txBody>
-          <a:bodyPr wrap="square" anchor="t" lIns="0" rIns="0" tIns="0" bIns="0">
+          <a:bodyPr wrap="square" lIns="0" tIns="0" rIns="0" bIns="0" anchor="t">
             <a:spAutoFit/>
           </a:bodyPr>
           <a:lstStyle/>
@@ -16808,13 +17304,58 @@
               </a:spcAft>
             </a:pPr>
             <a:r>
-              <a:rPr sz="2100" b="1">
+              <a:rPr sz="2100" b="1" dirty="0">
                 <a:solidFill>
                   <a:srgbClr val="FFFFFF"/>
                 </a:solidFill>
                 <a:latin typeface="Segoe UI"/>
               </a:rPr>
-              <a:t>Build the thing that can answer the question — then find every way it could lie.</a:t>
+              <a:t>Build the thing that can answer the question </a:t>
+            </a:r>
+            <a:r>
+              <a:rPr lang="en-IN" sz="2100" b="1" dirty="0" err="1">
+                <a:solidFill>
+                  <a:srgbClr val="FFFFFF"/>
+                </a:solidFill>
+                <a:latin typeface="Segoe UI"/>
+              </a:rPr>
+              <a:t>th</a:t>
+            </a:r>
+            <a:r>
+              <a:rPr sz="2100" b="1" dirty="0" err="1">
+                <a:solidFill>
+                  <a:srgbClr val="FFFFFF"/>
+                </a:solidFill>
+                <a:latin typeface="Segoe UI"/>
+              </a:rPr>
+              <a:t>en</a:t>
+            </a:r>
+            <a:r>
+              <a:rPr sz="2100" b="1" dirty="0">
+                <a:solidFill>
+                  <a:srgbClr val="FFFFFF"/>
+                </a:solidFill>
+                <a:latin typeface="Segoe UI"/>
+              </a:rPr>
+              <a:t> find every way it could </a:t>
+            </a:r>
+            <a:r>
+              <a:rPr lang="en-IN" sz="2100" b="1" dirty="0">
+                <a:solidFill>
+                  <a:srgbClr val="FFFFFF"/>
+                </a:solidFill>
+                <a:latin typeface="Segoe UI"/>
+              </a:rPr>
+              <a:t>go hallucinate and go wrong</a:t>
+            </a:r>
+            <a:r>
+              <a:rPr sz="2100" b="1" dirty="0">
+                <a:solidFill>
+                  <a:srgbClr val="FFFFFF"/>
+                </a:solidFill>
+                <a:latin typeface="Segoe UI"/>
+              </a:rPr>
+              <a:t>.</a:t>
             </a:r>
           </a:p>
         </p:txBody>
@@ -16860,6 +17401,7 @@
           <a:lstStyle/>
           <a:p>
             <a:pPr algn="ctr"/>
+            <a:endParaRPr/>
           </a:p>
         </p:txBody>
       </p:sp>
@@ -16904,6 +17446,7 @@
           <a:lstStyle/>
           <a:p>
             <a:pPr algn="ctr"/>
+            <a:endParaRPr/>
           </a:p>
         </p:txBody>
       </p:sp>
@@ -16916,7 +17459,7 @@
         <p:spPr>
           <a:xfrm>
             <a:off x="914400" y="2962656"/>
-            <a:ext cx="2997403" cy="1609344"/>
+            <a:ext cx="2997403" cy="859210"/>
           </a:xfrm>
           <a:prstGeom prst="rect">
             <a:avLst/>
@@ -16924,7 +17467,7 @@
           <a:noFill/>
         </p:spPr>
         <p:txBody>
-          <a:bodyPr wrap="square" anchor="t" lIns="0" rIns="0" tIns="0" bIns="0">
+          <a:bodyPr wrap="square" lIns="0" tIns="0" rIns="0" bIns="0" anchor="t">
             <a:spAutoFit/>
           </a:bodyPr>
           <a:lstStyle/>
@@ -16935,14 +17478,20 @@
               </a:spcAft>
             </a:pPr>
             <a:r>
-              <a:rPr sz="1400" b="1">
+              <a:rPr lang="en-IN" sz="1400" b="1" dirty="0">
                 <a:solidFill>
                   <a:srgbClr val="123045"/>
                 </a:solidFill>
                 <a:latin typeface="Segoe UI"/>
               </a:rPr>
-              <a:t>Fix the bar first</a:t>
-            </a:r>
+              <a:t>Create a control</a:t>
+            </a:r>
+            <a:endParaRPr sz="1400" b="1" dirty="0">
+              <a:solidFill>
+                <a:srgbClr val="123045"/>
+              </a:solidFill>
+              <a:latin typeface="Segoe UI"/>
+            </a:endParaRPr>
           </a:p>
           <a:p>
             <a:pPr>
@@ -16951,7 +17500,7 @@
               </a:spcAft>
             </a:pPr>
             <a:r>
-              <a:rPr sz="1200" b="0">
+              <a:rPr sz="1200" b="0" dirty="0">
                 <a:solidFill>
                   <a:srgbClr val="5C6B78"/>
                 </a:solidFill>
@@ -17003,6 +17552,7 @@
           <a:lstStyle/>
           <a:p>
             <a:pPr algn="ctr"/>
+            <a:endParaRPr/>
           </a:p>
         </p:txBody>
       </p:sp>
@@ -17047,6 +17597,7 @@
           <a:lstStyle/>
           <a:p>
             <a:pPr algn="ctr"/>
+            <a:endParaRPr/>
           </a:p>
         </p:txBody>
       </p:sp>
@@ -17059,7 +17610,7 @@
         <p:spPr>
           <a:xfrm>
             <a:off x="4625035" y="2962656"/>
-            <a:ext cx="2997403" cy="1609344"/>
+            <a:ext cx="2997403" cy="674544"/>
           </a:xfrm>
           <a:prstGeom prst="rect">
             <a:avLst/>
@@ -17067,7 +17618,7 @@
           <a:noFill/>
         </p:spPr>
         <p:txBody>
-          <a:bodyPr wrap="square" anchor="t" lIns="0" rIns="0" tIns="0" bIns="0">
+          <a:bodyPr wrap="square" lIns="0" tIns="0" rIns="0" bIns="0" anchor="t">
             <a:spAutoFit/>
           </a:bodyPr>
           <a:lstStyle/>
@@ -17078,7 +17629,7 @@
               </a:spcAft>
             </a:pPr>
             <a:r>
-              <a:rPr sz="1400" b="1">
+              <a:rPr sz="1400" b="1" dirty="0">
                 <a:solidFill>
                   <a:srgbClr val="123045"/>
                 </a:solidFill>
@@ -17094,13 +17645,13 @@
               </a:spcAft>
             </a:pPr>
             <a:r>
-              <a:rPr sz="1200" b="0">
+              <a:rPr sz="1200" b="0" dirty="0">
                 <a:solidFill>
                   <a:srgbClr val="5C6B78"/>
                 </a:solidFill>
                 <a:latin typeface="Segoe UI"/>
               </a:rPr>
-              <a:t>197 tests, 3,909 lines of source, zero GPU hours, zero dataset egress, $0 of a $325 cap.</a:t>
+              <a:t>197 tests, 3,909 lines of source, zero GPU hours, zero dataset egress, </a:t>
             </a:r>
           </a:p>
         </p:txBody>
@@ -17146,6 +17697,7 @@
           <a:lstStyle/>
           <a:p>
             <a:pPr algn="ctr"/>
+            <a:endParaRPr/>
           </a:p>
         </p:txBody>
       </p:sp>
@@ -17190,6 +17742,7 @@
           <a:lstStyle/>
           <a:p>
             <a:pPr algn="ctr"/>
+            <a:endParaRPr/>
           </a:p>
         </p:txBody>
       </p:sp>
@@ -17202,7 +17755,7 @@
         <p:spPr>
           <a:xfrm>
             <a:off x="8335670" y="2962656"/>
-            <a:ext cx="2997403" cy="1609344"/>
+            <a:ext cx="2997403" cy="769441"/>
           </a:xfrm>
           <a:prstGeom prst="rect">
             <a:avLst/>
@@ -17210,7 +17763,7 @@
           <a:noFill/>
         </p:spPr>
         <p:txBody>
-          <a:bodyPr wrap="square" anchor="t" lIns="0" rIns="0" tIns="0" bIns="0">
+          <a:bodyPr wrap="square" lIns="0" tIns="0" rIns="0" bIns="0" anchor="t">
             <a:spAutoFit/>
           </a:bodyPr>
           <a:lstStyle/>
@@ -17221,23 +17774,33 @@
               </a:spcAft>
             </a:pPr>
             <a:r>
-              <a:rPr sz="1400" b="1">
+              <a:rPr lang="en-IN" sz="1400" b="1" dirty="0">
                 <a:solidFill>
                   <a:srgbClr val="123045"/>
                 </a:solidFill>
                 <a:latin typeface="Segoe UI"/>
               </a:rPr>
-              <a:t>Hunt for false answers</a:t>
-            </a:r>
-          </a:p>
-          <a:p>
-            <a:pPr>
-              <a:spcAft>
-                <a:spcPts val="0"/>
-              </a:spcAft>
-            </a:pPr>
-            <a:r>
-              <a:rPr sz="1200" b="0">
+              <a:t>Search for </a:t>
+            </a:r>
+            <a:r>
+              <a:rPr lang="en-IN" sz="1400" b="1" dirty="0" err="1">
+                <a:solidFill>
+                  <a:srgbClr val="123045"/>
+                </a:solidFill>
+                <a:latin typeface="Segoe UI"/>
+              </a:rPr>
+              <a:t>discrepencies</a:t>
+            </a:r>
+            <a:br>
+              <a:rPr lang="en-IN" sz="1400" b="1" dirty="0">
+                <a:solidFill>
+                  <a:srgbClr val="123045"/>
+                </a:solidFill>
+                <a:latin typeface="Segoe UI"/>
+              </a:rPr>
+            </a:br>
+            <a:r>
+              <a:rPr sz="1200" b="0" dirty="0">
                 <a:solidFill>
                   <a:srgbClr val="5C6B78"/>
                 </a:solidFill>
@@ -17265,7 +17828,7 @@
           <a:noFill/>
         </p:spPr>
         <p:txBody>
-          <a:bodyPr wrap="square" anchor="t" lIns="0" rIns="0" tIns="0" bIns="0">
+          <a:bodyPr wrap="square" lIns="0" tIns="0" rIns="0" bIns="0" anchor="t">
             <a:spAutoFit/>
           </a:bodyPr>
           <a:lstStyle/>
@@ -17300,7 +17863,7 @@
 </file>
 
 <file path=ppt/slides/slide8.xml><?xml version="1.0" encoding="utf-8"?>
-<p:sld xmlns:a="http://schemas.openxmlformats.org/drawingml/2006/main" xmlns:p="http://schemas.openxmlformats.org/presentationml/2006/main" xmlns:r="http://schemas.openxmlformats.org/officeDocument/2006/relationships">
+<p:sld xmlns:a="http://schemas.openxmlformats.org/drawingml/2006/main" xmlns:r="http://schemas.openxmlformats.org/officeDocument/2006/relationships" xmlns:p="http://schemas.openxmlformats.org/presentationml/2006/main">
   <p:cSld>
     <p:spTree>
       <p:nvGrpSpPr>
@@ -17308,7 +17871,14 @@
         <p:cNvGrpSpPr/>
         <p:nvPr/>
       </p:nvGrpSpPr>
-      <p:grpSpPr/>
+      <p:grpSpPr>
+        <a:xfrm>
+          <a:off x="0" y="0"/>
+          <a:ext cx="0" cy="0"/>
+          <a:chOff x="0" y="0"/>
+          <a:chExt cx="0" cy="0"/>
+        </a:xfrm>
+      </p:grpSpPr>
       <p:sp>
         <p:nvSpPr>
           <p:cNvPr id="2" name="Rectangle 1"/>
@@ -17350,6 +17920,7 @@
           <a:lstStyle/>
           <a:p>
             <a:pPr algn="ctr"/>
+            <a:endParaRPr/>
           </a:p>
         </p:txBody>
       </p:sp>
@@ -17394,6 +17965,7 @@
           <a:lstStyle/>
           <a:p>
             <a:pPr algn="ctr"/>
+            <a:endParaRPr/>
           </a:p>
         </p:txBody>
       </p:sp>
@@ -17414,7 +17986,7 @@
           <a:noFill/>
         </p:spPr>
         <p:txBody>
-          <a:bodyPr wrap="square" anchor="t" lIns="0" rIns="0" tIns="0" bIns="0">
+          <a:bodyPr wrap="square" lIns="0" tIns="0" rIns="0" bIns="0" anchor="t">
             <a:spAutoFit/>
           </a:bodyPr>
           <a:lstStyle/>
@@ -17453,7 +18025,7 @@
           <a:noFill/>
         </p:spPr>
         <p:txBody>
-          <a:bodyPr wrap="square" anchor="t" lIns="0" rIns="0" tIns="0" bIns="0">
+          <a:bodyPr wrap="square" lIns="0" tIns="0" rIns="0" bIns="0" anchor="t">
             <a:spAutoFit/>
           </a:bodyPr>
           <a:lstStyle/>
@@ -17516,6 +18088,7 @@
           <a:lstStyle/>
           <a:p>
             <a:pPr algn="ctr"/>
+            <a:endParaRPr/>
           </a:p>
         </p:txBody>
       </p:sp>
@@ -17536,7 +18109,7 @@
           <a:noFill/>
         </p:spPr>
         <p:txBody>
-          <a:bodyPr wrap="square" anchor="t" lIns="0" rIns="0" tIns="0" bIns="0">
+          <a:bodyPr wrap="square" lIns="0" tIns="0" rIns="0" bIns="0" anchor="t">
             <a:spAutoFit/>
           </a:bodyPr>
           <a:lstStyle/>
@@ -17575,7 +18148,7 @@
           <a:noFill/>
         </p:spPr>
         <p:txBody>
-          <a:bodyPr wrap="square" anchor="t" lIns="0" rIns="0" tIns="0" bIns="0">
+          <a:bodyPr wrap="square" lIns="0" tIns="0" rIns="0" bIns="0" anchor="t">
             <a:spAutoFit/>
           </a:bodyPr>
           <a:lstStyle/>
@@ -17616,14 +18189,32 @@
                 <a:tableStyleId>{5C22544A-7EE6-4342-B048-85BDC9FD1C3A}</a:tableStyleId>
               </a:tblPr>
               <a:tblGrid>
-                <a:gridCol w="4572000"/>
-                <a:gridCol w="1554480"/>
-                <a:gridCol w="4748479"/>
+                <a:gridCol w="4572000">
+                  <a:extLst>
+                    <a:ext uri="{9D8B030D-6E8A-4147-A177-3AD203B41FA5}">
+                      <a16:colId xmlns:a16="http://schemas.microsoft.com/office/drawing/2014/main" val="20000"/>
+                    </a:ext>
+                  </a:extLst>
+                </a:gridCol>
+                <a:gridCol w="1554480">
+                  <a:extLst>
+                    <a:ext uri="{9D8B030D-6E8A-4147-A177-3AD203B41FA5}">
+                      <a16:colId xmlns:a16="http://schemas.microsoft.com/office/drawing/2014/main" val="20001"/>
+                    </a:ext>
+                  </a:extLst>
+                </a:gridCol>
+                <a:gridCol w="4748479">
+                  <a:extLst>
+                    <a:ext uri="{9D8B030D-6E8A-4147-A177-3AD203B41FA5}">
+                      <a16:colId xmlns:a16="http://schemas.microsoft.com/office/drawing/2014/main" val="20002"/>
+                    </a:ext>
+                  </a:extLst>
+                </a:gridCol>
               </a:tblGrid>
               <a:tr h="365760">
                 <a:tc>
                   <a:txBody>
-                    <a:bodyPr wrap="square"/>
+                    <a:bodyPr/>
                     <a:lstStyle/>
                     <a:p>
                       <a:r>
@@ -17637,7 +18228,7 @@
                       </a:r>
                     </a:p>
                   </a:txBody>
-                  <a:tcPr anchor="ctr" marL="91440" marR="91440">
+                  <a:tcPr anchor="ctr">
                     <a:solidFill>
                       <a:srgbClr val="123045"/>
                     </a:solidFill>
@@ -17645,7 +18236,7 @@
                 </a:tc>
                 <a:tc>
                   <a:txBody>
-                    <a:bodyPr wrap="square"/>
+                    <a:bodyPr/>
                     <a:lstStyle/>
                     <a:p>
                       <a:r>
@@ -17659,7 +18250,7 @@
                       </a:r>
                     </a:p>
                   </a:txBody>
-                  <a:tcPr anchor="ctr" marL="91440" marR="91440">
+                  <a:tcPr anchor="ctr">
                     <a:solidFill>
                       <a:srgbClr val="123045"/>
                     </a:solidFill>
@@ -17667,7 +18258,7 @@
                 </a:tc>
                 <a:tc>
                   <a:txBody>
-                    <a:bodyPr wrap="square"/>
+                    <a:bodyPr/>
                     <a:lstStyle/>
                     <a:p>
                       <a:r>
@@ -17681,17 +18272,22 @@
                       </a:r>
                     </a:p>
                   </a:txBody>
-                  <a:tcPr anchor="ctr" marL="91440" marR="91440">
+                  <a:tcPr anchor="ctr">
                     <a:solidFill>
                       <a:srgbClr val="123045"/>
                     </a:solidFill>
                   </a:tcPr>
                 </a:tc>
+                <a:extLst>
+                  <a:ext uri="{0D108BD9-81ED-4DB2-BD59-A6C34878D82A}">
+                    <a16:rowId xmlns:a16="http://schemas.microsoft.com/office/drawing/2014/main" val="10000"/>
+                  </a:ext>
+                </a:extLst>
               </a:tr>
               <a:tr h="397764">
                 <a:tc>
                   <a:txBody>
-                    <a:bodyPr wrap="square"/>
+                    <a:bodyPr/>
                     <a:lstStyle/>
                     <a:p>
                       <a:r>
@@ -17705,7 +18301,7 @@
                       </a:r>
                     </a:p>
                   </a:txBody>
-                  <a:tcPr anchor="ctr" marL="91440" marR="91440">
+                  <a:tcPr anchor="ctr">
                     <a:solidFill>
                       <a:srgbClr val="E7F4EC"/>
                     </a:solidFill>
@@ -17713,7 +18309,7 @@
                 </a:tc>
                 <a:tc>
                   <a:txBody>
-                    <a:bodyPr wrap="square"/>
+                    <a:bodyPr/>
                     <a:lstStyle/>
                     <a:p>
                       <a:r>
@@ -17727,7 +18323,7 @@
                       </a:r>
                     </a:p>
                   </a:txBody>
-                  <a:tcPr anchor="ctr" marL="91440" marR="91440">
+                  <a:tcPr anchor="ctr">
                     <a:solidFill>
                       <a:srgbClr val="E7F4EC"/>
                     </a:solidFill>
@@ -17735,7 +18331,7 @@
                 </a:tc>
                 <a:tc>
                   <a:txBody>
-                    <a:bodyPr wrap="square"/>
+                    <a:bodyPr/>
                     <a:lstStyle/>
                     <a:p>
                       <a:r>
@@ -17749,17 +18345,22 @@
                       </a:r>
                     </a:p>
                   </a:txBody>
-                  <a:tcPr anchor="ctr" marL="91440" marR="91440">
+                  <a:tcPr anchor="ctr">
                     <a:solidFill>
                       <a:srgbClr val="E7F4EC"/>
                     </a:solidFill>
                   </a:tcPr>
                 </a:tc>
+                <a:extLst>
+                  <a:ext uri="{0D108BD9-81ED-4DB2-BD59-A6C34878D82A}">
+                    <a16:rowId xmlns:a16="http://schemas.microsoft.com/office/drawing/2014/main" val="10001"/>
+                  </a:ext>
+                </a:extLst>
               </a:tr>
               <a:tr h="397764">
                 <a:tc>
                   <a:txBody>
-                    <a:bodyPr wrap="square"/>
+                    <a:bodyPr/>
                     <a:lstStyle/>
                     <a:p>
                       <a:r>
@@ -17773,7 +18374,7 @@
                       </a:r>
                     </a:p>
                   </a:txBody>
-                  <a:tcPr anchor="ctr" marL="91440" marR="91440">
+                  <a:tcPr anchor="ctr">
                     <a:solidFill>
                       <a:srgbClr val="E7F4EC"/>
                     </a:solidFill>
@@ -17781,7 +18382,7 @@
                 </a:tc>
                 <a:tc>
                   <a:txBody>
-                    <a:bodyPr wrap="square"/>
+                    <a:bodyPr/>
                     <a:lstStyle/>
                     <a:p>
                       <a:r>
@@ -17795,7 +18396,7 @@
                       </a:r>
                     </a:p>
                   </a:txBody>
-                  <a:tcPr anchor="ctr" marL="91440" marR="91440">
+                  <a:tcPr anchor="ctr">
                     <a:solidFill>
                       <a:srgbClr val="E7F4EC"/>
                     </a:solidFill>
@@ -17803,7 +18404,7 @@
                 </a:tc>
                 <a:tc>
                   <a:txBody>
-                    <a:bodyPr wrap="square"/>
+                    <a:bodyPr/>
                     <a:lstStyle/>
                     <a:p>
                       <a:r>
@@ -17817,17 +18418,22 @@
                       </a:r>
                     </a:p>
                   </a:txBody>
-                  <a:tcPr anchor="ctr" marL="91440" marR="91440">
+                  <a:tcPr anchor="ctr">
                     <a:solidFill>
                       <a:srgbClr val="E7F4EC"/>
                     </a:solidFill>
                   </a:tcPr>
                 </a:tc>
+                <a:extLst>
+                  <a:ext uri="{0D108BD9-81ED-4DB2-BD59-A6C34878D82A}">
+                    <a16:rowId xmlns:a16="http://schemas.microsoft.com/office/drawing/2014/main" val="10002"/>
+                  </a:ext>
+                </a:extLst>
               </a:tr>
               <a:tr h="397764">
                 <a:tc>
                   <a:txBody>
-                    <a:bodyPr wrap="square"/>
+                    <a:bodyPr/>
                     <a:lstStyle/>
                     <a:p>
                       <a:r>
@@ -17841,7 +18447,7 @@
                       </a:r>
                     </a:p>
                   </a:txBody>
-                  <a:tcPr anchor="ctr" marL="91440" marR="91440">
+                  <a:tcPr anchor="ctr">
                     <a:solidFill>
                       <a:srgbClr val="E7F4EC"/>
                     </a:solidFill>
@@ -17849,7 +18455,7 @@
                 </a:tc>
                 <a:tc>
                   <a:txBody>
-                    <a:bodyPr wrap="square"/>
+                    <a:bodyPr/>
                     <a:lstStyle/>
                     <a:p>
                       <a:r>
@@ -17863,7 +18469,7 @@
                       </a:r>
                     </a:p>
                   </a:txBody>
-                  <a:tcPr anchor="ctr" marL="91440" marR="91440">
+                  <a:tcPr anchor="ctr">
                     <a:solidFill>
                       <a:srgbClr val="E7F4EC"/>
                     </a:solidFill>
@@ -17871,7 +18477,7 @@
                 </a:tc>
                 <a:tc>
                   <a:txBody>
-                    <a:bodyPr wrap="square"/>
+                    <a:bodyPr/>
                     <a:lstStyle/>
                     <a:p>
                       <a:r>
@@ -17885,12 +18491,17 @@
                       </a:r>
                     </a:p>
                   </a:txBody>
-                  <a:tcPr anchor="ctr" marL="91440" marR="91440">
+                  <a:tcPr anchor="ctr">
                     <a:solidFill>
                       <a:srgbClr val="E7F4EC"/>
                     </a:solidFill>
                   </a:tcPr>
                 </a:tc>
+                <a:extLst>
+                  <a:ext uri="{0D108BD9-81ED-4DB2-BD59-A6C34878D82A}">
+                    <a16:rowId xmlns:a16="http://schemas.microsoft.com/office/drawing/2014/main" val="10003"/>
+                  </a:ext>
+                </a:extLst>
               </a:tr>
             </a:tbl>
           </a:graphicData>
@@ -17937,6 +18548,7 @@
           <a:lstStyle/>
           <a:p>
             <a:pPr algn="ctr"/>
+            <a:endParaRPr/>
           </a:p>
         </p:txBody>
       </p:sp>
@@ -17981,6 +18593,7 @@
           <a:lstStyle/>
           <a:p>
             <a:pPr algn="ctr"/>
+            <a:endParaRPr/>
           </a:p>
         </p:txBody>
       </p:sp>
@@ -18001,7 +18614,7 @@
           <a:noFill/>
         </p:spPr>
         <p:txBody>
-          <a:bodyPr wrap="square" anchor="t" lIns="0" rIns="0" tIns="0" bIns="0">
+          <a:bodyPr wrap="square" lIns="0" tIns="0" rIns="0" bIns="0" anchor="t">
             <a:spAutoFit/>
           </a:bodyPr>
           <a:lstStyle/>
@@ -18056,7 +18669,7 @@
           <a:noFill/>
         </p:spPr>
         <p:txBody>
-          <a:bodyPr wrap="square" anchor="t" lIns="0" rIns="0" tIns="0" bIns="0">
+          <a:bodyPr wrap="square" lIns="0" tIns="0" rIns="0" bIns="0" anchor="t">
             <a:spAutoFit/>
           </a:bodyPr>
           <a:lstStyle/>
@@ -18091,7 +18704,7 @@
 </file>
 
 <file path=ppt/slides/slide9.xml><?xml version="1.0" encoding="utf-8"?>
-<p:sld xmlns:a="http://schemas.openxmlformats.org/drawingml/2006/main" xmlns:p="http://schemas.openxmlformats.org/presentationml/2006/main" xmlns:r="http://schemas.openxmlformats.org/officeDocument/2006/relationships">
+<p:sld xmlns:a="http://schemas.openxmlformats.org/drawingml/2006/main" xmlns:r="http://schemas.openxmlformats.org/officeDocument/2006/relationships" xmlns:p="http://schemas.openxmlformats.org/presentationml/2006/main">
   <p:cSld>
     <p:spTree>
       <p:nvGrpSpPr>
@@ -18099,7 +18712,14 @@
         <p:cNvGrpSpPr/>
         <p:nvPr/>
       </p:nvGrpSpPr>
-      <p:grpSpPr/>
+      <p:grpSpPr>
+        <a:xfrm>
+          <a:off x="0" y="0"/>
+          <a:ext cx="0" cy="0"/>
+          <a:chOff x="0" y="0"/>
+          <a:chExt cx="0" cy="0"/>
+        </a:xfrm>
+      </p:grpSpPr>
       <p:sp>
         <p:nvSpPr>
           <p:cNvPr id="2" name="Rectangle 1"/>
@@ -18141,6 +18761,7 @@
           <a:lstStyle/>
           <a:p>
             <a:pPr algn="ctr"/>
+            <a:endParaRPr/>
           </a:p>
         </p:txBody>
       </p:sp>
@@ -18185,6 +18806,7 @@
           <a:lstStyle/>
           <a:p>
             <a:pPr algn="ctr"/>
+            <a:endParaRPr/>
           </a:p>
         </p:txBody>
       </p:sp>
@@ -18205,7 +18827,7 @@
           <a:noFill/>
         </p:spPr>
         <p:txBody>
-          <a:bodyPr wrap="square" anchor="t" lIns="0" rIns="0" tIns="0" bIns="0">
+          <a:bodyPr wrap="square" lIns="0" tIns="0" rIns="0" bIns="0" anchor="t">
             <a:spAutoFit/>
           </a:bodyPr>
           <a:lstStyle/>
@@ -18244,7 +18866,7 @@
           <a:noFill/>
         </p:spPr>
         <p:txBody>
-          <a:bodyPr wrap="square" anchor="t" lIns="0" rIns="0" tIns="0" bIns="0">
+          <a:bodyPr wrap="square" lIns="0" tIns="0" rIns="0" bIns="0" anchor="t">
             <a:spAutoFit/>
           </a:bodyPr>
           <a:lstStyle/>
@@ -18307,6 +18929,7 @@
           <a:lstStyle/>
           <a:p>
             <a:pPr algn="ctr"/>
+            <a:endParaRPr/>
           </a:p>
         </p:txBody>
       </p:sp>
@@ -18327,7 +18950,7 @@
           <a:noFill/>
         </p:spPr>
         <p:txBody>
-          <a:bodyPr wrap="square" anchor="t" lIns="0" rIns="0" tIns="0" bIns="0">
+          <a:bodyPr wrap="square" lIns="0" tIns="0" rIns="0" bIns="0" anchor="t">
             <a:spAutoFit/>
           </a:bodyPr>
           <a:lstStyle/>
@@ -18366,7 +18989,7 @@
           <a:noFill/>
         </p:spPr>
         <p:txBody>
-          <a:bodyPr wrap="square" anchor="t" lIns="0" rIns="0" tIns="0" bIns="0">
+          <a:bodyPr wrap="square" lIns="0" tIns="0" rIns="0" bIns="0" anchor="t">
             <a:spAutoFit/>
           </a:bodyPr>
           <a:lstStyle/>
@@ -18429,6 +19052,7 @@
           <a:lstStyle/>
           <a:p>
             <a:pPr algn="ctr"/>
+            <a:endParaRPr/>
           </a:p>
         </p:txBody>
       </p:sp>
@@ -18449,7 +19073,7 @@
           <a:noFill/>
         </p:spPr>
         <p:txBody>
-          <a:bodyPr wrap="square" anchor="ctr" lIns="0" rIns="0" tIns="0" bIns="0">
+          <a:bodyPr wrap="square" lIns="0" tIns="0" rIns="0" bIns="0" anchor="ctr">
             <a:spAutoFit/>
           </a:bodyPr>
           <a:lstStyle/>
@@ -18488,7 +19112,7 @@
           <a:noFill/>
         </p:spPr>
         <p:txBody>
-          <a:bodyPr wrap="square" anchor="t" lIns="0" rIns="0" tIns="0" bIns="0">
+          <a:bodyPr wrap="square" lIns="0" tIns="0" rIns="0" bIns="0" anchor="t">
             <a:spAutoFit/>
           </a:bodyPr>
           <a:lstStyle/>
@@ -18567,6 +19191,7 @@
           <a:lstStyle/>
           <a:p>
             <a:pPr algn="ctr"/>
+            <a:endParaRPr/>
           </a:p>
         </p:txBody>
       </p:sp>
@@ -18587,7 +19212,7 @@
           <a:noFill/>
         </p:spPr>
         <p:txBody>
-          <a:bodyPr wrap="square" anchor="ctr" lIns="0" rIns="0" tIns="0" bIns="0">
+          <a:bodyPr wrap="square" lIns="0" tIns="0" rIns="0" bIns="0" anchor="ctr">
             <a:spAutoFit/>
           </a:bodyPr>
           <a:lstStyle/>
@@ -18626,7 +19251,7 @@
           <a:noFill/>
         </p:spPr>
         <p:txBody>
-          <a:bodyPr wrap="square" anchor="t" lIns="0" rIns="0" tIns="0" bIns="0">
+          <a:bodyPr wrap="square" lIns="0" tIns="0" rIns="0" bIns="0" anchor="t">
             <a:spAutoFit/>
           </a:bodyPr>
           <a:lstStyle/>
@@ -18705,6 +19330,7 @@
           <a:lstStyle/>
           <a:p>
             <a:pPr algn="ctr"/>
+            <a:endParaRPr/>
           </a:p>
         </p:txBody>
       </p:sp>
@@ -18725,7 +19351,7 @@
           <a:noFill/>
         </p:spPr>
         <p:txBody>
-          <a:bodyPr wrap="square" anchor="ctr" lIns="0" rIns="0" tIns="0" bIns="0">
+          <a:bodyPr wrap="square" lIns="0" tIns="0" rIns="0" bIns="0" anchor="ctr">
             <a:spAutoFit/>
           </a:bodyPr>
           <a:lstStyle/>
@@ -18764,7 +19390,7 @@
           <a:noFill/>
         </p:spPr>
         <p:txBody>
-          <a:bodyPr wrap="square" anchor="t" lIns="0" rIns="0" tIns="0" bIns="0">
+          <a:bodyPr wrap="square" lIns="0" tIns="0" rIns="0" bIns="0" anchor="t">
             <a:spAutoFit/>
           </a:bodyPr>
           <a:lstStyle/>
@@ -18812,7 +19438,7 @@
         </p:nvGraphicFramePr>
         <p:xfrm>
           <a:off x="658368" y="3017520"/>
-          <a:ext cx="10874959" cy="1559052"/>
+          <a:ext cx="10874959" cy="1588008"/>
         </p:xfrm>
         <a:graphic>
           <a:graphicData uri="http://schemas.openxmlformats.org/drawingml/2006/table">
@@ -18821,14 +19447,32 @@
                 <a:tableStyleId>{5C22544A-7EE6-4342-B048-85BDC9FD1C3A}</a:tableStyleId>
               </a:tblPr>
               <a:tblGrid>
-                <a:gridCol w="3566160"/>
-                <a:gridCol w="3931920"/>
-                <a:gridCol w="3376879"/>
+                <a:gridCol w="3566160">
+                  <a:extLst>
+                    <a:ext uri="{9D8B030D-6E8A-4147-A177-3AD203B41FA5}">
+                      <a16:colId xmlns:a16="http://schemas.microsoft.com/office/drawing/2014/main" val="20000"/>
+                    </a:ext>
+                  </a:extLst>
+                </a:gridCol>
+                <a:gridCol w="3931920">
+                  <a:extLst>
+                    <a:ext uri="{9D8B030D-6E8A-4147-A177-3AD203B41FA5}">
+                      <a16:colId xmlns:a16="http://schemas.microsoft.com/office/drawing/2014/main" val="20001"/>
+                    </a:ext>
+                  </a:extLst>
+                </a:gridCol>
+                <a:gridCol w="3376879">
+                  <a:extLst>
+                    <a:ext uri="{9D8B030D-6E8A-4147-A177-3AD203B41FA5}">
+                      <a16:colId xmlns:a16="http://schemas.microsoft.com/office/drawing/2014/main" val="20002"/>
+                    </a:ext>
+                  </a:extLst>
+                </a:gridCol>
               </a:tblGrid>
               <a:tr h="365760">
                 <a:tc>
                   <a:txBody>
-                    <a:bodyPr wrap="square"/>
+                    <a:bodyPr/>
                     <a:lstStyle/>
                     <a:p>
                       <a:r>
@@ -18842,7 +19486,7 @@
                       </a:r>
                     </a:p>
                   </a:txBody>
-                  <a:tcPr anchor="ctr" marL="91440" marR="91440">
+                  <a:tcPr anchor="ctr">
                     <a:solidFill>
                       <a:srgbClr val="123045"/>
                     </a:solidFill>
@@ -18850,7 +19494,7 @@
                 </a:tc>
                 <a:tc>
                   <a:txBody>
-                    <a:bodyPr wrap="square"/>
+                    <a:bodyPr/>
                     <a:lstStyle/>
                     <a:p>
                       <a:r>
@@ -18864,7 +19508,7 @@
                       </a:r>
                     </a:p>
                   </a:txBody>
-                  <a:tcPr anchor="ctr" marL="91440" marR="91440">
+                  <a:tcPr anchor="ctr">
                     <a:solidFill>
                       <a:srgbClr val="123045"/>
                     </a:solidFill>
@@ -18872,7 +19516,7 @@
                 </a:tc>
                 <a:tc>
                   <a:txBody>
-                    <a:bodyPr wrap="square"/>
+                    <a:bodyPr/>
                     <a:lstStyle/>
                     <a:p>
                       <a:r>
@@ -18886,17 +19530,22 @@
                       </a:r>
                     </a:p>
                   </a:txBody>
-                  <a:tcPr anchor="ctr" marL="91440" marR="91440">
+                  <a:tcPr anchor="ctr">
                     <a:solidFill>
                       <a:srgbClr val="123045"/>
                     </a:solidFill>
                   </a:tcPr>
                 </a:tc>
+                <a:extLst>
+                  <a:ext uri="{0D108BD9-81ED-4DB2-BD59-A6C34878D82A}">
+                    <a16:rowId xmlns:a16="http://schemas.microsoft.com/office/drawing/2014/main" val="10000"/>
+                  </a:ext>
+                </a:extLst>
               </a:tr>
               <a:tr h="397764">
                 <a:tc>
                   <a:txBody>
-                    <a:bodyPr wrap="square"/>
+                    <a:bodyPr/>
                     <a:lstStyle/>
                     <a:p>
                       <a:r>
@@ -18910,7 +19559,7 @@
                       </a:r>
                     </a:p>
                   </a:txBody>
-                  <a:tcPr anchor="ctr" marL="91440" marR="91440">
+                  <a:tcPr anchor="ctr">
                     <a:solidFill>
                       <a:srgbClr val="FDF1DF"/>
                     </a:solidFill>
@@ -18918,7 +19567,7 @@
                 </a:tc>
                 <a:tc>
                   <a:txBody>
-                    <a:bodyPr wrap="square"/>
+                    <a:bodyPr/>
                     <a:lstStyle/>
                     <a:p>
                       <a:r>
@@ -18932,7 +19581,7 @@
                       </a:r>
                     </a:p>
                   </a:txBody>
-                  <a:tcPr anchor="ctr" marL="91440" marR="91440">
+                  <a:tcPr anchor="ctr">
                     <a:solidFill>
                       <a:srgbClr val="FDF1DF"/>
                     </a:solidFill>
@@ -18940,7 +19589,7 @@
                 </a:tc>
                 <a:tc>
                   <a:txBody>
-                    <a:bodyPr wrap="square"/>
+                    <a:bodyPr/>
                     <a:lstStyle/>
                     <a:p>
                       <a:r>
@@ -18954,17 +19603,22 @@
                       </a:r>
                     </a:p>
                   </a:txBody>
-                  <a:tcPr anchor="ctr" marL="91440" marR="91440">
+                  <a:tcPr anchor="ctr">
                     <a:solidFill>
                       <a:srgbClr val="FDF1DF"/>
                     </a:solidFill>
                   </a:tcPr>
                 </a:tc>
+                <a:extLst>
+                  <a:ext uri="{0D108BD9-81ED-4DB2-BD59-A6C34878D82A}">
+                    <a16:rowId xmlns:a16="http://schemas.microsoft.com/office/drawing/2014/main" val="10001"/>
+                  </a:ext>
+                </a:extLst>
               </a:tr>
               <a:tr h="397764">
                 <a:tc>
                   <a:txBody>
-                    <a:bodyPr wrap="square"/>
+                    <a:bodyPr/>
                     <a:lstStyle/>
                     <a:p>
                       <a:r>
@@ -18978,7 +19632,7 @@
                       </a:r>
                     </a:p>
                   </a:txBody>
-                  <a:tcPr anchor="ctr" marL="91440" marR="91440">
+                  <a:tcPr anchor="ctr">
                     <a:solidFill>
                       <a:srgbClr val="FBECEC"/>
                     </a:solidFill>
@@ -18986,7 +19640,7 @@
                 </a:tc>
                 <a:tc>
                   <a:txBody>
-                    <a:bodyPr wrap="square"/>
+                    <a:bodyPr/>
                     <a:lstStyle/>
                     <a:p>
                       <a:r>
@@ -19000,7 +19654,7 @@
                       </a:r>
                     </a:p>
                   </a:txBody>
-                  <a:tcPr anchor="ctr" marL="91440" marR="91440">
+                  <a:tcPr anchor="ctr">
                     <a:solidFill>
                       <a:srgbClr val="FBECEC"/>
                     </a:solidFill>
@@ -19008,7 +19662,7 @@
                 </a:tc>
                 <a:tc>
                   <a:txBody>
-                    <a:bodyPr wrap="square"/>
+                    <a:bodyPr/>
                     <a:lstStyle/>
                     <a:p>
                       <a:r>
@@ -19022,17 +19676,22 @@
                       </a:r>
                     </a:p>
                   </a:txBody>
-                  <a:tcPr anchor="ctr" marL="91440" marR="91440">
+                  <a:tcPr anchor="ctr">
                     <a:solidFill>
                       <a:srgbClr val="FBECEC"/>
                     </a:solidFill>
                   </a:tcPr>
                 </a:tc>
+                <a:extLst>
+                  <a:ext uri="{0D108BD9-81ED-4DB2-BD59-A6C34878D82A}">
+                    <a16:rowId xmlns:a16="http://schemas.microsoft.com/office/drawing/2014/main" val="10002"/>
+                  </a:ext>
+                </a:extLst>
               </a:tr>
               <a:tr h="397764">
                 <a:tc>
                   <a:txBody>
-                    <a:bodyPr wrap="square"/>
+                    <a:bodyPr/>
                     <a:lstStyle/>
                     <a:p>
                       <a:r>
@@ -19046,7 +19705,7 @@
                       </a:r>
                     </a:p>
                   </a:txBody>
-                  <a:tcPr anchor="ctr" marL="91440" marR="91440">
+                  <a:tcPr anchor="ctr">
                     <a:solidFill>
                       <a:srgbClr val="FDF1DF"/>
                     </a:solidFill>
@@ -19054,7 +19713,7 @@
                 </a:tc>
                 <a:tc>
                   <a:txBody>
-                    <a:bodyPr wrap="square"/>
+                    <a:bodyPr/>
                     <a:lstStyle/>
                     <a:p>
                       <a:r>
@@ -19068,7 +19727,7 @@
                       </a:r>
                     </a:p>
                   </a:txBody>
-                  <a:tcPr anchor="ctr" marL="91440" marR="91440">
+                  <a:tcPr anchor="ctr">
                     <a:solidFill>
                       <a:srgbClr val="FDF1DF"/>
                     </a:solidFill>
@@ -19076,7 +19735,7 @@
                 </a:tc>
                 <a:tc>
                   <a:txBody>
-                    <a:bodyPr wrap="square"/>
+                    <a:bodyPr/>
                     <a:lstStyle/>
                     <a:p>
                       <a:r>
@@ -19090,12 +19749,17 @@
                       </a:r>
                     </a:p>
                   </a:txBody>
-                  <a:tcPr anchor="ctr" marL="91440" marR="91440">
+                  <a:tcPr anchor="ctr">
                     <a:solidFill>
                       <a:srgbClr val="FDF1DF"/>
                     </a:solidFill>
                   </a:tcPr>
                 </a:tc>
+                <a:extLst>
+                  <a:ext uri="{0D108BD9-81ED-4DB2-BD59-A6C34878D82A}">
+                    <a16:rowId xmlns:a16="http://schemas.microsoft.com/office/drawing/2014/main" val="10003"/>
+                  </a:ext>
+                </a:extLst>
               </a:tr>
             </a:tbl>
           </a:graphicData>
@@ -19118,7 +19782,7 @@
           <a:noFill/>
         </p:spPr>
         <p:txBody>
-          <a:bodyPr wrap="square" anchor="t" lIns="0" rIns="0" tIns="0" bIns="0">
+          <a:bodyPr wrap="square" lIns="0" tIns="0" rIns="0" bIns="0" anchor="t">
             <a:spAutoFit/>
           </a:bodyPr>
           <a:lstStyle/>
